--- a/praesentation/Audio-Recorder-App-Praesentation.pptx
+++ b/praesentation/Audio-Recorder-App-Praesentation.pptx
@@ -18,9 +18,11 @@
     <p:sldId id="266" r:id="rId12"/>
     <p:sldId id="267" r:id="rId13"/>
     <p:sldId id="268" r:id="rId14"/>
+    <p:sldId id="269" r:id="rId15"/>
+    <p:sldId id="270" r:id="rId16"/>
   </p:sldIdLst>
   <p:notesMasterIdLst>
-    <p:notesMasterId r:id="rId15"/>
+    <p:notesMasterId r:id="rId17"/>
   </p:notesMasterIdLst>
   <p:sldSz cx="12192000" cy="6858000"/>
   <p:notesSz cx="6858000" cy="12192000"/>
@@ -602,7 +604,7 @@
           <a:p>
             <a:r>
               <a:rPr lang="en-US" dirty="0"/>
-              <a:t>Der Schlüssel lag im Quelltext, weil eine frühere Fassung ihn dort brauchte. Der eigentliche Fehler war nicht das Hinschreiben, sondern dass es niemandem auffiel, bevor das Repository öffentlich war. Wichtig zu verstehen: Eine Datei zu löschen reicht nicht — die Versionsverwaltung hebt jede frühere Fassung auf. Es musste die komplette Historie umgeschrieben werden.</a:t>
+              <a:t>Beide Blocker lagen außerhalb unseres Codes. Das erste kostet besonders viel Zeit, weil die Fehlermeldung in die Irre führt: Sie klingt nach einem Sicherheitsproblem auf unserer Seite, tatsächlich war die Adresse schlicht veraltet. Das zweite Problem haben wir nicht nur bei uns gelöst, sondern im Projekt festgeschrieben — damit es niemand sonst noch einmal hat.</a:t>
             </a:r>
             <a:endParaRPr lang="en-US" dirty="0"/>
           </a:p>
@@ -690,7 +692,7 @@
           <a:p>
             <a:r>
               <a:rPr lang="en-US" dirty="0"/>
-              <a:t>Das ist der Punkt, der uns am meisten geärgert hat. Der ganze Sinn eines hybriden Ansatzes ist, dass man einmal schreibt und auf beiden Systemen ausliefert. Genau das konnten wir nicht zeigen — nicht weil der Code es nicht hergäbe, sondern weil ein iOS-Build zwingend einen Mac voraussetzt. Die Plattformunabhängigkeit der Software hilft nichts gegen die Geräteabhängigkeit der Werkzeuge.</a:t>
+              <a:t>Drei Dinge, die man einer Plattform nicht ansieht, bis man dagegen läuft. Gemeinsamer Nenner: Alle drei sind in der Dokumentation beschrieben — zwei davon sogar in den Tipps der Aufgabenstellung. Wir haben sie erst verstanden, nachdem wir den Fehler hatten.</a:t>
             </a:r>
             <a:endParaRPr lang="en-US" dirty="0"/>
           </a:p>
@@ -778,7 +780,7 @@
           <a:p>
             <a:r>
               <a:rPr lang="en-US" dirty="0"/>
-              <a:t>Sechs Punkte, die über dieses Projekt hinaus gelten. Der erste ist für uns der wichtigste: Wir hatten eine funktionierende App, die die Aufgabe verfehlt hat — und haben das nicht beim Testen gemerkt, sondern erst beim Abgleich mit dem Aufgabenblatt.</a:t>
+              <a:t>Der Schlüssel lag im Quelltext, weil eine frühere Fassung ihn dort brauchte. Der eigentliche Fehler war nicht das Hinschreiben, sondern dass es niemandem auffiel, bevor das Repository öffentlich war. Wichtig zu verstehen: Eine Datei zu löschen reicht nicht — die Versionsverwaltung hebt jede frühere Fassung auf. Es musste die komplette Historie umgeschrieben werden.</a:t>
             </a:r>
             <a:endParaRPr lang="en-US" dirty="0"/>
           </a:p>
@@ -866,7 +868,7 @@
           <a:p>
             <a:r>
               <a:rPr lang="en-US" dirty="0"/>
-              <a:t>Abschluss. Wichtigste Botschaft: Der schwierige Teil lag nicht im Code, sondern drumherum — und die entscheidende Entscheidung war, einen funktionierenden Stand aufzugeben. Danach Raum für Fragen.</a:t>
+              <a:t>Das ist der Punkt, der uns am meisten geärgert hat. Der ganze Sinn eines hybriden Ansatzes ist, dass man einmal schreibt und auf beiden Systemen ausliefert. Genau das konnten wir nicht zeigen — nicht weil der Code es nicht hergäbe, sondern weil ein iOS-Build zwingend einen Mac voraussetzt. Die Plattformunabhängigkeit der Software hilft nichts gegen die Geräteabhängigkeit der Werkzeuge.</a:t>
             </a:r>
             <a:endParaRPr lang="en-US" dirty="0"/>
           </a:p>
@@ -890,6 +892,182 @@
             <a:fld id="{F7021451-1387-4CA6-816F-3879F97B5CBC}" type="slidenum">
               <a:rPr lang="en-US"/>
               <a:t>13</a:t>
+            </a:fld>
+            <a:endParaRPr lang="en-US"/>
+          </a:p>
+        </p:txBody>
+      </p:sp>
+    </p:spTree>
+    <p:extLst>
+      <p:ext uri="{BB962C8B-B14F-4D97-AF65-F5344CB8AC3E}">
+        <p14:creationId xmlns:p14="http://schemas.microsoft.com/office/powerpoint/2010/main" val="1024086991"/>
+      </p:ext>
+    </p:extLst>
+  </p:cSld>
+  <p:clrMapOvr>
+    <a:masterClrMapping/>
+  </p:clrMapOvr>
+</p:notes>
+</file>
+
+<file path=ppt/notesSlides/notesSlide14.xml><?xml version="1.0" encoding="utf-8"?>
+<p:notes xmlns:a="http://schemas.openxmlformats.org/drawingml/2006/main" xmlns:r="http://schemas.openxmlformats.org/officeDocument/2006/relationships" xmlns:p="http://schemas.openxmlformats.org/presentationml/2006/main">
+  <p:cSld>
+    <p:spTree>
+      <p:nvGrpSpPr>
+        <p:cNvPr id="1" name=""/>
+        <p:cNvGrpSpPr/>
+        <p:nvPr/>
+      </p:nvGrpSpPr>
+      <p:grpSpPr>
+        <a:xfrm>
+          <a:off x="0" y="0"/>
+          <a:ext cx="0" cy="0"/>
+          <a:chOff x="0" y="0"/>
+          <a:chExt cx="0" cy="0"/>
+        </a:xfrm>
+      </p:grpSpPr>
+      <p:sp>
+        <p:nvSpPr>
+          <p:cNvPr id="2" name="Slide Image Placeholder 1"/>
+          <p:cNvSpPr>
+            <a:spLocks noGrp="1" noRot="1" noChangeAspect="1"/>
+          </p:cNvSpPr>
+          <p:nvPr>
+            <p:ph type="sldImg"/>
+          </p:nvPr>
+        </p:nvSpPr>
+        <p:spPr/>
+      </p:sp>
+      <p:sp>
+        <p:nvSpPr>
+          <p:cNvPr id="3" name="Notes Placeholder 2"/>
+          <p:cNvSpPr>
+            <a:spLocks noGrp="1"/>
+          </p:cNvSpPr>
+          <p:nvPr>
+            <p:ph type="body" idx="1"/>
+          </p:nvPr>
+        </p:nvSpPr>
+        <p:spPr/>
+        <p:txBody>
+          <a:bodyPr/>
+          <a:lstStyle/>
+          <a:p>
+            <a:r>
+              <a:rPr lang="en-US" dirty="0"/>
+              <a:t>Sechs Punkte, die über dieses Projekt hinaus gelten. Der erste ist für uns der wichtigste: Wir hatten eine funktionierende App, die die Aufgabe verfehlt hat — und haben das nicht beim Testen gemerkt, sondern erst beim Abgleich mit dem Aufgabenblatt.</a:t>
+            </a:r>
+            <a:endParaRPr lang="en-US" dirty="0"/>
+          </a:p>
+        </p:txBody>
+      </p:sp>
+      <p:sp>
+        <p:nvSpPr>
+          <p:cNvPr id="4" name="Slide Number Placeholder 3"/>
+          <p:cNvSpPr>
+            <a:spLocks noGrp="1"/>
+          </p:cNvSpPr>
+          <p:nvPr>
+            <p:ph type="sldNum" sz="quarter" idx="10"/>
+          </p:nvPr>
+        </p:nvSpPr>
+        <p:spPr/>
+        <p:txBody>
+          <a:bodyPr/>
+          <a:lstStyle/>
+          <a:p>
+            <a:fld id="{F7021451-1387-4CA6-816F-3879F97B5CBC}" type="slidenum">
+              <a:rPr lang="en-US"/>
+              <a:t>14</a:t>
+            </a:fld>
+            <a:endParaRPr lang="en-US"/>
+          </a:p>
+        </p:txBody>
+      </p:sp>
+    </p:spTree>
+    <p:extLst>
+      <p:ext uri="{BB962C8B-B14F-4D97-AF65-F5344CB8AC3E}">
+        <p14:creationId xmlns:p14="http://schemas.microsoft.com/office/powerpoint/2010/main" val="1024086991"/>
+      </p:ext>
+    </p:extLst>
+  </p:cSld>
+  <p:clrMapOvr>
+    <a:masterClrMapping/>
+  </p:clrMapOvr>
+</p:notes>
+</file>
+
+<file path=ppt/notesSlides/notesSlide15.xml><?xml version="1.0" encoding="utf-8"?>
+<p:notes xmlns:a="http://schemas.openxmlformats.org/drawingml/2006/main" xmlns:r="http://schemas.openxmlformats.org/officeDocument/2006/relationships" xmlns:p="http://schemas.openxmlformats.org/presentationml/2006/main">
+  <p:cSld>
+    <p:spTree>
+      <p:nvGrpSpPr>
+        <p:cNvPr id="1" name=""/>
+        <p:cNvGrpSpPr/>
+        <p:nvPr/>
+      </p:nvGrpSpPr>
+      <p:grpSpPr>
+        <a:xfrm>
+          <a:off x="0" y="0"/>
+          <a:ext cx="0" cy="0"/>
+          <a:chOff x="0" y="0"/>
+          <a:chExt cx="0" cy="0"/>
+        </a:xfrm>
+      </p:grpSpPr>
+      <p:sp>
+        <p:nvSpPr>
+          <p:cNvPr id="2" name="Slide Image Placeholder 1"/>
+          <p:cNvSpPr>
+            <a:spLocks noGrp="1" noRot="1" noChangeAspect="1"/>
+          </p:cNvSpPr>
+          <p:nvPr>
+            <p:ph type="sldImg"/>
+          </p:nvPr>
+        </p:nvSpPr>
+        <p:spPr/>
+      </p:sp>
+      <p:sp>
+        <p:nvSpPr>
+          <p:cNvPr id="3" name="Notes Placeholder 2"/>
+          <p:cNvSpPr>
+            <a:spLocks noGrp="1"/>
+          </p:cNvSpPr>
+          <p:nvPr>
+            <p:ph type="body" idx="1"/>
+          </p:nvPr>
+        </p:nvSpPr>
+        <p:spPr/>
+        <p:txBody>
+          <a:bodyPr/>
+          <a:lstStyle/>
+          <a:p>
+            <a:r>
+              <a:rPr lang="en-US" dirty="0"/>
+              <a:t>Abschluss. Wichtigste Botschaft: Der schwierige Teil lag nicht im Code, sondern drumherum — und die entscheidende Entscheidung war, einen funktionierenden Stand aufzugeben. Danach Raum für Fragen.</a:t>
+            </a:r>
+            <a:endParaRPr lang="en-US" dirty="0"/>
+          </a:p>
+        </p:txBody>
+      </p:sp>
+      <p:sp>
+        <p:nvSpPr>
+          <p:cNvPr id="4" name="Slide Number Placeholder 3"/>
+          <p:cNvSpPr>
+            <a:spLocks noGrp="1"/>
+          </p:cNvSpPr>
+          <p:nvPr>
+            <p:ph type="sldNum" sz="quarter" idx="10"/>
+          </p:nvPr>
+        </p:nvSpPr>
+        <p:spPr/>
+        <p:txBody>
+          <a:bodyPr/>
+          <a:lstStyle/>
+          <a:p>
+            <a:fld id="{F7021451-1387-4CA6-816F-3879F97B5CBC}" type="slidenum">
+              <a:rPr lang="en-US"/>
+              <a:t>15</a:t>
             </a:fld>
             <a:endParaRPr lang="en-US"/>
           </a:p>
@@ -1042,7 +1220,7 @@
           <a:p>
             <a:r>
               <a:rPr lang="en-US" dirty="0"/>
-              <a:t>Kurzer Blick auf das fertige Ergebnis. Alle elf Anforderungen sind umgesetzt. Bemerkenswert: Die gesamte App-Logik steckt in einer einzigen JavaScript-Datei — dazu später mehr beim Thema Dateistruktur. Hier bei Bedarf einen Screenshot oder eine kurze Live-Demo einbauen.</a:t>
+              <a:t>Kurzer Blick auf das fertige Ergebnis. Alle elf Anforderungen sind umgesetzt. Bemerkenswert: Die gesamte App-Logik steckt in einer einzigen JavaScript-Datei — dazu später mehr beim Thema Dateistruktur. Direkt im Anschluss folgt die Live-Demo - hier also nicht zu lange aufhalten.</a:t>
             </a:r>
             <a:endParaRPr lang="en-US" dirty="0"/>
           </a:p>
@@ -1130,7 +1308,7 @@
           <a:p>
             <a:r>
               <a:rPr lang="en-US" dirty="0"/>
-              <a:t>Wir haben die drei Ansätze gegenübergestellt. Entschieden hat am Ende nicht die Abwägung, sondern die Aufgabenstellung: Die fünf vorgegebenen Plugins existieren ausschließlich für Capacitor. Damit war hybrid gesetzt.</a:t>
+              <a:t>Programmpunkt Live-Demo. Reihenfolge bewusst so gewaehlt, dass jede der elf Anforderungen einmal vorkommt und die Persistenz am Ende sichtbar wird. Das Geraet vorher entsperrt und mit einer Beispielaufnahme vorbereitet halten, falls die Aufnahme live nicht klappt.</a:t>
             </a:r>
             <a:endParaRPr lang="en-US" dirty="0"/>
           </a:p>
@@ -1218,7 +1396,7 @@
           <a:p>
             <a:r>
               <a:rPr lang="en-US" dirty="0"/>
-              <a:t>Fünf Phasen. Der dritte Schritt ist der interessante: Wir mussten einen fertigen, funktionierenden Stand wegwerfen, weil er die Aufgabe nicht erfüllt hat. Warum, das kommt auf der übernächsten Folie.</a:t>
+              <a:t>Wir haben die drei Ansätze gegenübergestellt. Entschieden hat am Ende nicht die Abwägung, sondern die Aufgabenstellung: Die fünf vorgegebenen Plugins existieren ausschließlich für Capacitor. Damit war hybrid gesetzt.</a:t>
             </a:r>
             <a:endParaRPr lang="en-US" dirty="0"/>
           </a:p>
@@ -1306,7 +1484,7 @@
           <a:p>
             <a:r>
               <a:rPr lang="en-US" dirty="0"/>
-              <a:t>Wir haben Claude und Gemini als Agenten eingesetzt — also nicht nur zum Fragen, sondern zum Arbeiten am Projekt. Der größte Nutzen lag beim Überblick: Ein Android-Projekt erzeugt auf einen Schlag sechzig Dateien, und ohne Vorwissen sieht man nicht, welche fünf davon zählen. Die Kehrseite steht rechts — und die hat uns tatsächlich getroffen, siehe nächste Folie.</a:t>
+              <a:t>Die fuenf Plugins links, der Mechanismus rechts. Kernaussage: Ein Plugin ist nativer Android-Code mit einer JavaScript-Schnittstelle davor. Wir schreiben AudioRecorder.startRecording(), die Bridge reicht das durch, und unten laeuft ganz gewoehnlicher Kotlin-Code gegen die Android-Schnittstellen. Ohne Plugin gibt es keinen Zugriff - genau das ist der Preis des hybriden Ansatzes.</a:t>
             </a:r>
             <a:endParaRPr lang="en-US" dirty="0"/>
           </a:p>
@@ -1394,7 +1572,7 @@
           <a:p>
             <a:r>
               <a:rPr lang="en-US" dirty="0"/>
-              <a:t>Das war unser größtes Problem — und es sah lange wie gar keines aus. Die App lief, die Liste funktionierte, Aufnehmen und Abspielen ging. Nur war es eine native Kotlin-App, in der die geforderten Plugins nachgebaut statt benutzt wurden. Im Quelltext standen sogar Kommentare wie "ahmt das Filesystem-Plugin nach". Aufgefallen ist es erst beim Abgleich mit der Aufgabenstellung — nicht beim Testen.</a:t>
+              <a:t>Fünf Phasen. Der dritte Schritt ist der interessante: Wir mussten einen fertigen, funktionierenden Stand wegwerfen, weil er die Aufgabe nicht erfüllt hat. Warum, das kommt auf der übernächsten Folie.</a:t>
             </a:r>
             <a:endParaRPr lang="en-US" dirty="0"/>
           </a:p>
@@ -1482,7 +1660,7 @@
           <a:p>
             <a:r>
               <a:rPr lang="en-US" dirty="0"/>
-              <a:t>Beide Blocker lagen außerhalb unseres Codes. Das erste kostet besonders viel Zeit, weil die Fehlermeldung in die Irre führt: Sie klingt nach einem Sicherheitsproblem auf unserer Seite, tatsächlich war die Adresse schlicht veraltet. Das zweite Problem haben wir nicht nur bei uns gelöst, sondern im Projekt festgeschrieben — damit es niemand sonst noch einmal hat.</a:t>
+              <a:t>Wir haben Claude und Gemini als Agenten eingesetzt — also nicht nur zum Fragen, sondern zum Arbeiten am Projekt. Der größte Nutzen lag beim Überblick: Ein Android-Projekt erzeugt auf einen Schlag sechzig Dateien, und ohne Vorwissen sieht man nicht, welche fünf davon zählen. Die Kehrseite steht rechts — und die hat uns tatsächlich getroffen, siehe nächste Folie.</a:t>
             </a:r>
             <a:endParaRPr lang="en-US" dirty="0"/>
           </a:p>
@@ -1570,7 +1748,7 @@
           <a:p>
             <a:r>
               <a:rPr lang="en-US" dirty="0"/>
-              <a:t>Drei Dinge, die man einer Plattform nicht ansieht, bis man dagegen läuft. Gemeinsamer Nenner: Alle drei sind in der Dokumentation beschrieben — zwei davon sogar in den Tipps der Aufgabenstellung. Wir haben sie erst verstanden, nachdem wir den Fehler hatten.</a:t>
+              <a:t>Das war unser größtes Problem — und es sah lange wie gar keines aus. Die App lief, die Liste funktionierte, Aufnehmen und Abspielen ging. Nur war es eine native Kotlin-App, in der die geforderten Plugins nachgebaut statt benutzt wurden. Im Quelltext standen sogar Kommentare wie "ahmt das Filesystem-Plugin nach". Aufgefallen ist es erst beim Abgleich mit der Aufgabenstellung — nicht beim Testen.</a:t>
             </a:r>
             <a:endParaRPr lang="en-US" dirty="0"/>
           </a:p>
@@ -2165,7 +2343,7 @@
                 <a:ea typeface="Cambria" pitchFamily="34" charset="-122"/>
                 <a:cs typeface="Cambria" pitchFamily="34" charset="-120"/>
               </a:rPr>
-              <a:t>Problem 4: Ein Geheimnis im öffentlichen Repository</a:t>
+              <a:t>Problem 2: Die Werkzeugkette</a:t>
             </a:r>
             <a:endParaRPr lang="en-US" sz="3200" dirty="0"/>
           </a:p>
@@ -2173,99 +2351,57 @@
       </p:sp>
       <p:sp>
         <p:nvSpPr>
-          <p:cNvPr id="4" name="Shape 2"/>
-          <p:cNvSpPr/>
-          <p:nvPr/>
-        </p:nvSpPr>
-        <p:spPr>
-          <a:xfrm>
-            <a:off x="640080" y="1600200"/>
-            <a:ext cx="10911535" cy="1371600"/>
+          <p:cNvPr id="4" name="Text 2"/>
+          <p:cNvSpPr/>
+          <p:nvPr/>
+        </p:nvSpPr>
+        <p:spPr>
+          <a:xfrm>
+            <a:off x="932688" y="932688"/>
+            <a:ext cx="10618927" cy="320040"/>
+          </a:xfrm>
+          <a:prstGeom prst="rect">
+            <a:avLst/>
+          </a:prstGeom>
+          <a:noFill/>
+          <a:ln/>
+        </p:spPr>
+        <p:txBody>
+          <a:bodyPr wrap="square" lIns="0" tIns="0" rIns="0" bIns="0" rtlCol="0" anchor="ctr"/>
+          <a:lstStyle/>
+          <a:p>
+            <a:pPr indent="0" marL="0">
+              <a:buNone/>
+            </a:pPr>
+            <a:r>
+              <a:rPr lang="en-US" sz="1400" dirty="0">
+                <a:solidFill>
+                  <a:srgbClr val="6B7280"/>
+                </a:solidFill>
+                <a:latin typeface="Calibri" pitchFamily="34" charset="0"/>
+                <a:ea typeface="Calibri" pitchFamily="34" charset="-122"/>
+                <a:cs typeface="Calibri" pitchFamily="34" charset="-120"/>
+              </a:rPr>
+              <a:t>Zwei Blocker, die nichts mit unserem Code zu tun hatten</a:t>
+            </a:r>
+            <a:endParaRPr lang="en-US" sz="1400" dirty="0"/>
+          </a:p>
+        </p:txBody>
+      </p:sp>
+      <p:sp>
+        <p:nvSpPr>
+          <p:cNvPr id="5" name="Shape 3"/>
+          <p:cNvSpPr/>
+          <p:nvPr/>
+        </p:nvSpPr>
+        <p:spPr>
+          <a:xfrm>
+            <a:off x="640080" y="1645920"/>
+            <a:ext cx="5227168" cy="4023360"/>
           </a:xfrm>
           <a:prstGeom prst="roundRect">
             <a:avLst>
-              <a:gd name="adj" fmla="val 5333"/>
-            </a:avLst>
-          </a:prstGeom>
-          <a:solidFill>
-            <a:srgbClr val="0F1419"/>
-          </a:solidFill>
-          <a:ln/>
-        </p:spPr>
-      </p:sp>
-      <p:sp>
-        <p:nvSpPr>
-          <p:cNvPr id="5" name="Shape 3"/>
-          <p:cNvSpPr/>
-          <p:nvPr/>
-        </p:nvSpPr>
-        <p:spPr>
-          <a:xfrm>
-            <a:off x="1005840" y="1993392"/>
-            <a:ext cx="164592" cy="164592"/>
-          </a:xfrm>
-          <a:prstGeom prst="ellipse">
-            <a:avLst/>
-          </a:prstGeom>
-          <a:solidFill>
-            <a:srgbClr val="E23E3E"/>
-          </a:solidFill>
-          <a:ln/>
-        </p:spPr>
-      </p:sp>
-      <p:sp>
-        <p:nvSpPr>
-          <p:cNvPr id="6" name="Text 4"/>
-          <p:cNvSpPr/>
-          <p:nvPr/>
-        </p:nvSpPr>
-        <p:spPr>
-          <a:xfrm>
-            <a:off x="1353312" y="1783080"/>
-            <a:ext cx="9814255" cy="1005840"/>
-          </a:xfrm>
-          <a:prstGeom prst="rect">
-            <a:avLst/>
-          </a:prstGeom>
-          <a:noFill/>
-          <a:ln/>
-        </p:spPr>
-        <p:txBody>
-          <a:bodyPr wrap="square" lIns="0" tIns="0" rIns="0" bIns="0" rtlCol="0" anchor="ctr"/>
-          <a:lstStyle/>
-          <a:p>
-            <a:pPr indent="0" marL="0">
-              <a:buNone/>
-            </a:pPr>
-            <a:r>
-              <a:rPr lang="en-US" sz="1900" dirty="0">
-                <a:solidFill>
-                  <a:srgbClr val="FFFFFF"/>
-                </a:solidFill>
-                <a:latin typeface="Cambria" pitchFamily="34" charset="0"/>
-                <a:ea typeface="Cambria" pitchFamily="34" charset="-122"/>
-                <a:cs typeface="Cambria" pitchFamily="34" charset="-120"/>
-              </a:rPr>
-              <a:t>Der Lizenzschlüssel stand im Quelltext — in einem öffentlich sichtbaren Repository.</a:t>
-            </a:r>
-            <a:endParaRPr lang="en-US" sz="1900" dirty="0"/>
-          </a:p>
-        </p:txBody>
-      </p:sp>
-      <p:sp>
-        <p:nvSpPr>
-          <p:cNvPr id="7" name="Shape 5"/>
-          <p:cNvSpPr/>
-          <p:nvPr/>
-        </p:nvSpPr>
-        <p:spPr>
-          <a:xfrm>
-            <a:off x="640080" y="3200400"/>
-            <a:ext cx="5227168" cy="2651760"/>
-          </a:xfrm>
-          <a:prstGeom prst="roundRect">
-            <a:avLst>
-              <a:gd name="adj" fmla="val 2759"/>
+              <a:gd name="adj" fmla="val 1818"/>
             </a:avLst>
           </a:prstGeom>
           <a:solidFill>
@@ -2276,14 +2412,73 @@
       </p:sp>
       <p:sp>
         <p:nvSpPr>
+          <p:cNvPr id="6" name="Shape 4"/>
+          <p:cNvSpPr/>
+          <p:nvPr/>
+        </p:nvSpPr>
+        <p:spPr>
+          <a:xfrm>
+            <a:off x="960120" y="1874520"/>
+            <a:ext cx="384048" cy="384048"/>
+          </a:xfrm>
+          <a:prstGeom prst="ellipse">
+            <a:avLst/>
+          </a:prstGeom>
+          <a:solidFill>
+            <a:srgbClr val="2F6FED"/>
+          </a:solidFill>
+          <a:ln/>
+        </p:spPr>
+      </p:sp>
+      <p:sp>
+        <p:nvSpPr>
+          <p:cNvPr id="7" name="Text 5"/>
+          <p:cNvSpPr/>
+          <p:nvPr/>
+        </p:nvSpPr>
+        <p:spPr>
+          <a:xfrm>
+            <a:off x="960120" y="1874520"/>
+            <a:ext cx="384048" cy="384048"/>
+          </a:xfrm>
+          <a:prstGeom prst="rect">
+            <a:avLst/>
+          </a:prstGeom>
+          <a:noFill/>
+          <a:ln/>
+        </p:spPr>
+        <p:txBody>
+          <a:bodyPr wrap="square" lIns="0" tIns="0" rIns="0" bIns="0" rtlCol="0" anchor="ctr"/>
+          <a:lstStyle/>
+          <a:p>
+            <a:pPr algn="ctr" indent="0" marL="0">
+              <a:buNone/>
+            </a:pPr>
+            <a:r>
+              <a:rPr lang="en-US" sz="1500" b="1" dirty="0">
+                <a:solidFill>
+                  <a:srgbClr val="FFFFFF"/>
+                </a:solidFill>
+                <a:latin typeface="Calibri" pitchFamily="34" charset="0"/>
+                <a:ea typeface="Calibri" pitchFamily="34" charset="-122"/>
+                <a:cs typeface="Calibri" pitchFamily="34" charset="-120"/>
+              </a:rPr>
+              <a:t>1</a:t>
+            </a:r>
+            <a:endParaRPr lang="en-US" sz="1500" dirty="0"/>
+          </a:p>
+        </p:txBody>
+      </p:sp>
+      <p:sp>
+        <p:nvSpPr>
           <p:cNvPr id="8" name="Text 6"/>
           <p:cNvSpPr/>
           <p:nvPr/>
         </p:nvSpPr>
         <p:spPr>
           <a:xfrm>
-            <a:off x="960120" y="3401568"/>
-            <a:ext cx="4587088" cy="320040"/>
+            <a:off x="1463040" y="1874520"/>
+            <a:ext cx="4084168" cy="411480"/>
           </a:xfrm>
           <a:prstGeom prst="rect">
             <a:avLst/>
@@ -2307,7 +2502,7 @@
                 <a:ea typeface="Calibri" pitchFamily="34" charset="-122"/>
                 <a:cs typeface="Calibri" pitchFamily="34" charset="-120"/>
               </a:rPr>
-              <a:t>Warum das mehr ist als ein Schönheitsfehler</a:t>
+              <a:t>Die Bezugsquelle war umgezogen</a:t>
             </a:r>
             <a:endParaRPr lang="en-US" sz="1500" dirty="0"/>
           </a:p>
@@ -2321,8 +2516,8 @@
         </p:nvSpPr>
         <p:spPr>
           <a:xfrm>
-            <a:off x="960120" y="3794760"/>
-            <a:ext cx="4587088" cy="1828800"/>
+            <a:off x="960120" y="2423160"/>
+            <a:ext cx="4587088" cy="3017520"/>
           </a:xfrm>
           <a:prstGeom prst="rect">
             <a:avLst/>
@@ -2334,12 +2529,8 @@
           <a:bodyPr wrap="square" lIns="0" tIns="0" rIns="0" bIns="0" rtlCol="0" anchor="t"/>
           <a:lstStyle/>
           <a:p>
-            <a:pPr marL="342900" indent="-342900">
-              <a:spcAft>
-                <a:spcPts val="1000"/>
-              </a:spcAft>
-              <a:buSzPct val="100000"/>
-              <a:buChar char="•"/>
+            <a:pPr indent="0" marL="0">
+              <a:buNone/>
             </a:pPr>
             <a:r>
               <a:rPr lang="en-US" sz="1300" dirty="0">
@@ -2350,17 +2541,19 @@
                 <a:ea typeface="Calibri" pitchFamily="34" charset="-122"/>
                 <a:cs typeface="Calibri" pitchFamily="34" charset="-120"/>
               </a:rPr>
-              <a:t>Die Aufgabenstellung untersagt die Veröffentlichung ausdrücklich</a:t>
+              <a:t>Die beiden kostenpflichtigen Plugins liegen in einer privaten Paketquelle. Die im Kurs hinterlegte Adresse existierte nicht mehr — sie zeigte auf eine geparkte Domain mit abgelaufenem Zertifikat.</a:t>
             </a:r>
             <a:endParaRPr lang="en-US" sz="1300" dirty="0"/>
           </a:p>
           <a:p>
-            <a:pPr marL="342900" indent="-342900">
-              <a:spcAft>
-                <a:spcPts val="1000"/>
-              </a:spcAft>
-              <a:buSzPct val="100000"/>
-              <a:buChar char="•"/>
+            <a:pPr indent="0" marL="0">
+              <a:buNone/>
+            </a:pPr>
+            <a:endParaRPr lang="en-US" sz="1300" dirty="0"/>
+          </a:p>
+          <a:p>
+            <a:pPr indent="0" marL="0">
+              <a:buNone/>
             </a:pPr>
             <a:r>
               <a:rPr lang="en-US" sz="1300" dirty="0">
@@ -2371,31 +2564,10 @@
                 <a:ea typeface="Calibri" pitchFamily="34" charset="-122"/>
                 <a:cs typeface="Calibri" pitchFamily="34" charset="-120"/>
               </a:rPr>
-              <a:t>Löschen im aktuellen Stand genügt nicht — die Historie speichert jede Fassung</a:t>
+              <a:t>Die Fehlermeldung sprach von einem Zertifikatsproblem und legte damit eine völlig falsche Fährte. Die Lösung war eine neue Adresse, zu finden in der aktuellen Dokumentation des Anbieters.</a:t>
             </a:r>
             <a:endParaRPr lang="en-US" sz="1300" dirty="0"/>
           </a:p>
-          <a:p>
-            <a:pPr marL="342900" indent="-342900">
-              <a:spcAft>
-                <a:spcPts val="1000"/>
-              </a:spcAft>
-              <a:buSzPct val="100000"/>
-              <a:buChar char="•"/>
-            </a:pPr>
-            <a:r>
-              <a:rPr lang="en-US" sz="1300" dirty="0">
-                <a:solidFill>
-                  <a:srgbClr val="374151"/>
-                </a:solidFill>
-                <a:latin typeface="Calibri" pitchFamily="34" charset="0"/>
-                <a:ea typeface="Calibri" pitchFamily="34" charset="-122"/>
-                <a:cs typeface="Calibri" pitchFamily="34" charset="-120"/>
-              </a:rPr>
-              <a:t>Ein Schlüssel, der einmal öffentlich war, gilt als kompromittiert</a:t>
-            </a:r>
-            <a:endParaRPr lang="en-US" sz="1300" dirty="0"/>
-          </a:p>
         </p:txBody>
       </p:sp>
       <p:sp>
@@ -2406,12 +2578,12 @@
         </p:nvSpPr>
         <p:spPr>
           <a:xfrm>
-            <a:off x="6324448" y="3200400"/>
-            <a:ext cx="5227168" cy="2651760"/>
+            <a:off x="6324448" y="1645920"/>
+            <a:ext cx="5227168" cy="4023360"/>
           </a:xfrm>
           <a:prstGeom prst="roundRect">
             <a:avLst>
-              <a:gd name="adj" fmla="val 2759"/>
+              <a:gd name="adj" fmla="val 1818"/>
             </a:avLst>
           </a:prstGeom>
           <a:solidFill>
@@ -2422,14 +2594,34 @@
       </p:sp>
       <p:sp>
         <p:nvSpPr>
-          <p:cNvPr id="11" name="Text 9"/>
-          <p:cNvSpPr/>
-          <p:nvPr/>
-        </p:nvSpPr>
-        <p:spPr>
-          <a:xfrm>
-            <a:off x="6644488" y="3401568"/>
-            <a:ext cx="4587088" cy="320040"/>
+          <p:cNvPr id="11" name="Shape 9"/>
+          <p:cNvSpPr/>
+          <p:nvPr/>
+        </p:nvSpPr>
+        <p:spPr>
+          <a:xfrm>
+            <a:off x="6644488" y="1874520"/>
+            <a:ext cx="384048" cy="384048"/>
+          </a:xfrm>
+          <a:prstGeom prst="ellipse">
+            <a:avLst/>
+          </a:prstGeom>
+          <a:solidFill>
+            <a:srgbClr val="2F6FED"/>
+          </a:solidFill>
+          <a:ln/>
+        </p:spPr>
+      </p:sp>
+      <p:sp>
+        <p:nvSpPr>
+          <p:cNvPr id="12" name="Text 10"/>
+          <p:cNvSpPr/>
+          <p:nvPr/>
+        </p:nvSpPr>
+        <p:spPr>
+          <a:xfrm>
+            <a:off x="6644488" y="1874520"/>
+            <a:ext cx="384048" cy="384048"/>
           </a:xfrm>
           <a:prstGeom prst="rect">
             <a:avLst/>
@@ -2441,19 +2633,58 @@
           <a:bodyPr wrap="square" lIns="0" tIns="0" rIns="0" bIns="0" rtlCol="0" anchor="ctr"/>
           <a:lstStyle/>
           <a:p>
-            <a:pPr indent="0" marL="0">
+            <a:pPr algn="ctr" indent="0" marL="0">
               <a:buNone/>
             </a:pPr>
             <a:r>
               <a:rPr lang="en-US" sz="1500" b="1" dirty="0">
                 <a:solidFill>
+                  <a:srgbClr val="FFFFFF"/>
+                </a:solidFill>
+                <a:latin typeface="Calibri" pitchFamily="34" charset="0"/>
+                <a:ea typeface="Calibri" pitchFamily="34" charset="-122"/>
+                <a:cs typeface="Calibri" pitchFamily="34" charset="-120"/>
+              </a:rPr>
+              <a:t>2</a:t>
+            </a:r>
+            <a:endParaRPr lang="en-US" sz="1500" dirty="0"/>
+          </a:p>
+        </p:txBody>
+      </p:sp>
+      <p:sp>
+        <p:nvSpPr>
+          <p:cNvPr id="13" name="Text 11"/>
+          <p:cNvSpPr/>
+          <p:nvPr/>
+        </p:nvSpPr>
+        <p:spPr>
+          <a:xfrm>
+            <a:off x="7147408" y="1874520"/>
+            <a:ext cx="4084168" cy="411480"/>
+          </a:xfrm>
+          <a:prstGeom prst="rect">
+            <a:avLst/>
+          </a:prstGeom>
+          <a:noFill/>
+          <a:ln/>
+        </p:spPr>
+        <p:txBody>
+          <a:bodyPr wrap="square" lIns="0" tIns="0" rIns="0" bIns="0" rtlCol="0" anchor="ctr"/>
+          <a:lstStyle/>
+          <a:p>
+            <a:pPr indent="0" marL="0">
+              <a:buNone/>
+            </a:pPr>
+            <a:r>
+              <a:rPr lang="en-US" sz="1500" b="1" dirty="0">
+                <a:solidFill>
                   <a:srgbClr val="111827"/>
                 </a:solidFill>
                 <a:latin typeface="Calibri" pitchFamily="34" charset="0"/>
                 <a:ea typeface="Calibri" pitchFamily="34" charset="-122"/>
                 <a:cs typeface="Calibri" pitchFamily="34" charset="-120"/>
               </a:rPr>
-              <a:t>Was wir getan haben</a:t>
+              <a:t>Die Java-Version zwischen zwei Stühlen</a:t>
             </a:r>
             <a:endParaRPr lang="en-US" sz="1500" dirty="0"/>
           </a:p>
@@ -2461,14 +2692,14 @@
       </p:sp>
       <p:sp>
         <p:nvSpPr>
-          <p:cNvPr id="12" name="Text 10"/>
-          <p:cNvSpPr/>
-          <p:nvPr/>
-        </p:nvSpPr>
-        <p:spPr>
-          <a:xfrm>
-            <a:off x="6644488" y="3794760"/>
-            <a:ext cx="4587088" cy="1828800"/>
+          <p:cNvPr id="14" name="Text 12"/>
+          <p:cNvSpPr/>
+          <p:nvPr/>
+        </p:nvSpPr>
+        <p:spPr>
+          <a:xfrm>
+            <a:off x="6644488" y="2423160"/>
+            <a:ext cx="4587088" cy="3017520"/>
           </a:xfrm>
           <a:prstGeom prst="rect">
             <a:avLst/>
@@ -2480,12 +2711,8 @@
           <a:bodyPr wrap="square" lIns="0" tIns="0" rIns="0" bIns="0" rtlCol="0" anchor="t"/>
           <a:lstStyle/>
           <a:p>
-            <a:pPr marL="342900" indent="-342900">
-              <a:spcAft>
-                <a:spcPts val="1000"/>
-              </a:spcAft>
-              <a:buSzPct val="100000"/>
-              <a:buChar char="•"/>
+            <a:pPr indent="0" marL="0">
+              <a:buNone/>
             </a:pPr>
             <a:r>
               <a:rPr lang="en-US" sz="1300" dirty="0">
@@ -2496,17 +2723,19 @@
                 <a:ea typeface="Calibri" pitchFamily="34" charset="-122"/>
                 <a:cs typeface="Calibri" pitchFamily="34" charset="-120"/>
               </a:rPr>
-              <a:t>Schlüssel aus dem Code entfernt und in die lokale Konfiguration verlagert</a:t>
+              <a:t>Der Build verlangt eine ganz bestimmte Java-Version. Zu alt und zu neu scheitern beide — mit Meldungen, die den Zusammenhang nicht erkennen lassen.</a:t>
             </a:r>
             <a:endParaRPr lang="en-US" sz="1300" dirty="0"/>
           </a:p>
           <a:p>
-            <a:pPr marL="342900" indent="-342900">
-              <a:spcAft>
-                <a:spcPts val="1000"/>
-              </a:spcAft>
-              <a:buSzPct val="100000"/>
-              <a:buChar char="•"/>
+            <a:pPr indent="0" marL="0">
+              <a:buNone/>
+            </a:pPr>
+            <a:endParaRPr lang="en-US" sz="1300" dirty="0"/>
+          </a:p>
+          <a:p>
+            <a:pPr indent="0" marL="0">
+              <a:buNone/>
             </a:pPr>
             <a:r>
               <a:rPr lang="en-US" sz="1300" dirty="0">
@@ -2517,28 +2746,7 @@
                 <a:ea typeface="Calibri" pitchFamily="34" charset="-122"/>
                 <a:cs typeface="Calibri" pitchFamily="34" charset="-120"/>
               </a:rPr>
-              <a:t>Gesamte Versionshistorie umgeschrieben und gegengeprüft</a:t>
-            </a:r>
-            <a:endParaRPr lang="en-US" sz="1300" dirty="0"/>
-          </a:p>
-          <a:p>
-            <a:pPr marL="342900" indent="-342900">
-              <a:spcAft>
-                <a:spcPts val="1000"/>
-              </a:spcAft>
-              <a:buSzPct val="100000"/>
-              <a:buChar char="•"/>
-            </a:pPr>
-            <a:r>
-              <a:rPr lang="en-US" sz="1300" dirty="0">
-                <a:solidFill>
-                  <a:srgbClr val="374151"/>
-                </a:solidFill>
-                <a:latin typeface="Calibri" pitchFamily="34" charset="0"/>
-                <a:ea typeface="Calibri" pitchFamily="34" charset="-122"/>
-                <a:cs typeface="Calibri" pitchFamily="34" charset="-120"/>
-              </a:rPr>
-              <a:t>Konfigurationsdateien mit Zugangsdaten dauerhaft ausgeschlossen</a:t>
+              <a:t>Gelöst durch eine feste Vorgabe im Projekt: Das Build-System lädt sich die passende Version selbst herunter. Damit funktioniert der Build auf jedem Rechner gleich — auch beim Korrektor.</a:t>
             </a:r>
             <a:endParaRPr lang="en-US" sz="1300" dirty="0"/>
           </a:p>
@@ -2629,7 +2837,7 @@
                 <a:ea typeface="Cambria" pitchFamily="34" charset="-122"/>
                 <a:cs typeface="Cambria" pitchFamily="34" charset="-120"/>
               </a:rPr>
-              <a:t>Was wir gerne noch gemacht hätten</a:t>
+              <a:t>Problem 3: Eigenheiten der Plattform</a:t>
             </a:r>
             <a:endParaRPr lang="en-US" sz="3200" dirty="0"/>
           </a:p>
@@ -2643,12 +2851,12 @@
         </p:nvSpPr>
         <p:spPr>
           <a:xfrm>
-            <a:off x="640080" y="1645920"/>
-            <a:ext cx="5227168" cy="4023360"/>
+            <a:off x="640080" y="1600200"/>
+            <a:ext cx="10911535" cy="1371600"/>
           </a:xfrm>
           <a:prstGeom prst="roundRect">
             <a:avLst>
-              <a:gd name="adj" fmla="val 1818"/>
+              <a:gd name="adj" fmla="val 5333"/>
             </a:avLst>
           </a:prstGeom>
           <a:solidFill>
@@ -2659,14 +2867,34 @@
       </p:sp>
       <p:sp>
         <p:nvSpPr>
-          <p:cNvPr id="5" name="Text 3"/>
-          <p:cNvSpPr/>
-          <p:nvPr/>
-        </p:nvSpPr>
-        <p:spPr>
-          <a:xfrm>
-            <a:off x="960120" y="1874520"/>
-            <a:ext cx="4587088" cy="365760"/>
+          <p:cNvPr id="5" name="Shape 3"/>
+          <p:cNvSpPr/>
+          <p:nvPr/>
+        </p:nvSpPr>
+        <p:spPr>
+          <a:xfrm>
+            <a:off x="960120" y="1892808"/>
+            <a:ext cx="384048" cy="384048"/>
+          </a:xfrm>
+          <a:prstGeom prst="ellipse">
+            <a:avLst/>
+          </a:prstGeom>
+          <a:solidFill>
+            <a:srgbClr val="2F6FED"/>
+          </a:solidFill>
+          <a:ln/>
+        </p:spPr>
+      </p:sp>
+      <p:sp>
+        <p:nvSpPr>
+          <p:cNvPr id="6" name="Text 4"/>
+          <p:cNvSpPr/>
+          <p:nvPr/>
+        </p:nvSpPr>
+        <p:spPr>
+          <a:xfrm>
+            <a:off x="960120" y="1892808"/>
+            <a:ext cx="384048" cy="384048"/>
           </a:xfrm>
           <a:prstGeom prst="rect">
             <a:avLst/>
@@ -2678,11 +2906,50 @@
           <a:bodyPr wrap="square" lIns="0" tIns="0" rIns="0" bIns="0" rtlCol="0" anchor="ctr"/>
           <a:lstStyle/>
           <a:p>
-            <a:pPr indent="0" marL="0">
-              <a:buNone/>
-            </a:pPr>
-            <a:r>
-              <a:rPr lang="en-US" sz="1600" b="1" dirty="0">
+            <a:pPr algn="ctr" indent="0" marL="0">
+              <a:buNone/>
+            </a:pPr>
+            <a:r>
+              <a:rPr lang="en-US" sz="1500" b="1" dirty="0">
+                <a:solidFill>
+                  <a:srgbClr val="FFFFFF"/>
+                </a:solidFill>
+                <a:latin typeface="Calibri" pitchFamily="34" charset="0"/>
+                <a:ea typeface="Calibri" pitchFamily="34" charset="-122"/>
+                <a:cs typeface="Calibri" pitchFamily="34" charset="-120"/>
+              </a:rPr>
+              <a:t>1</a:t>
+            </a:r>
+            <a:endParaRPr lang="en-US" sz="1500" dirty="0"/>
+          </a:p>
+        </p:txBody>
+      </p:sp>
+      <p:sp>
+        <p:nvSpPr>
+          <p:cNvPr id="7" name="Text 5"/>
+          <p:cNvSpPr/>
+          <p:nvPr/>
+        </p:nvSpPr>
+        <p:spPr>
+          <a:xfrm>
+            <a:off x="1508760" y="1801368"/>
+            <a:ext cx="9677095" cy="320040"/>
+          </a:xfrm>
+          <a:prstGeom prst="rect">
+            <a:avLst/>
+          </a:prstGeom>
+          <a:noFill/>
+          <a:ln/>
+        </p:spPr>
+        <p:txBody>
+          <a:bodyPr wrap="square" lIns="0" tIns="0" rIns="0" bIns="0" rtlCol="0" anchor="ctr"/>
+          <a:lstStyle/>
+          <a:p>
+            <a:pPr indent="0" marL="0">
+              <a:buNone/>
+            </a:pPr>
+            <a:r>
+              <a:rPr lang="en-US" sz="1500" b="1" dirty="0">
                 <a:solidFill>
                   <a:srgbClr val="111827"/>
                 </a:solidFill>
@@ -2690,22 +2957,22 @@
                 <a:ea typeface="Calibri" pitchFamily="34" charset="-122"/>
                 <a:cs typeface="Calibri" pitchFamily="34" charset="-120"/>
               </a:rPr>
-              <a:t>Der Wunsch: dieselbe App für iOS</a:t>
-            </a:r>
-            <a:endParaRPr lang="en-US" sz="1600" dirty="0"/>
-          </a:p>
-        </p:txBody>
-      </p:sp>
-      <p:sp>
-        <p:nvSpPr>
-          <p:cNvPr id="6" name="Text 4"/>
-          <p:cNvSpPr/>
-          <p:nvPr/>
-        </p:nvSpPr>
-        <p:spPr>
-          <a:xfrm>
-            <a:off x="960120" y="2331720"/>
-            <a:ext cx="4587088" cy="3108960"/>
+              <a:t>Teilen scheiterte am Sicherheitsmodell</a:t>
+            </a:r>
+            <a:endParaRPr lang="en-US" sz="1500" dirty="0"/>
+          </a:p>
+        </p:txBody>
+      </p:sp>
+      <p:sp>
+        <p:nvSpPr>
+          <p:cNvPr id="8" name="Text 6"/>
+          <p:cNvSpPr/>
+          <p:nvPr/>
+        </p:nvSpPr>
+        <p:spPr>
+          <a:xfrm>
+            <a:off x="1508760" y="2148840"/>
+            <a:ext cx="9677095" cy="731520"/>
           </a:xfrm>
           <a:prstGeom prst="rect">
             <a:avLst/>
@@ -2721,7 +2988,7 @@
               <a:buNone/>
             </a:pPr>
             <a:r>
-              <a:rPr lang="en-US" sz="1350" dirty="0">
+              <a:rPr lang="en-US" sz="1250" dirty="0">
                 <a:solidFill>
                   <a:srgbClr val="374151"/>
                 </a:solidFill>
@@ -2729,67 +2996,64 @@
                 <a:ea typeface="Calibri" pitchFamily="34" charset="-122"/>
                 <a:cs typeface="Calibri" pitchFamily="34" charset="-120"/>
               </a:rPr>
-              <a:t>Genau dafür ist der hybride Ansatz gedacht: Alle fünf verwendeten Plugins unterstützen iOS. Unser Code müsste sich dafür praktisch nicht ändern — es käme eine zweite Plattform neben die bestehende.</a:t>
-            </a:r>
-            <a:endParaRPr lang="en-US" sz="1350" dirty="0"/>
-          </a:p>
-          <a:p>
-            <a:pPr indent="0" marL="0">
-              <a:buNone/>
-            </a:pPr>
-            <a:endParaRPr lang="en-US" sz="1350" dirty="0"/>
-          </a:p>
-          <a:p>
-            <a:pPr indent="0" marL="0">
-              <a:buNone/>
-            </a:pPr>
-            <a:r>
-              <a:rPr lang="en-US" sz="1350" dirty="0">
-                <a:solidFill>
-                  <a:srgbClr val="374151"/>
-                </a:solidFill>
-                <a:latin typeface="Calibri" pitchFamily="34" charset="0"/>
-                <a:ea typeface="Calibri" pitchFamily="34" charset="-122"/>
-                <a:cs typeface="Calibri" pitchFamily="34" charset="-120"/>
-              </a:rPr>
-              <a:t>Das wäre die überzeugendste Demonstration des Ansatzes gewesen: eine Codebasis, zwei Betriebssysteme.</a:t>
-            </a:r>
-            <a:endParaRPr lang="en-US" sz="1350" dirty="0"/>
-          </a:p>
-        </p:txBody>
-      </p:sp>
-      <p:sp>
-        <p:nvSpPr>
-          <p:cNvPr id="7" name="Shape 5"/>
-          <p:cNvSpPr/>
-          <p:nvPr/>
-        </p:nvSpPr>
-        <p:spPr>
-          <a:xfrm>
-            <a:off x="6324448" y="1645920"/>
-            <a:ext cx="5227168" cy="4023360"/>
+              <a:t>Android verbietet es, den eigenen Dateipfad an eine fremde App weiterzureichen. Es braucht einen kontrollierten Zugriffsweg, der ausdrücklich freigegeben werden muss. Ohne diese Freigabe bricht das Teilen ab — die Meldung nennt aber nur eine Ausnahme, keine Ursache.</a:t>
+            </a:r>
+            <a:endParaRPr lang="en-US" sz="1250" dirty="0"/>
+          </a:p>
+        </p:txBody>
+      </p:sp>
+      <p:sp>
+        <p:nvSpPr>
+          <p:cNvPr id="9" name="Shape 7"/>
+          <p:cNvSpPr/>
+          <p:nvPr/>
+        </p:nvSpPr>
+        <p:spPr>
+          <a:xfrm>
+            <a:off x="640080" y="3108960"/>
+            <a:ext cx="10911535" cy="1371600"/>
           </a:xfrm>
           <a:prstGeom prst="roundRect">
             <a:avLst>
-              <a:gd name="adj" fmla="val 1818"/>
+              <a:gd name="adj" fmla="val 5333"/>
             </a:avLst>
           </a:prstGeom>
           <a:solidFill>
-            <a:srgbClr val="0F1419"/>
+            <a:srgbClr val="F4F5F7"/>
           </a:solidFill>
           <a:ln/>
         </p:spPr>
       </p:sp>
       <p:sp>
         <p:nvSpPr>
-          <p:cNvPr id="8" name="Text 6"/>
-          <p:cNvSpPr/>
-          <p:nvPr/>
-        </p:nvSpPr>
-        <p:spPr>
-          <a:xfrm>
-            <a:off x="6644488" y="1874520"/>
-            <a:ext cx="4587088" cy="365760"/>
+          <p:cNvPr id="10" name="Shape 8"/>
+          <p:cNvSpPr/>
+          <p:nvPr/>
+        </p:nvSpPr>
+        <p:spPr>
+          <a:xfrm>
+            <a:off x="960120" y="3401568"/>
+            <a:ext cx="384048" cy="384048"/>
+          </a:xfrm>
+          <a:prstGeom prst="ellipse">
+            <a:avLst/>
+          </a:prstGeom>
+          <a:solidFill>
+            <a:srgbClr val="E23E3E"/>
+          </a:solidFill>
+          <a:ln/>
+        </p:spPr>
+      </p:sp>
+      <p:sp>
+        <p:nvSpPr>
+          <p:cNvPr id="11" name="Text 9"/>
+          <p:cNvSpPr/>
+          <p:nvPr/>
+        </p:nvSpPr>
+        <p:spPr>
+          <a:xfrm>
+            <a:off x="960120" y="3401568"/>
+            <a:ext cx="384048" cy="384048"/>
           </a:xfrm>
           <a:prstGeom prst="rect">
             <a:avLst/>
@@ -2801,11 +3065,11 @@
           <a:bodyPr wrap="square" lIns="0" tIns="0" rIns="0" bIns="0" rtlCol="0" anchor="ctr"/>
           <a:lstStyle/>
           <a:p>
-            <a:pPr indent="0" marL="0">
-              <a:buNone/>
-            </a:pPr>
-            <a:r>
-              <a:rPr lang="en-US" sz="1600" b="1" dirty="0">
+            <a:pPr algn="ctr" indent="0" marL="0">
+              <a:buNone/>
+            </a:pPr>
+            <a:r>
+              <a:rPr lang="en-US" sz="1500" b="1" dirty="0">
                 <a:solidFill>
                   <a:srgbClr val="FFFFFF"/>
                 </a:solidFill>
@@ -2813,22 +3077,61 @@
                 <a:ea typeface="Calibri" pitchFamily="34" charset="-122"/>
                 <a:cs typeface="Calibri" pitchFamily="34" charset="-120"/>
               </a:rPr>
-              <a:t>Die Hürde: Geräteabhängigkeit</a:t>
-            </a:r>
-            <a:endParaRPr lang="en-US" sz="1600" dirty="0"/>
-          </a:p>
-        </p:txBody>
-      </p:sp>
-      <p:sp>
-        <p:nvSpPr>
-          <p:cNvPr id="9" name="Text 7"/>
-          <p:cNvSpPr/>
-          <p:nvPr/>
-        </p:nvSpPr>
-        <p:spPr>
-          <a:xfrm>
-            <a:off x="6644488" y="2331720"/>
-            <a:ext cx="4587088" cy="3108960"/>
+              <a:t>2</a:t>
+            </a:r>
+            <a:endParaRPr lang="en-US" sz="1500" dirty="0"/>
+          </a:p>
+        </p:txBody>
+      </p:sp>
+      <p:sp>
+        <p:nvSpPr>
+          <p:cNvPr id="12" name="Text 10"/>
+          <p:cNvSpPr/>
+          <p:nvPr/>
+        </p:nvSpPr>
+        <p:spPr>
+          <a:xfrm>
+            <a:off x="1508760" y="3310128"/>
+            <a:ext cx="9677095" cy="320040"/>
+          </a:xfrm>
+          <a:prstGeom prst="rect">
+            <a:avLst/>
+          </a:prstGeom>
+          <a:noFill/>
+          <a:ln/>
+        </p:spPr>
+        <p:txBody>
+          <a:bodyPr wrap="square" lIns="0" tIns="0" rIns="0" bIns="0" rtlCol="0" anchor="ctr"/>
+          <a:lstStyle/>
+          <a:p>
+            <a:pPr indent="0" marL="0">
+              <a:buNone/>
+            </a:pPr>
+            <a:r>
+              <a:rPr lang="en-US" sz="1500" b="1" dirty="0">
+                <a:solidFill>
+                  <a:srgbClr val="111827"/>
+                </a:solidFill>
+                <a:latin typeface="Calibri" pitchFamily="34" charset="0"/>
+                <a:ea typeface="Calibri" pitchFamily="34" charset="-122"/>
+                <a:cs typeface="Calibri" pitchFamily="34" charset="-120"/>
+              </a:rPr>
+              <a:t>Der Emulator hat kein Mikrofon</a:t>
+            </a:r>
+            <a:endParaRPr lang="en-US" sz="1500" dirty="0"/>
+          </a:p>
+        </p:txBody>
+      </p:sp>
+      <p:sp>
+        <p:nvSpPr>
+          <p:cNvPr id="13" name="Text 11"/>
+          <p:cNvSpPr/>
+          <p:nvPr/>
+        </p:nvSpPr>
+        <p:spPr>
+          <a:xfrm>
+            <a:off x="1508760" y="3657600"/>
+            <a:ext cx="9677095" cy="731520"/>
           </a:xfrm>
           <a:prstGeom prst="rect">
             <a:avLst/>
@@ -2840,80 +3143,76 @@
           <a:bodyPr wrap="square" lIns="0" tIns="0" rIns="0" bIns="0" rtlCol="0" anchor="t"/>
           <a:lstStyle/>
           <a:p>
-            <a:pPr marL="342900" indent="-342900">
-              <a:spcAft>
-                <a:spcPts val="1200"/>
-              </a:spcAft>
-              <a:buSzPct val="100000"/>
-              <a:buChar char="•"/>
-            </a:pPr>
-            <a:r>
-              <a:rPr lang="en-US" sz="1350" dirty="0">
-                <a:solidFill>
-                  <a:srgbClr val="E5E7EB"/>
-                </a:solidFill>
-                <a:latin typeface="Calibri" pitchFamily="34" charset="0"/>
-                <a:ea typeface="Calibri" pitchFamily="34" charset="-122"/>
-                <a:cs typeface="Calibri" pitchFamily="34" charset="-120"/>
-              </a:rPr>
-              <a:t>Ein iOS-Build lässt sich nur auf einem Mac erzeugen — technisch, nicht organisatorisch bedingt</a:t>
-            </a:r>
-            <a:endParaRPr lang="en-US" sz="1350" dirty="0"/>
-          </a:p>
-          <a:p>
-            <a:pPr marL="342900" indent="-342900">
-              <a:spcAft>
-                <a:spcPts val="1200"/>
-              </a:spcAft>
-              <a:buSzPct val="100000"/>
-              <a:buChar char="•"/>
-            </a:pPr>
-            <a:r>
-              <a:rPr lang="en-US" sz="1350" dirty="0">
-                <a:solidFill>
-                  <a:srgbClr val="E5E7EB"/>
-                </a:solidFill>
-                <a:latin typeface="Calibri" pitchFamily="34" charset="0"/>
-                <a:ea typeface="Calibri" pitchFamily="34" charset="-122"/>
-                <a:cs typeface="Calibri" pitchFamily="34" charset="-120"/>
-              </a:rPr>
-              <a:t>Zum Testen der Aufnahme braucht es zusätzlich ein iPhone</a:t>
-            </a:r>
-            <a:endParaRPr lang="en-US" sz="1350" dirty="0"/>
-          </a:p>
-          <a:p>
-            <a:pPr marL="342900" indent="-342900">
-              <a:spcAft>
-                <a:spcPts val="1200"/>
-              </a:spcAft>
-              <a:buSzPct val="100000"/>
-              <a:buChar char="•"/>
-            </a:pPr>
-            <a:r>
-              <a:rPr lang="en-US" sz="1350" dirty="0">
-                <a:solidFill>
-                  <a:srgbClr val="E5E7EB"/>
-                </a:solidFill>
-                <a:latin typeface="Calibri" pitchFamily="34" charset="0"/>
-                <a:ea typeface="Calibri" pitchFamily="34" charset="-122"/>
-                <a:cs typeface="Calibri" pitchFamily="34" charset="-120"/>
-              </a:rPr>
-              <a:t>Auch auf Android war der Emulator nur begrenzt aussagekräftig; getestet wurde auf einem echten Gerät</a:t>
-            </a:r>
-            <a:endParaRPr lang="en-US" sz="1350" dirty="0"/>
-          </a:p>
-        </p:txBody>
-      </p:sp>
-      <p:sp>
-        <p:nvSpPr>
-          <p:cNvPr id="10" name="Text 8"/>
-          <p:cNvSpPr/>
-          <p:nvPr/>
-        </p:nvSpPr>
-        <p:spPr>
-          <a:xfrm>
-            <a:off x="640080" y="5897880"/>
-            <a:ext cx="10911535" cy="365760"/>
+            <a:pPr indent="0" marL="0">
+              <a:buNone/>
+            </a:pPr>
+            <a:r>
+              <a:rPr lang="en-US" sz="1250" dirty="0">
+                <a:solidFill>
+                  <a:srgbClr val="374151"/>
+                </a:solidFill>
+                <a:latin typeface="Calibri" pitchFamily="34" charset="0"/>
+                <a:ea typeface="Calibri" pitchFamily="34" charset="-122"/>
+                <a:cs typeface="Calibri" pitchFamily="34" charset="-120"/>
+              </a:rPr>
+              <a:t>Die Audioeingabe des Emulators ist standardmäßig abgeschaltet und muss erst auf das Mikrofon des Rechners umgeleitet werden. Für belastbare Aussagen zur Aufnahmequalität führt trotzdem kein Weg an echter Hardware vorbei — die Aufgabenstellung sagt das nicht ohne Grund.</a:t>
+            </a:r>
+            <a:endParaRPr lang="en-US" sz="1250" dirty="0"/>
+          </a:p>
+        </p:txBody>
+      </p:sp>
+      <p:sp>
+        <p:nvSpPr>
+          <p:cNvPr id="14" name="Shape 12"/>
+          <p:cNvSpPr/>
+          <p:nvPr/>
+        </p:nvSpPr>
+        <p:spPr>
+          <a:xfrm>
+            <a:off x="640080" y="4617720"/>
+            <a:ext cx="10911535" cy="1371600"/>
+          </a:xfrm>
+          <a:prstGeom prst="roundRect">
+            <a:avLst>
+              <a:gd name="adj" fmla="val 5333"/>
+            </a:avLst>
+          </a:prstGeom>
+          <a:solidFill>
+            <a:srgbClr val="F4F5F7"/>
+          </a:solidFill>
+          <a:ln/>
+        </p:spPr>
+      </p:sp>
+      <p:sp>
+        <p:nvSpPr>
+          <p:cNvPr id="15" name="Shape 13"/>
+          <p:cNvSpPr/>
+          <p:nvPr/>
+        </p:nvSpPr>
+        <p:spPr>
+          <a:xfrm>
+            <a:off x="960120" y="4910328"/>
+            <a:ext cx="384048" cy="384048"/>
+          </a:xfrm>
+          <a:prstGeom prst="ellipse">
+            <a:avLst/>
+          </a:prstGeom>
+          <a:solidFill>
+            <a:srgbClr val="2F6FED"/>
+          </a:solidFill>
+          <a:ln/>
+        </p:spPr>
+      </p:sp>
+      <p:sp>
+        <p:nvSpPr>
+          <p:cNvPr id="16" name="Text 14"/>
+          <p:cNvSpPr/>
+          <p:nvPr/>
+        </p:nvSpPr>
+        <p:spPr>
+          <a:xfrm>
+            <a:off x="960120" y="4910328"/>
+            <a:ext cx="384048" cy="384048"/>
           </a:xfrm>
           <a:prstGeom prst="rect">
             <a:avLst/>
@@ -2925,21 +3224,99 @@
           <a:bodyPr wrap="square" lIns="0" tIns="0" rIns="0" bIns="0" rtlCol="0" anchor="ctr"/>
           <a:lstStyle/>
           <a:p>
-            <a:pPr indent="0" marL="0">
-              <a:buNone/>
-            </a:pPr>
-            <a:r>
-              <a:rPr lang="en-US" sz="1300" i="1" dirty="0">
-                <a:solidFill>
-                  <a:srgbClr val="6B7280"/>
-                </a:solidFill>
-                <a:latin typeface="Calibri" pitchFamily="34" charset="0"/>
-                <a:ea typeface="Calibri" pitchFamily="34" charset="-122"/>
-                <a:cs typeface="Calibri" pitchFamily="34" charset="-120"/>
-              </a:rPr>
-              <a:t>Der Nutzen der Plattformunabhängigkeit endet dort, wo die Hardware zum Bauen und Testen fehlt.</a:t>
-            </a:r>
-            <a:endParaRPr lang="en-US" sz="1300" dirty="0"/>
+            <a:pPr algn="ctr" indent="0" marL="0">
+              <a:buNone/>
+            </a:pPr>
+            <a:r>
+              <a:rPr lang="en-US" sz="1500" b="1" dirty="0">
+                <a:solidFill>
+                  <a:srgbClr val="FFFFFF"/>
+                </a:solidFill>
+                <a:latin typeface="Calibri" pitchFamily="34" charset="0"/>
+                <a:ea typeface="Calibri" pitchFamily="34" charset="-122"/>
+                <a:cs typeface="Calibri" pitchFamily="34" charset="-120"/>
+              </a:rPr>
+              <a:t>3</a:t>
+            </a:r>
+            <a:endParaRPr lang="en-US" sz="1500" dirty="0"/>
+          </a:p>
+        </p:txBody>
+      </p:sp>
+      <p:sp>
+        <p:nvSpPr>
+          <p:cNvPr id="17" name="Text 15"/>
+          <p:cNvSpPr/>
+          <p:nvPr/>
+        </p:nvSpPr>
+        <p:spPr>
+          <a:xfrm>
+            <a:off x="1508760" y="4818888"/>
+            <a:ext cx="9677095" cy="320040"/>
+          </a:xfrm>
+          <a:prstGeom prst="rect">
+            <a:avLst/>
+          </a:prstGeom>
+          <a:noFill/>
+          <a:ln/>
+        </p:spPr>
+        <p:txBody>
+          <a:bodyPr wrap="square" lIns="0" tIns="0" rIns="0" bIns="0" rtlCol="0" anchor="ctr"/>
+          <a:lstStyle/>
+          <a:p>
+            <a:pPr indent="0" marL="0">
+              <a:buNone/>
+            </a:pPr>
+            <a:r>
+              <a:rPr lang="en-US" sz="1500" b="1" dirty="0">
+                <a:solidFill>
+                  <a:srgbClr val="111827"/>
+                </a:solidFill>
+                <a:latin typeface="Calibri" pitchFamily="34" charset="0"/>
+                <a:ea typeface="Calibri" pitchFamily="34" charset="-122"/>
+                <a:cs typeface="Calibri" pitchFamily="34" charset="-120"/>
+              </a:rPr>
+              <a:t>Aufnahmen landen zuerst im Zwischenspeicher</a:t>
+            </a:r>
+            <a:endParaRPr lang="en-US" sz="1500" dirty="0"/>
+          </a:p>
+        </p:txBody>
+      </p:sp>
+      <p:sp>
+        <p:nvSpPr>
+          <p:cNvPr id="18" name="Text 16"/>
+          <p:cNvSpPr/>
+          <p:nvPr/>
+        </p:nvSpPr>
+        <p:spPr>
+          <a:xfrm>
+            <a:off x="1508760" y="5166360"/>
+            <a:ext cx="9677095" cy="731520"/>
+          </a:xfrm>
+          <a:prstGeom prst="rect">
+            <a:avLst/>
+          </a:prstGeom>
+          <a:noFill/>
+          <a:ln/>
+        </p:spPr>
+        <p:txBody>
+          <a:bodyPr wrap="square" lIns="0" tIns="0" rIns="0" bIns="0" rtlCol="0" anchor="t"/>
+          <a:lstStyle/>
+          <a:p>
+            <a:pPr indent="0" marL="0">
+              <a:buNone/>
+            </a:pPr>
+            <a:r>
+              <a:rPr lang="en-US" sz="1250" dirty="0">
+                <a:solidFill>
+                  <a:srgbClr val="374151"/>
+                </a:solidFill>
+                <a:latin typeface="Calibri" pitchFamily="34" charset="0"/>
+                <a:ea typeface="Calibri" pitchFamily="34" charset="-122"/>
+                <a:cs typeface="Calibri" pitchFamily="34" charset="-120"/>
+              </a:rPr>
+              <a:t>Das Recorder-Plugin schreibt in einen Bereich, den Android jederzeit leeren darf. Wer die Datei dort liegen lässt, verliert sie irgendwann. Der Umweg über Kopieren und Umbenennen ist kein Selbstzweck, sondern die Bedingung für Persistenz.</a:t>
+            </a:r>
+            <a:endParaRPr lang="en-US" sz="1250" dirty="0"/>
           </a:p>
         </p:txBody>
       </p:sp>
@@ -2954,6 +3331,869 @@
 <file path=ppt/slides/slide12.xml><?xml version="1.0" encoding="utf-8"?>
 <p:sld xmlns:a="http://schemas.openxmlformats.org/drawingml/2006/main" xmlns:r="http://schemas.openxmlformats.org/officeDocument/2006/relationships" xmlns:p="http://schemas.openxmlformats.org/presentationml/2006/main">
   <p:cSld name="Slide 12">
+    <p:bg>
+      <p:bgPr>
+        <a:solidFill>
+          <a:srgbClr val="FFFFFF"/>
+        </a:solidFill>
+      </p:bgPr>
+    </p:bg>
+    <p:spTree>
+      <p:nvGrpSpPr>
+        <p:cNvPr id="1" name=""/>
+        <p:cNvGrpSpPr/>
+        <p:nvPr/>
+      </p:nvGrpSpPr>
+      <p:grpSpPr>
+        <a:xfrm>
+          <a:off x="0" y="0"/>
+          <a:ext cx="0" cy="0"/>
+          <a:chOff x="0" y="0"/>
+          <a:chExt cx="0" cy="0"/>
+        </a:xfrm>
+      </p:grpSpPr>
+      <p:sp>
+        <p:nvSpPr>
+          <p:cNvPr id="2" name="Shape 0"/>
+          <p:cNvSpPr/>
+          <p:nvPr/>
+        </p:nvSpPr>
+        <p:spPr>
+          <a:xfrm>
+            <a:off x="640080" y="566928"/>
+            <a:ext cx="155448" cy="155448"/>
+          </a:xfrm>
+          <a:prstGeom prst="ellipse">
+            <a:avLst/>
+          </a:prstGeom>
+          <a:solidFill>
+            <a:srgbClr val="E23E3E"/>
+          </a:solidFill>
+          <a:ln/>
+        </p:spPr>
+      </p:sp>
+      <p:sp>
+        <p:nvSpPr>
+          <p:cNvPr id="3" name="Text 1"/>
+          <p:cNvSpPr/>
+          <p:nvPr/>
+        </p:nvSpPr>
+        <p:spPr>
+          <a:xfrm>
+            <a:off x="932688" y="384048"/>
+            <a:ext cx="10618927" cy="548640"/>
+          </a:xfrm>
+          <a:prstGeom prst="rect">
+            <a:avLst/>
+          </a:prstGeom>
+          <a:noFill/>
+          <a:ln/>
+        </p:spPr>
+        <p:txBody>
+          <a:bodyPr wrap="square" lIns="0" tIns="0" rIns="0" bIns="0" rtlCol="0" anchor="ctr"/>
+          <a:lstStyle/>
+          <a:p>
+            <a:pPr indent="0" marL="0">
+              <a:buNone/>
+            </a:pPr>
+            <a:r>
+              <a:rPr lang="en-US" sz="3200" b="1" dirty="0">
+                <a:solidFill>
+                  <a:srgbClr val="111827"/>
+                </a:solidFill>
+                <a:latin typeface="Cambria" pitchFamily="34" charset="0"/>
+                <a:ea typeface="Cambria" pitchFamily="34" charset="-122"/>
+                <a:cs typeface="Cambria" pitchFamily="34" charset="-120"/>
+              </a:rPr>
+              <a:t>Problem 4: Ein Geheimnis im öffentlichen Repository</a:t>
+            </a:r>
+            <a:endParaRPr lang="en-US" sz="3200" dirty="0"/>
+          </a:p>
+        </p:txBody>
+      </p:sp>
+      <p:sp>
+        <p:nvSpPr>
+          <p:cNvPr id="4" name="Shape 2"/>
+          <p:cNvSpPr/>
+          <p:nvPr/>
+        </p:nvSpPr>
+        <p:spPr>
+          <a:xfrm>
+            <a:off x="640080" y="1600200"/>
+            <a:ext cx="10911535" cy="1371600"/>
+          </a:xfrm>
+          <a:prstGeom prst="roundRect">
+            <a:avLst>
+              <a:gd name="adj" fmla="val 5333"/>
+            </a:avLst>
+          </a:prstGeom>
+          <a:solidFill>
+            <a:srgbClr val="0F1419"/>
+          </a:solidFill>
+          <a:ln/>
+        </p:spPr>
+      </p:sp>
+      <p:sp>
+        <p:nvSpPr>
+          <p:cNvPr id="5" name="Shape 3"/>
+          <p:cNvSpPr/>
+          <p:nvPr/>
+        </p:nvSpPr>
+        <p:spPr>
+          <a:xfrm>
+            <a:off x="1005840" y="1993392"/>
+            <a:ext cx="164592" cy="164592"/>
+          </a:xfrm>
+          <a:prstGeom prst="ellipse">
+            <a:avLst/>
+          </a:prstGeom>
+          <a:solidFill>
+            <a:srgbClr val="E23E3E"/>
+          </a:solidFill>
+          <a:ln/>
+        </p:spPr>
+      </p:sp>
+      <p:sp>
+        <p:nvSpPr>
+          <p:cNvPr id="6" name="Text 4"/>
+          <p:cNvSpPr/>
+          <p:nvPr/>
+        </p:nvSpPr>
+        <p:spPr>
+          <a:xfrm>
+            <a:off x="1353312" y="1783080"/>
+            <a:ext cx="9814255" cy="1005840"/>
+          </a:xfrm>
+          <a:prstGeom prst="rect">
+            <a:avLst/>
+          </a:prstGeom>
+          <a:noFill/>
+          <a:ln/>
+        </p:spPr>
+        <p:txBody>
+          <a:bodyPr wrap="square" lIns="0" tIns="0" rIns="0" bIns="0" rtlCol="0" anchor="ctr"/>
+          <a:lstStyle/>
+          <a:p>
+            <a:pPr indent="0" marL="0">
+              <a:buNone/>
+            </a:pPr>
+            <a:r>
+              <a:rPr lang="en-US" sz="1900" dirty="0">
+                <a:solidFill>
+                  <a:srgbClr val="FFFFFF"/>
+                </a:solidFill>
+                <a:latin typeface="Cambria" pitchFamily="34" charset="0"/>
+                <a:ea typeface="Cambria" pitchFamily="34" charset="-122"/>
+                <a:cs typeface="Cambria" pitchFamily="34" charset="-120"/>
+              </a:rPr>
+              <a:t>Der Lizenzschlüssel stand im Quelltext — in einem öffentlich sichtbaren Repository.</a:t>
+            </a:r>
+            <a:endParaRPr lang="en-US" sz="1900" dirty="0"/>
+          </a:p>
+        </p:txBody>
+      </p:sp>
+      <p:sp>
+        <p:nvSpPr>
+          <p:cNvPr id="7" name="Shape 5"/>
+          <p:cNvSpPr/>
+          <p:nvPr/>
+        </p:nvSpPr>
+        <p:spPr>
+          <a:xfrm>
+            <a:off x="640080" y="3200400"/>
+            <a:ext cx="5227168" cy="2651760"/>
+          </a:xfrm>
+          <a:prstGeom prst="roundRect">
+            <a:avLst>
+              <a:gd name="adj" fmla="val 2759"/>
+            </a:avLst>
+          </a:prstGeom>
+          <a:solidFill>
+            <a:srgbClr val="F4F5F7"/>
+          </a:solidFill>
+          <a:ln/>
+        </p:spPr>
+      </p:sp>
+      <p:sp>
+        <p:nvSpPr>
+          <p:cNvPr id="8" name="Text 6"/>
+          <p:cNvSpPr/>
+          <p:nvPr/>
+        </p:nvSpPr>
+        <p:spPr>
+          <a:xfrm>
+            <a:off x="960120" y="3401568"/>
+            <a:ext cx="4587088" cy="320040"/>
+          </a:xfrm>
+          <a:prstGeom prst="rect">
+            <a:avLst/>
+          </a:prstGeom>
+          <a:noFill/>
+          <a:ln/>
+        </p:spPr>
+        <p:txBody>
+          <a:bodyPr wrap="square" lIns="0" tIns="0" rIns="0" bIns="0" rtlCol="0" anchor="ctr"/>
+          <a:lstStyle/>
+          <a:p>
+            <a:pPr indent="0" marL="0">
+              <a:buNone/>
+            </a:pPr>
+            <a:r>
+              <a:rPr lang="en-US" sz="1500" b="1" dirty="0">
+                <a:solidFill>
+                  <a:srgbClr val="111827"/>
+                </a:solidFill>
+                <a:latin typeface="Calibri" pitchFamily="34" charset="0"/>
+                <a:ea typeface="Calibri" pitchFamily="34" charset="-122"/>
+                <a:cs typeface="Calibri" pitchFamily="34" charset="-120"/>
+              </a:rPr>
+              <a:t>Warum das mehr ist als ein Schönheitsfehler</a:t>
+            </a:r>
+            <a:endParaRPr lang="en-US" sz="1500" dirty="0"/>
+          </a:p>
+        </p:txBody>
+      </p:sp>
+      <p:sp>
+        <p:nvSpPr>
+          <p:cNvPr id="9" name="Text 7"/>
+          <p:cNvSpPr/>
+          <p:nvPr/>
+        </p:nvSpPr>
+        <p:spPr>
+          <a:xfrm>
+            <a:off x="960120" y="3794760"/>
+            <a:ext cx="4587088" cy="1828800"/>
+          </a:xfrm>
+          <a:prstGeom prst="rect">
+            <a:avLst/>
+          </a:prstGeom>
+          <a:noFill/>
+          <a:ln/>
+        </p:spPr>
+        <p:txBody>
+          <a:bodyPr wrap="square" lIns="0" tIns="0" rIns="0" bIns="0" rtlCol="0" anchor="t"/>
+          <a:lstStyle/>
+          <a:p>
+            <a:pPr marL="342900" indent="-342900">
+              <a:spcAft>
+                <a:spcPts val="1000"/>
+              </a:spcAft>
+              <a:buSzPct val="100000"/>
+              <a:buChar char="•"/>
+            </a:pPr>
+            <a:r>
+              <a:rPr lang="en-US" sz="1300" dirty="0">
+                <a:solidFill>
+                  <a:srgbClr val="374151"/>
+                </a:solidFill>
+                <a:latin typeface="Calibri" pitchFamily="34" charset="0"/>
+                <a:ea typeface="Calibri" pitchFamily="34" charset="-122"/>
+                <a:cs typeface="Calibri" pitchFamily="34" charset="-120"/>
+              </a:rPr>
+              <a:t>Die Aufgabenstellung untersagt die Veröffentlichung ausdrücklich</a:t>
+            </a:r>
+            <a:endParaRPr lang="en-US" sz="1300" dirty="0"/>
+          </a:p>
+          <a:p>
+            <a:pPr marL="342900" indent="-342900">
+              <a:spcAft>
+                <a:spcPts val="1000"/>
+              </a:spcAft>
+              <a:buSzPct val="100000"/>
+              <a:buChar char="•"/>
+            </a:pPr>
+            <a:r>
+              <a:rPr lang="en-US" sz="1300" dirty="0">
+                <a:solidFill>
+                  <a:srgbClr val="374151"/>
+                </a:solidFill>
+                <a:latin typeface="Calibri" pitchFamily="34" charset="0"/>
+                <a:ea typeface="Calibri" pitchFamily="34" charset="-122"/>
+                <a:cs typeface="Calibri" pitchFamily="34" charset="-120"/>
+              </a:rPr>
+              <a:t>Löschen im aktuellen Stand genügt nicht — die Historie speichert jede Fassung</a:t>
+            </a:r>
+            <a:endParaRPr lang="en-US" sz="1300" dirty="0"/>
+          </a:p>
+          <a:p>
+            <a:pPr marL="342900" indent="-342900">
+              <a:spcAft>
+                <a:spcPts val="1000"/>
+              </a:spcAft>
+              <a:buSzPct val="100000"/>
+              <a:buChar char="•"/>
+            </a:pPr>
+            <a:r>
+              <a:rPr lang="en-US" sz="1300" dirty="0">
+                <a:solidFill>
+                  <a:srgbClr val="374151"/>
+                </a:solidFill>
+                <a:latin typeface="Calibri" pitchFamily="34" charset="0"/>
+                <a:ea typeface="Calibri" pitchFamily="34" charset="-122"/>
+                <a:cs typeface="Calibri" pitchFamily="34" charset="-120"/>
+              </a:rPr>
+              <a:t>Ein Schlüssel, der einmal öffentlich war, gilt als kompromittiert</a:t>
+            </a:r>
+            <a:endParaRPr lang="en-US" sz="1300" dirty="0"/>
+          </a:p>
+        </p:txBody>
+      </p:sp>
+      <p:sp>
+        <p:nvSpPr>
+          <p:cNvPr id="10" name="Shape 8"/>
+          <p:cNvSpPr/>
+          <p:nvPr/>
+        </p:nvSpPr>
+        <p:spPr>
+          <a:xfrm>
+            <a:off x="6324448" y="3200400"/>
+            <a:ext cx="5227168" cy="2651760"/>
+          </a:xfrm>
+          <a:prstGeom prst="roundRect">
+            <a:avLst>
+              <a:gd name="adj" fmla="val 2759"/>
+            </a:avLst>
+          </a:prstGeom>
+          <a:solidFill>
+            <a:srgbClr val="F4F5F7"/>
+          </a:solidFill>
+          <a:ln/>
+        </p:spPr>
+      </p:sp>
+      <p:sp>
+        <p:nvSpPr>
+          <p:cNvPr id="11" name="Text 9"/>
+          <p:cNvSpPr/>
+          <p:nvPr/>
+        </p:nvSpPr>
+        <p:spPr>
+          <a:xfrm>
+            <a:off x="6644488" y="3401568"/>
+            <a:ext cx="4587088" cy="320040"/>
+          </a:xfrm>
+          <a:prstGeom prst="rect">
+            <a:avLst/>
+          </a:prstGeom>
+          <a:noFill/>
+          <a:ln/>
+        </p:spPr>
+        <p:txBody>
+          <a:bodyPr wrap="square" lIns="0" tIns="0" rIns="0" bIns="0" rtlCol="0" anchor="ctr"/>
+          <a:lstStyle/>
+          <a:p>
+            <a:pPr indent="0" marL="0">
+              <a:buNone/>
+            </a:pPr>
+            <a:r>
+              <a:rPr lang="en-US" sz="1500" b="1" dirty="0">
+                <a:solidFill>
+                  <a:srgbClr val="111827"/>
+                </a:solidFill>
+                <a:latin typeface="Calibri" pitchFamily="34" charset="0"/>
+                <a:ea typeface="Calibri" pitchFamily="34" charset="-122"/>
+                <a:cs typeface="Calibri" pitchFamily="34" charset="-120"/>
+              </a:rPr>
+              <a:t>Was wir getan haben</a:t>
+            </a:r>
+            <a:endParaRPr lang="en-US" sz="1500" dirty="0"/>
+          </a:p>
+        </p:txBody>
+      </p:sp>
+      <p:sp>
+        <p:nvSpPr>
+          <p:cNvPr id="12" name="Text 10"/>
+          <p:cNvSpPr/>
+          <p:nvPr/>
+        </p:nvSpPr>
+        <p:spPr>
+          <a:xfrm>
+            <a:off x="6644488" y="3794760"/>
+            <a:ext cx="4587088" cy="1828800"/>
+          </a:xfrm>
+          <a:prstGeom prst="rect">
+            <a:avLst/>
+          </a:prstGeom>
+          <a:noFill/>
+          <a:ln/>
+        </p:spPr>
+        <p:txBody>
+          <a:bodyPr wrap="square" lIns="0" tIns="0" rIns="0" bIns="0" rtlCol="0" anchor="t"/>
+          <a:lstStyle/>
+          <a:p>
+            <a:pPr marL="342900" indent="-342900">
+              <a:spcAft>
+                <a:spcPts val="1000"/>
+              </a:spcAft>
+              <a:buSzPct val="100000"/>
+              <a:buChar char="•"/>
+            </a:pPr>
+            <a:r>
+              <a:rPr lang="en-US" sz="1300" dirty="0">
+                <a:solidFill>
+                  <a:srgbClr val="374151"/>
+                </a:solidFill>
+                <a:latin typeface="Calibri" pitchFamily="34" charset="0"/>
+                <a:ea typeface="Calibri" pitchFamily="34" charset="-122"/>
+                <a:cs typeface="Calibri" pitchFamily="34" charset="-120"/>
+              </a:rPr>
+              <a:t>Schlüssel aus dem Code entfernt und in die lokale Konfiguration verlagert</a:t>
+            </a:r>
+            <a:endParaRPr lang="en-US" sz="1300" dirty="0"/>
+          </a:p>
+          <a:p>
+            <a:pPr marL="342900" indent="-342900">
+              <a:spcAft>
+                <a:spcPts val="1000"/>
+              </a:spcAft>
+              <a:buSzPct val="100000"/>
+              <a:buChar char="•"/>
+            </a:pPr>
+            <a:r>
+              <a:rPr lang="en-US" sz="1300" dirty="0">
+                <a:solidFill>
+                  <a:srgbClr val="374151"/>
+                </a:solidFill>
+                <a:latin typeface="Calibri" pitchFamily="34" charset="0"/>
+                <a:ea typeface="Calibri" pitchFamily="34" charset="-122"/>
+                <a:cs typeface="Calibri" pitchFamily="34" charset="-120"/>
+              </a:rPr>
+              <a:t>Gesamte Versionshistorie umgeschrieben und gegengeprüft</a:t>
+            </a:r>
+            <a:endParaRPr lang="en-US" sz="1300" dirty="0"/>
+          </a:p>
+          <a:p>
+            <a:pPr marL="342900" indent="-342900">
+              <a:spcAft>
+                <a:spcPts val="1000"/>
+              </a:spcAft>
+              <a:buSzPct val="100000"/>
+              <a:buChar char="•"/>
+            </a:pPr>
+            <a:r>
+              <a:rPr lang="en-US" sz="1300" dirty="0">
+                <a:solidFill>
+                  <a:srgbClr val="374151"/>
+                </a:solidFill>
+                <a:latin typeface="Calibri" pitchFamily="34" charset="0"/>
+                <a:ea typeface="Calibri" pitchFamily="34" charset="-122"/>
+                <a:cs typeface="Calibri" pitchFamily="34" charset="-120"/>
+              </a:rPr>
+              <a:t>Konfigurationsdateien mit Zugangsdaten dauerhaft ausgeschlossen</a:t>
+            </a:r>
+            <a:endParaRPr lang="en-US" sz="1300" dirty="0"/>
+          </a:p>
+        </p:txBody>
+      </p:sp>
+    </p:spTree>
+  </p:cSld>
+  <p:clrMapOvr>
+    <a:masterClrMapping/>
+  </p:clrMapOvr>
+</p:sld>
+</file>
+
+<file path=ppt/slides/slide13.xml><?xml version="1.0" encoding="utf-8"?>
+<p:sld xmlns:a="http://schemas.openxmlformats.org/drawingml/2006/main" xmlns:r="http://schemas.openxmlformats.org/officeDocument/2006/relationships" xmlns:p="http://schemas.openxmlformats.org/presentationml/2006/main">
+  <p:cSld name="Slide 13">
+    <p:bg>
+      <p:bgPr>
+        <a:solidFill>
+          <a:srgbClr val="FFFFFF"/>
+        </a:solidFill>
+      </p:bgPr>
+    </p:bg>
+    <p:spTree>
+      <p:nvGrpSpPr>
+        <p:cNvPr id="1" name=""/>
+        <p:cNvGrpSpPr/>
+        <p:nvPr/>
+      </p:nvGrpSpPr>
+      <p:grpSpPr>
+        <a:xfrm>
+          <a:off x="0" y="0"/>
+          <a:ext cx="0" cy="0"/>
+          <a:chOff x="0" y="0"/>
+          <a:chExt cx="0" cy="0"/>
+        </a:xfrm>
+      </p:grpSpPr>
+      <p:sp>
+        <p:nvSpPr>
+          <p:cNvPr id="2" name="Shape 0"/>
+          <p:cNvSpPr/>
+          <p:nvPr/>
+        </p:nvSpPr>
+        <p:spPr>
+          <a:xfrm>
+            <a:off x="640080" y="566928"/>
+            <a:ext cx="155448" cy="155448"/>
+          </a:xfrm>
+          <a:prstGeom prst="ellipse">
+            <a:avLst/>
+          </a:prstGeom>
+          <a:solidFill>
+            <a:srgbClr val="E23E3E"/>
+          </a:solidFill>
+          <a:ln/>
+        </p:spPr>
+      </p:sp>
+      <p:sp>
+        <p:nvSpPr>
+          <p:cNvPr id="3" name="Text 1"/>
+          <p:cNvSpPr/>
+          <p:nvPr/>
+        </p:nvSpPr>
+        <p:spPr>
+          <a:xfrm>
+            <a:off x="932688" y="384048"/>
+            <a:ext cx="10618927" cy="548640"/>
+          </a:xfrm>
+          <a:prstGeom prst="rect">
+            <a:avLst/>
+          </a:prstGeom>
+          <a:noFill/>
+          <a:ln/>
+        </p:spPr>
+        <p:txBody>
+          <a:bodyPr wrap="square" lIns="0" tIns="0" rIns="0" bIns="0" rtlCol="0" anchor="ctr"/>
+          <a:lstStyle/>
+          <a:p>
+            <a:pPr indent="0" marL="0">
+              <a:buNone/>
+            </a:pPr>
+            <a:r>
+              <a:rPr lang="en-US" sz="3200" b="1" dirty="0">
+                <a:solidFill>
+                  <a:srgbClr val="111827"/>
+                </a:solidFill>
+                <a:latin typeface="Cambria" pitchFamily="34" charset="0"/>
+                <a:ea typeface="Cambria" pitchFamily="34" charset="-122"/>
+                <a:cs typeface="Cambria" pitchFamily="34" charset="-120"/>
+              </a:rPr>
+              <a:t>Was wir gerne noch gemacht hätten</a:t>
+            </a:r>
+            <a:endParaRPr lang="en-US" sz="3200" dirty="0"/>
+          </a:p>
+        </p:txBody>
+      </p:sp>
+      <p:sp>
+        <p:nvSpPr>
+          <p:cNvPr id="4" name="Shape 2"/>
+          <p:cNvSpPr/>
+          <p:nvPr/>
+        </p:nvSpPr>
+        <p:spPr>
+          <a:xfrm>
+            <a:off x="640080" y="1645920"/>
+            <a:ext cx="5227168" cy="4023360"/>
+          </a:xfrm>
+          <a:prstGeom prst="roundRect">
+            <a:avLst>
+              <a:gd name="adj" fmla="val 1818"/>
+            </a:avLst>
+          </a:prstGeom>
+          <a:solidFill>
+            <a:srgbClr val="F4F5F7"/>
+          </a:solidFill>
+          <a:ln/>
+        </p:spPr>
+      </p:sp>
+      <p:sp>
+        <p:nvSpPr>
+          <p:cNvPr id="5" name="Text 3"/>
+          <p:cNvSpPr/>
+          <p:nvPr/>
+        </p:nvSpPr>
+        <p:spPr>
+          <a:xfrm>
+            <a:off x="960120" y="1874520"/>
+            <a:ext cx="4587088" cy="365760"/>
+          </a:xfrm>
+          <a:prstGeom prst="rect">
+            <a:avLst/>
+          </a:prstGeom>
+          <a:noFill/>
+          <a:ln/>
+        </p:spPr>
+        <p:txBody>
+          <a:bodyPr wrap="square" lIns="0" tIns="0" rIns="0" bIns="0" rtlCol="0" anchor="ctr"/>
+          <a:lstStyle/>
+          <a:p>
+            <a:pPr indent="0" marL="0">
+              <a:buNone/>
+            </a:pPr>
+            <a:r>
+              <a:rPr lang="en-US" sz="1600" b="1" dirty="0">
+                <a:solidFill>
+                  <a:srgbClr val="111827"/>
+                </a:solidFill>
+                <a:latin typeface="Calibri" pitchFamily="34" charset="0"/>
+                <a:ea typeface="Calibri" pitchFamily="34" charset="-122"/>
+                <a:cs typeface="Calibri" pitchFamily="34" charset="-120"/>
+              </a:rPr>
+              <a:t>Der Wunsch: dieselbe App für iOS</a:t>
+            </a:r>
+            <a:endParaRPr lang="en-US" sz="1600" dirty="0"/>
+          </a:p>
+        </p:txBody>
+      </p:sp>
+      <p:sp>
+        <p:nvSpPr>
+          <p:cNvPr id="6" name="Text 4"/>
+          <p:cNvSpPr/>
+          <p:nvPr/>
+        </p:nvSpPr>
+        <p:spPr>
+          <a:xfrm>
+            <a:off x="960120" y="2331720"/>
+            <a:ext cx="4587088" cy="3108960"/>
+          </a:xfrm>
+          <a:prstGeom prst="rect">
+            <a:avLst/>
+          </a:prstGeom>
+          <a:noFill/>
+          <a:ln/>
+        </p:spPr>
+        <p:txBody>
+          <a:bodyPr wrap="square" lIns="0" tIns="0" rIns="0" bIns="0" rtlCol="0" anchor="t"/>
+          <a:lstStyle/>
+          <a:p>
+            <a:pPr indent="0" marL="0">
+              <a:buNone/>
+            </a:pPr>
+            <a:r>
+              <a:rPr lang="en-US" sz="1350" dirty="0">
+                <a:solidFill>
+                  <a:srgbClr val="374151"/>
+                </a:solidFill>
+                <a:latin typeface="Calibri" pitchFamily="34" charset="0"/>
+                <a:ea typeface="Calibri" pitchFamily="34" charset="-122"/>
+                <a:cs typeface="Calibri" pitchFamily="34" charset="-120"/>
+              </a:rPr>
+              <a:t>Genau dafür ist der hybride Ansatz gedacht: Alle fünf verwendeten Plugins unterstützen iOS. Unser Code müsste sich dafür praktisch nicht ändern — es käme eine zweite Plattform neben die bestehende.</a:t>
+            </a:r>
+            <a:endParaRPr lang="en-US" sz="1350" dirty="0"/>
+          </a:p>
+          <a:p>
+            <a:pPr indent="0" marL="0">
+              <a:buNone/>
+            </a:pPr>
+            <a:endParaRPr lang="en-US" sz="1350" dirty="0"/>
+          </a:p>
+          <a:p>
+            <a:pPr indent="0" marL="0">
+              <a:buNone/>
+            </a:pPr>
+            <a:r>
+              <a:rPr lang="en-US" sz="1350" dirty="0">
+                <a:solidFill>
+                  <a:srgbClr val="374151"/>
+                </a:solidFill>
+                <a:latin typeface="Calibri" pitchFamily="34" charset="0"/>
+                <a:ea typeface="Calibri" pitchFamily="34" charset="-122"/>
+                <a:cs typeface="Calibri" pitchFamily="34" charset="-120"/>
+              </a:rPr>
+              <a:t>Das wäre die überzeugendste Demonstration des Ansatzes gewesen: eine Codebasis, zwei Betriebssysteme.</a:t>
+            </a:r>
+            <a:endParaRPr lang="en-US" sz="1350" dirty="0"/>
+          </a:p>
+        </p:txBody>
+      </p:sp>
+      <p:sp>
+        <p:nvSpPr>
+          <p:cNvPr id="7" name="Shape 5"/>
+          <p:cNvSpPr/>
+          <p:nvPr/>
+        </p:nvSpPr>
+        <p:spPr>
+          <a:xfrm>
+            <a:off x="6324448" y="1645920"/>
+            <a:ext cx="5227168" cy="4023360"/>
+          </a:xfrm>
+          <a:prstGeom prst="roundRect">
+            <a:avLst>
+              <a:gd name="adj" fmla="val 1818"/>
+            </a:avLst>
+          </a:prstGeom>
+          <a:solidFill>
+            <a:srgbClr val="0F1419"/>
+          </a:solidFill>
+          <a:ln/>
+        </p:spPr>
+      </p:sp>
+      <p:sp>
+        <p:nvSpPr>
+          <p:cNvPr id="8" name="Text 6"/>
+          <p:cNvSpPr/>
+          <p:nvPr/>
+        </p:nvSpPr>
+        <p:spPr>
+          <a:xfrm>
+            <a:off x="6644488" y="1874520"/>
+            <a:ext cx="4587088" cy="365760"/>
+          </a:xfrm>
+          <a:prstGeom prst="rect">
+            <a:avLst/>
+          </a:prstGeom>
+          <a:noFill/>
+          <a:ln/>
+        </p:spPr>
+        <p:txBody>
+          <a:bodyPr wrap="square" lIns="0" tIns="0" rIns="0" bIns="0" rtlCol="0" anchor="ctr"/>
+          <a:lstStyle/>
+          <a:p>
+            <a:pPr indent="0" marL="0">
+              <a:buNone/>
+            </a:pPr>
+            <a:r>
+              <a:rPr lang="en-US" sz="1600" b="1" dirty="0">
+                <a:solidFill>
+                  <a:srgbClr val="FFFFFF"/>
+                </a:solidFill>
+                <a:latin typeface="Calibri" pitchFamily="34" charset="0"/>
+                <a:ea typeface="Calibri" pitchFamily="34" charset="-122"/>
+                <a:cs typeface="Calibri" pitchFamily="34" charset="-120"/>
+              </a:rPr>
+              <a:t>Die Hürde: Geräteabhängigkeit</a:t>
+            </a:r>
+            <a:endParaRPr lang="en-US" sz="1600" dirty="0"/>
+          </a:p>
+        </p:txBody>
+      </p:sp>
+      <p:sp>
+        <p:nvSpPr>
+          <p:cNvPr id="9" name="Text 7"/>
+          <p:cNvSpPr/>
+          <p:nvPr/>
+        </p:nvSpPr>
+        <p:spPr>
+          <a:xfrm>
+            <a:off x="6644488" y="2331720"/>
+            <a:ext cx="4587088" cy="3108960"/>
+          </a:xfrm>
+          <a:prstGeom prst="rect">
+            <a:avLst/>
+          </a:prstGeom>
+          <a:noFill/>
+          <a:ln/>
+        </p:spPr>
+        <p:txBody>
+          <a:bodyPr wrap="square" lIns="0" tIns="0" rIns="0" bIns="0" rtlCol="0" anchor="t"/>
+          <a:lstStyle/>
+          <a:p>
+            <a:pPr marL="342900" indent="-342900">
+              <a:spcAft>
+                <a:spcPts val="1200"/>
+              </a:spcAft>
+              <a:buSzPct val="100000"/>
+              <a:buChar char="•"/>
+            </a:pPr>
+            <a:r>
+              <a:rPr lang="en-US" sz="1350" dirty="0">
+                <a:solidFill>
+                  <a:srgbClr val="E5E7EB"/>
+                </a:solidFill>
+                <a:latin typeface="Calibri" pitchFamily="34" charset="0"/>
+                <a:ea typeface="Calibri" pitchFamily="34" charset="-122"/>
+                <a:cs typeface="Calibri" pitchFamily="34" charset="-120"/>
+              </a:rPr>
+              <a:t>Ein iOS-Build lässt sich nur auf einem Mac erzeugen — technisch, nicht organisatorisch bedingt</a:t>
+            </a:r>
+            <a:endParaRPr lang="en-US" sz="1350" dirty="0"/>
+          </a:p>
+          <a:p>
+            <a:pPr marL="342900" indent="-342900">
+              <a:spcAft>
+                <a:spcPts val="1200"/>
+              </a:spcAft>
+              <a:buSzPct val="100000"/>
+              <a:buChar char="•"/>
+            </a:pPr>
+            <a:r>
+              <a:rPr lang="en-US" sz="1350" dirty="0">
+                <a:solidFill>
+                  <a:srgbClr val="E5E7EB"/>
+                </a:solidFill>
+                <a:latin typeface="Calibri" pitchFamily="34" charset="0"/>
+                <a:ea typeface="Calibri" pitchFamily="34" charset="-122"/>
+                <a:cs typeface="Calibri" pitchFamily="34" charset="-120"/>
+              </a:rPr>
+              <a:t>Zum Testen der Aufnahme braucht es zusätzlich ein iPhone</a:t>
+            </a:r>
+            <a:endParaRPr lang="en-US" sz="1350" dirty="0"/>
+          </a:p>
+          <a:p>
+            <a:pPr marL="342900" indent="-342900">
+              <a:spcAft>
+                <a:spcPts val="1200"/>
+              </a:spcAft>
+              <a:buSzPct val="100000"/>
+              <a:buChar char="•"/>
+            </a:pPr>
+            <a:r>
+              <a:rPr lang="en-US" sz="1350" dirty="0">
+                <a:solidFill>
+                  <a:srgbClr val="E5E7EB"/>
+                </a:solidFill>
+                <a:latin typeface="Calibri" pitchFamily="34" charset="0"/>
+                <a:ea typeface="Calibri" pitchFamily="34" charset="-122"/>
+                <a:cs typeface="Calibri" pitchFamily="34" charset="-120"/>
+              </a:rPr>
+              <a:t>Auch auf Android war der Emulator nur begrenzt aussagekräftig; getestet wurde auf einem echten Gerät</a:t>
+            </a:r>
+            <a:endParaRPr lang="en-US" sz="1350" dirty="0"/>
+          </a:p>
+        </p:txBody>
+      </p:sp>
+      <p:sp>
+        <p:nvSpPr>
+          <p:cNvPr id="10" name="Text 8"/>
+          <p:cNvSpPr/>
+          <p:nvPr/>
+        </p:nvSpPr>
+        <p:spPr>
+          <a:xfrm>
+            <a:off x="640080" y="5897880"/>
+            <a:ext cx="10911535" cy="365760"/>
+          </a:xfrm>
+          <a:prstGeom prst="rect">
+            <a:avLst/>
+          </a:prstGeom>
+          <a:noFill/>
+          <a:ln/>
+        </p:spPr>
+        <p:txBody>
+          <a:bodyPr wrap="square" lIns="0" tIns="0" rIns="0" bIns="0" rtlCol="0" anchor="ctr"/>
+          <a:lstStyle/>
+          <a:p>
+            <a:pPr indent="0" marL="0">
+              <a:buNone/>
+            </a:pPr>
+            <a:r>
+              <a:rPr lang="en-US" sz="1300" i="1" dirty="0">
+                <a:solidFill>
+                  <a:srgbClr val="6B7280"/>
+                </a:solidFill>
+                <a:latin typeface="Calibri" pitchFamily="34" charset="0"/>
+                <a:ea typeface="Calibri" pitchFamily="34" charset="-122"/>
+                <a:cs typeface="Calibri" pitchFamily="34" charset="-120"/>
+              </a:rPr>
+              <a:t>Der Nutzen der Plattformunabhängigkeit endet dort, wo die Hardware zum Bauen und Testen fehlt.</a:t>
+            </a:r>
+            <a:endParaRPr lang="en-US" sz="1300" dirty="0"/>
+          </a:p>
+        </p:txBody>
+      </p:sp>
+    </p:spTree>
+  </p:cSld>
+  <p:clrMapOvr>
+    <a:masterClrMapping/>
+  </p:clrMapOvr>
+</p:sld>
+</file>
+
+<file path=ppt/slides/slide14.xml><?xml version="1.0" encoding="utf-8"?>
+<p:sld xmlns:a="http://schemas.openxmlformats.org/drawingml/2006/main" xmlns:r="http://schemas.openxmlformats.org/officeDocument/2006/relationships" xmlns:p="http://schemas.openxmlformats.org/presentationml/2006/main">
+  <p:cSld name="Slide 14">
     <p:bg>
       <p:bgPr>
         <a:solidFill>
@@ -3864,9 +5104,9 @@
 </p:sld>
 </file>
 
-<file path=ppt/slides/slide13.xml><?xml version="1.0" encoding="utf-8"?>
+<file path=ppt/slides/slide15.xml><?xml version="1.0" encoding="utf-8"?>
 <p:sld xmlns:a="http://schemas.openxmlformats.org/drawingml/2006/main" xmlns:r="http://schemas.openxmlformats.org/officeDocument/2006/relationships" xmlns:p="http://schemas.openxmlformats.org/presentationml/2006/main">
-  <p:cSld name="Slide 13">
+  <p:cSld name="Slide 15">
     <p:bg>
       <p:bgPr>
         <a:solidFill>
@@ -5408,7 +6648,7 @@
     <p:bg>
       <p:bgPr>
         <a:solidFill>
-          <a:srgbClr val="FFFFFF"/>
+          <a:srgbClr val="0F1419"/>
         </a:solidFill>
       </p:bgPr>
     </p:bg>
@@ -5434,8 +6674,8 @@
         </p:nvSpPr>
         <p:spPr>
           <a:xfrm>
-            <a:off x="640080" y="566928"/>
-            <a:ext cx="155448" cy="155448"/>
+            <a:off x="640080" y="1417320"/>
+            <a:ext cx="365760" cy="365760"/>
           </a:xfrm>
           <a:prstGeom prst="ellipse">
             <a:avLst/>
@@ -5454,8 +6694,8 @@
         </p:nvSpPr>
         <p:spPr>
           <a:xfrm>
-            <a:off x="932688" y="384048"/>
-            <a:ext cx="10618927" cy="548640"/>
+            <a:off x="640080" y="1920240"/>
+            <a:ext cx="10911535" cy="822960"/>
           </a:xfrm>
           <a:prstGeom prst="rect">
             <a:avLst/>
@@ -5471,17 +6711,17 @@
               <a:buNone/>
             </a:pPr>
             <a:r>
-              <a:rPr lang="en-US" sz="3200" b="1" dirty="0">
-                <a:solidFill>
-                  <a:srgbClr val="111827"/>
+              <a:rPr lang="en-US" sz="4400" b="1" dirty="0">
+                <a:solidFill>
+                  <a:srgbClr val="FFFFFF"/>
                 </a:solidFill>
                 <a:latin typeface="Cambria" pitchFamily="34" charset="0"/>
                 <a:ea typeface="Cambria" pitchFamily="34" charset="-122"/>
                 <a:cs typeface="Cambria" pitchFamily="34" charset="-120"/>
               </a:rPr>
-              <a:t>Nativ, hybrid oder cross-platform?</a:t>
-            </a:r>
-            <a:endParaRPr lang="en-US" sz="3200" dirty="0"/>
+              <a:t>Live-Demo</a:t>
+            </a:r>
+            <a:endParaRPr lang="en-US" sz="4400" dirty="0"/>
           </a:p>
         </p:txBody>
       </p:sp>
@@ -5493,8 +6733,8 @@
         </p:nvSpPr>
         <p:spPr>
           <a:xfrm>
-            <a:off x="932688" y="932688"/>
-            <a:ext cx="10618927" cy="320040"/>
+            <a:off x="640080" y="2743200"/>
+            <a:ext cx="10911535" cy="411480"/>
           </a:xfrm>
           <a:prstGeom prst="rect">
             <a:avLst/>
@@ -5510,15 +6750,113 @@
               <a:buNone/>
             </a:pPr>
             <a:r>
+              <a:rPr lang="en-US" sz="1700" dirty="0">
+                <a:solidFill>
+                  <a:srgbClr val="9AA4B2"/>
+                </a:solidFill>
+                <a:latin typeface="Calibri" pitchFamily="34" charset="0"/>
+                <a:ea typeface="Calibri" pitchFamily="34" charset="-122"/>
+                <a:cs typeface="Calibri" pitchFamily="34" charset="-120"/>
+              </a:rPr>
+              <a:t>am Gerät, nicht im Emulator</a:t>
+            </a:r>
+            <a:endParaRPr lang="en-US" sz="1700" dirty="0"/>
+          </a:p>
+        </p:txBody>
+      </p:sp>
+      <p:sp>
+        <p:nvSpPr>
+          <p:cNvPr id="5" name="Shape 3"/>
+          <p:cNvSpPr/>
+          <p:nvPr/>
+        </p:nvSpPr>
+        <p:spPr>
+          <a:xfrm>
+            <a:off x="640080" y="3566160"/>
+            <a:ext cx="384048" cy="384048"/>
+          </a:xfrm>
+          <a:prstGeom prst="ellipse">
+            <a:avLst/>
+          </a:prstGeom>
+          <a:solidFill>
+            <a:srgbClr val="E23E3E"/>
+          </a:solidFill>
+          <a:ln/>
+        </p:spPr>
+      </p:sp>
+      <p:sp>
+        <p:nvSpPr>
+          <p:cNvPr id="6" name="Text 4"/>
+          <p:cNvSpPr/>
+          <p:nvPr/>
+        </p:nvSpPr>
+        <p:spPr>
+          <a:xfrm>
+            <a:off x="640080" y="3566160"/>
+            <a:ext cx="384048" cy="384048"/>
+          </a:xfrm>
+          <a:prstGeom prst="rect">
+            <a:avLst/>
+          </a:prstGeom>
+          <a:noFill/>
+          <a:ln/>
+        </p:spPr>
+        <p:txBody>
+          <a:bodyPr wrap="square" lIns="0" tIns="0" rIns="0" bIns="0" rtlCol="0" anchor="ctr"/>
+          <a:lstStyle/>
+          <a:p>
+            <a:pPr algn="ctr" indent="0" marL="0">
+              <a:buNone/>
+            </a:pPr>
+            <a:r>
+              <a:rPr lang="en-US" sz="1500" b="1" dirty="0">
+                <a:solidFill>
+                  <a:srgbClr val="FFFFFF"/>
+                </a:solidFill>
+                <a:latin typeface="Calibri" pitchFamily="34" charset="0"/>
+                <a:ea typeface="Calibri" pitchFamily="34" charset="-122"/>
+                <a:cs typeface="Calibri" pitchFamily="34" charset="-120"/>
+              </a:rPr>
+              <a:t>1</a:t>
+            </a:r>
+            <a:endParaRPr lang="en-US" sz="1500" dirty="0"/>
+          </a:p>
+        </p:txBody>
+      </p:sp>
+      <p:sp>
+        <p:nvSpPr>
+          <p:cNvPr id="7" name="Text 5"/>
+          <p:cNvSpPr/>
+          <p:nvPr/>
+        </p:nvSpPr>
+        <p:spPr>
+          <a:xfrm>
+            <a:off x="1188720" y="3566160"/>
+            <a:ext cx="4678528" cy="457200"/>
+          </a:xfrm>
+          <a:prstGeom prst="rect">
+            <a:avLst/>
+          </a:prstGeom>
+          <a:noFill/>
+          <a:ln/>
+        </p:spPr>
+        <p:txBody>
+          <a:bodyPr wrap="square" lIns="0" tIns="0" rIns="0" bIns="0" rtlCol="0" anchor="ctr"/>
+          <a:lstStyle/>
+          <a:p>
+            <a:pPr indent="0" marL="0">
+              <a:buNone/>
+            </a:pPr>
+            <a:r>
               <a:rPr lang="en-US" sz="1400" dirty="0">
                 <a:solidFill>
-                  <a:srgbClr val="6B7280"/>
-                </a:solidFill>
-                <a:latin typeface="Calibri" pitchFamily="34" charset="0"/>
-                <a:ea typeface="Calibri" pitchFamily="34" charset="-122"/>
-                <a:cs typeface="Calibri" pitchFamily="34" charset="-120"/>
-              </a:rPr>
-              <a:t>Die Vorgabe der Plugins hat die Entscheidung faktisch vorweggenommen</a:t>
+                  <a:srgbClr val="E5E7EB"/>
+                </a:solidFill>
+                <a:latin typeface="Calibri" pitchFamily="34" charset="0"/>
+                <a:ea typeface="Calibri" pitchFamily="34" charset="-122"/>
+                <a:cs typeface="Calibri" pitchFamily="34" charset="-120"/>
+              </a:rPr>
+              <a:t>Aufnehmen, pausieren, fortsetzen, stoppen</a:t>
             </a:r>
             <a:endParaRPr lang="en-US" sz="1400" dirty="0"/>
           </a:p>
@@ -5526,36 +6864,34 @@
       </p:sp>
       <p:sp>
         <p:nvSpPr>
-          <p:cNvPr id="5" name="Shape 3"/>
-          <p:cNvSpPr/>
-          <p:nvPr/>
-        </p:nvSpPr>
-        <p:spPr>
-          <a:xfrm>
-            <a:off x="640080" y="1691640"/>
-            <a:ext cx="3393338" cy="3931920"/>
-          </a:xfrm>
-          <a:prstGeom prst="roundRect">
-            <a:avLst>
-              <a:gd name="adj" fmla="val 2156"/>
-            </a:avLst>
+          <p:cNvPr id="8" name="Shape 6"/>
+          <p:cNvSpPr/>
+          <p:nvPr/>
+        </p:nvSpPr>
+        <p:spPr>
+          <a:xfrm>
+            <a:off x="6324448" y="3566160"/>
+            <a:ext cx="384048" cy="384048"/>
+          </a:xfrm>
+          <a:prstGeom prst="ellipse">
+            <a:avLst/>
           </a:prstGeom>
           <a:solidFill>
-            <a:srgbClr val="F4F5F7"/>
+            <a:srgbClr val="2F6FED"/>
           </a:solidFill>
           <a:ln/>
         </p:spPr>
       </p:sp>
       <p:sp>
         <p:nvSpPr>
-          <p:cNvPr id="6" name="Text 4"/>
-          <p:cNvSpPr/>
-          <p:nvPr/>
-        </p:nvSpPr>
-        <p:spPr>
-          <a:xfrm>
-            <a:off x="914400" y="1920240"/>
-            <a:ext cx="2844698" cy="411480"/>
+          <p:cNvPr id="9" name="Text 7"/>
+          <p:cNvSpPr/>
+          <p:nvPr/>
+        </p:nvSpPr>
+        <p:spPr>
+          <a:xfrm>
+            <a:off x="6324448" y="3566160"/>
+            <a:ext cx="384048" cy="384048"/>
           </a:xfrm>
           <a:prstGeom prst="rect">
             <a:avLst/>
@@ -5567,34 +6903,34 @@
           <a:bodyPr wrap="square" lIns="0" tIns="0" rIns="0" bIns="0" rtlCol="0" anchor="ctr"/>
           <a:lstStyle/>
           <a:p>
-            <a:pPr indent="0" marL="0">
-              <a:buNone/>
-            </a:pPr>
-            <a:r>
-              <a:rPr lang="en-US" sz="2200" b="1" dirty="0">
-                <a:solidFill>
-                  <a:srgbClr val="111827"/>
-                </a:solidFill>
-                <a:latin typeface="Cambria" pitchFamily="34" charset="0"/>
-                <a:ea typeface="Cambria" pitchFamily="34" charset="-122"/>
-                <a:cs typeface="Cambria" pitchFamily="34" charset="-120"/>
-              </a:rPr>
-              <a:t>Nativ</a:t>
-            </a:r>
-            <a:endParaRPr lang="en-US" sz="2200" dirty="0"/>
-          </a:p>
-        </p:txBody>
-      </p:sp>
-      <p:sp>
-        <p:nvSpPr>
-          <p:cNvPr id="7" name="Text 5"/>
-          <p:cNvSpPr/>
-          <p:nvPr/>
-        </p:nvSpPr>
-        <p:spPr>
-          <a:xfrm>
-            <a:off x="914400" y="2359152"/>
-            <a:ext cx="2844698" cy="548640"/>
+            <a:pPr algn="ctr" indent="0" marL="0">
+              <a:buNone/>
+            </a:pPr>
+            <a:r>
+              <a:rPr lang="en-US" sz="1500" b="1" dirty="0">
+                <a:solidFill>
+                  <a:srgbClr val="FFFFFF"/>
+                </a:solidFill>
+                <a:latin typeface="Calibri" pitchFamily="34" charset="0"/>
+                <a:ea typeface="Calibri" pitchFamily="34" charset="-122"/>
+                <a:cs typeface="Calibri" pitchFamily="34" charset="-120"/>
+              </a:rPr>
+              <a:t>2</a:t>
+            </a:r>
+            <a:endParaRPr lang="en-US" sz="1500" dirty="0"/>
+          </a:p>
+        </p:txBody>
+      </p:sp>
+      <p:sp>
+        <p:nvSpPr>
+          <p:cNvPr id="10" name="Text 8"/>
+          <p:cNvSpPr/>
+          <p:nvPr/>
+        </p:nvSpPr>
+        <p:spPr>
+          <a:xfrm>
+            <a:off x="6873088" y="3566160"/>
+            <a:ext cx="4678528" cy="457200"/>
           </a:xfrm>
           <a:prstGeom prst="rect">
             <a:avLst/>
@@ -5610,137 +6946,50 @@
               <a:buNone/>
             </a:pPr>
             <a:r>
-              <a:rPr lang="en-US" sz="1200" i="1" dirty="0">
-                <a:solidFill>
-                  <a:srgbClr val="6B7280"/>
-                </a:solidFill>
-                <a:latin typeface="Calibri" pitchFamily="34" charset="0"/>
-                <a:ea typeface="Calibri" pitchFamily="34" charset="-122"/>
-                <a:cs typeface="Calibri" pitchFamily="34" charset="-120"/>
-              </a:rPr>
-              <a:t>Kotlin oder Java, direkt gegen Android</a:t>
-            </a:r>
-            <a:endParaRPr lang="en-US" sz="1200" dirty="0"/>
-          </a:p>
-        </p:txBody>
-      </p:sp>
-      <p:sp>
-        <p:nvSpPr>
-          <p:cNvPr id="8" name="Text 6"/>
-          <p:cNvSpPr/>
-          <p:nvPr/>
-        </p:nvSpPr>
-        <p:spPr>
-          <a:xfrm>
-            <a:off x="914400" y="2971800"/>
-            <a:ext cx="2844698" cy="2011680"/>
-          </a:xfrm>
-          <a:prstGeom prst="rect">
-            <a:avLst/>
-          </a:prstGeom>
-          <a:noFill/>
-          <a:ln/>
-        </p:spPr>
-        <p:txBody>
-          <a:bodyPr wrap="square" lIns="0" tIns="0" rIns="0" bIns="0" rtlCol="0" anchor="t"/>
-          <a:lstStyle/>
-          <a:p>
-            <a:pPr marL="342900" indent="-342900">
-              <a:spcAft>
-                <a:spcPts val="1000"/>
-              </a:spcAft>
-              <a:buSzPct val="100000"/>
-              <a:buChar char="•"/>
-            </a:pPr>
-            <a:r>
-              <a:rPr lang="en-US" sz="1300" dirty="0">
-                <a:solidFill>
-                  <a:srgbClr val="374151"/>
-                </a:solidFill>
-                <a:latin typeface="Calibri" pitchFamily="34" charset="0"/>
-                <a:ea typeface="Calibri" pitchFamily="34" charset="-122"/>
-                <a:cs typeface="Calibri" pitchFamily="34" charset="-120"/>
-              </a:rPr>
-              <a:t>Volle Kontrolle</a:t>
-            </a:r>
-            <a:endParaRPr lang="en-US" sz="1300" dirty="0"/>
-          </a:p>
-          <a:p>
-            <a:pPr marL="342900" indent="-342900">
-              <a:spcAft>
-                <a:spcPts val="1000"/>
-              </a:spcAft>
-              <a:buSzPct val="100000"/>
-              <a:buChar char="•"/>
-            </a:pPr>
-            <a:r>
-              <a:rPr lang="en-US" sz="1300" dirty="0">
-                <a:solidFill>
-                  <a:srgbClr val="374151"/>
-                </a:solidFill>
-                <a:latin typeface="Calibri" pitchFamily="34" charset="0"/>
-                <a:ea typeface="Calibri" pitchFamily="34" charset="-122"/>
-                <a:cs typeface="Calibri" pitchFamily="34" charset="-120"/>
-              </a:rPr>
-              <a:t>Beste Performance</a:t>
-            </a:r>
-            <a:endParaRPr lang="en-US" sz="1300" dirty="0"/>
-          </a:p>
-          <a:p>
-            <a:pPr marL="342900" indent="-342900">
-              <a:spcAft>
-                <a:spcPts val="1000"/>
-              </a:spcAft>
-              <a:buSzPct val="100000"/>
-              <a:buChar char="•"/>
-            </a:pPr>
-            <a:r>
-              <a:rPr lang="en-US" sz="1300" dirty="0">
-                <a:solidFill>
-                  <a:srgbClr val="374151"/>
-                </a:solidFill>
-                <a:latin typeface="Calibri" pitchFamily="34" charset="0"/>
-                <a:ea typeface="Calibri" pitchFamily="34" charset="-122"/>
-                <a:cs typeface="Calibri" pitchFamily="34" charset="-120"/>
-              </a:rPr>
-              <a:t>Pro Plattform komplett neu</a:t>
-            </a:r>
-            <a:endParaRPr lang="en-US" sz="1300" dirty="0"/>
-          </a:p>
-        </p:txBody>
-      </p:sp>
-      <p:sp>
-        <p:nvSpPr>
-          <p:cNvPr id="9" name="Shape 7"/>
-          <p:cNvSpPr/>
-          <p:nvPr/>
-        </p:nvSpPr>
-        <p:spPr>
-          <a:xfrm>
-            <a:off x="4399178" y="1691640"/>
-            <a:ext cx="3393338" cy="3931920"/>
-          </a:xfrm>
-          <a:prstGeom prst="roundRect">
-            <a:avLst>
-              <a:gd name="adj" fmla="val 2156"/>
-            </a:avLst>
+              <a:rPr lang="en-US" sz="1400" dirty="0">
+                <a:solidFill>
+                  <a:srgbClr val="E5E7EB"/>
+                </a:solidFill>
+                <a:latin typeface="Calibri" pitchFamily="34" charset="0"/>
+                <a:ea typeface="Calibri" pitchFamily="34" charset="-122"/>
+                <a:cs typeface="Calibri" pitchFamily="34" charset="-120"/>
+              </a:rPr>
+              <a:t>Aufnahme erscheint sofort in der Liste</a:t>
+            </a:r>
+            <a:endParaRPr lang="en-US" sz="1400" dirty="0"/>
+          </a:p>
+        </p:txBody>
+      </p:sp>
+      <p:sp>
+        <p:nvSpPr>
+          <p:cNvPr id="11" name="Shape 9"/>
+          <p:cNvSpPr/>
+          <p:nvPr/>
+        </p:nvSpPr>
+        <p:spPr>
+          <a:xfrm>
+            <a:off x="640080" y="4343400"/>
+            <a:ext cx="384048" cy="384048"/>
+          </a:xfrm>
+          <a:prstGeom prst="ellipse">
+            <a:avLst/>
           </a:prstGeom>
           <a:solidFill>
-            <a:srgbClr val="0F1419"/>
+            <a:srgbClr val="E23E3E"/>
           </a:solidFill>
           <a:ln/>
         </p:spPr>
       </p:sp>
       <p:sp>
         <p:nvSpPr>
-          <p:cNvPr id="10" name="Text 8"/>
-          <p:cNvSpPr/>
-          <p:nvPr/>
-        </p:nvSpPr>
-        <p:spPr>
-          <a:xfrm>
-            <a:off x="4673498" y="1920240"/>
-            <a:ext cx="2844698" cy="411480"/>
+          <p:cNvPr id="12" name="Text 10"/>
+          <p:cNvSpPr/>
+          <p:nvPr/>
+        </p:nvSpPr>
+        <p:spPr>
+          <a:xfrm>
+            <a:off x="640080" y="4343400"/>
+            <a:ext cx="384048" cy="384048"/>
           </a:xfrm>
           <a:prstGeom prst="rect">
             <a:avLst/>
@@ -5752,34 +7001,34 @@
           <a:bodyPr wrap="square" lIns="0" tIns="0" rIns="0" bIns="0" rtlCol="0" anchor="ctr"/>
           <a:lstStyle/>
           <a:p>
-            <a:pPr indent="0" marL="0">
-              <a:buNone/>
-            </a:pPr>
-            <a:r>
-              <a:rPr lang="en-US" sz="2200" b="1" dirty="0">
+            <a:pPr algn="ctr" indent="0" marL="0">
+              <a:buNone/>
+            </a:pPr>
+            <a:r>
+              <a:rPr lang="en-US" sz="1500" b="1" dirty="0">
                 <a:solidFill>
                   <a:srgbClr val="FFFFFF"/>
                 </a:solidFill>
-                <a:latin typeface="Cambria" pitchFamily="34" charset="0"/>
-                <a:ea typeface="Cambria" pitchFamily="34" charset="-122"/>
-                <a:cs typeface="Cambria" pitchFamily="34" charset="-120"/>
-              </a:rPr>
-              <a:t>Hybrid</a:t>
-            </a:r>
-            <a:endParaRPr lang="en-US" sz="2200" dirty="0"/>
-          </a:p>
-        </p:txBody>
-      </p:sp>
-      <p:sp>
-        <p:nvSpPr>
-          <p:cNvPr id="11" name="Text 9"/>
-          <p:cNvSpPr/>
-          <p:nvPr/>
-        </p:nvSpPr>
-        <p:spPr>
-          <a:xfrm>
-            <a:off x="4673498" y="2359152"/>
-            <a:ext cx="2844698" cy="548640"/>
+                <a:latin typeface="Calibri" pitchFamily="34" charset="0"/>
+                <a:ea typeface="Calibri" pitchFamily="34" charset="-122"/>
+                <a:cs typeface="Calibri" pitchFamily="34" charset="-120"/>
+              </a:rPr>
+              <a:t>3</a:t>
+            </a:r>
+            <a:endParaRPr lang="en-US" sz="1500" dirty="0"/>
+          </a:p>
+        </p:txBody>
+      </p:sp>
+      <p:sp>
+        <p:nvSpPr>
+          <p:cNvPr id="13" name="Text 11"/>
+          <p:cNvSpPr/>
+          <p:nvPr/>
+        </p:nvSpPr>
+        <p:spPr>
+          <a:xfrm>
+            <a:off x="1188720" y="4343400"/>
+            <a:ext cx="4678528" cy="457200"/>
           </a:xfrm>
           <a:prstGeom prst="rect">
             <a:avLst/>
@@ -5795,50 +7044,7 @@
               <a:buNone/>
             </a:pPr>
             <a:r>
-              <a:rPr lang="en-US" sz="1200" i="1" dirty="0">
-                <a:solidFill>
-                  <a:srgbClr val="9AA4B2"/>
-                </a:solidFill>
-                <a:latin typeface="Calibri" pitchFamily="34" charset="0"/>
-                <a:ea typeface="Calibri" pitchFamily="34" charset="-122"/>
-                <a:cs typeface="Calibri" pitchFamily="34" charset="-120"/>
-              </a:rPr>
-              <a:t>Webseite in einer App-Hülle</a:t>
-            </a:r>
-            <a:endParaRPr lang="en-US" sz="1200" dirty="0"/>
-          </a:p>
-        </p:txBody>
-      </p:sp>
-      <p:sp>
-        <p:nvSpPr>
-          <p:cNvPr id="12" name="Text 10"/>
-          <p:cNvSpPr/>
-          <p:nvPr/>
-        </p:nvSpPr>
-        <p:spPr>
-          <a:xfrm>
-            <a:off x="4673498" y="2971800"/>
-            <a:ext cx="2844698" cy="2011680"/>
-          </a:xfrm>
-          <a:prstGeom prst="rect">
-            <a:avLst/>
-          </a:prstGeom>
-          <a:noFill/>
-          <a:ln/>
-        </p:spPr>
-        <p:txBody>
-          <a:bodyPr wrap="square" lIns="0" tIns="0" rIns="0" bIns="0" rtlCol="0" anchor="t"/>
-          <a:lstStyle/>
-          <a:p>
-            <a:pPr marL="342900" indent="-342900">
-              <a:spcAft>
-                <a:spcPts val="1000"/>
-              </a:spcAft>
-              <a:buSzPct val="100000"/>
-              <a:buChar char="•"/>
-            </a:pPr>
-            <a:r>
-              <a:rPr lang="en-US" sz="1300" dirty="0">
+              <a:rPr lang="en-US" sz="1400" dirty="0">
                 <a:solidFill>
                   <a:srgbClr val="E5E7EB"/>
                 </a:solidFill>
@@ -5846,20 +7052,97 @@
                 <a:ea typeface="Calibri" pitchFamily="34" charset="-122"/>
                 <a:cs typeface="Calibri" pitchFamily="34" charset="-120"/>
               </a:rPr>
-              <a:t>Eine Codebasis für Android und iOS</a:t>
-            </a:r>
-            <a:endParaRPr lang="en-US" sz="1300" dirty="0"/>
-          </a:p>
-          <a:p>
-            <a:pPr marL="342900" indent="-342900">
-              <a:spcAft>
-                <a:spcPts val="1000"/>
-              </a:spcAft>
-              <a:buSzPct val="100000"/>
-              <a:buChar char="•"/>
-            </a:pPr>
-            <a:r>
-              <a:rPr lang="en-US" sz="1300" dirty="0">
+              <a:t>Abspielen mit Fortschritt, Wiedergabe stoppen</a:t>
+            </a:r>
+            <a:endParaRPr lang="en-US" sz="1400" dirty="0"/>
+          </a:p>
+        </p:txBody>
+      </p:sp>
+      <p:sp>
+        <p:nvSpPr>
+          <p:cNvPr id="14" name="Shape 12"/>
+          <p:cNvSpPr/>
+          <p:nvPr/>
+        </p:nvSpPr>
+        <p:spPr>
+          <a:xfrm>
+            <a:off x="6324448" y="4343400"/>
+            <a:ext cx="384048" cy="384048"/>
+          </a:xfrm>
+          <a:prstGeom prst="ellipse">
+            <a:avLst/>
+          </a:prstGeom>
+          <a:solidFill>
+            <a:srgbClr val="2F6FED"/>
+          </a:solidFill>
+          <a:ln/>
+        </p:spPr>
+      </p:sp>
+      <p:sp>
+        <p:nvSpPr>
+          <p:cNvPr id="15" name="Text 13"/>
+          <p:cNvSpPr/>
+          <p:nvPr/>
+        </p:nvSpPr>
+        <p:spPr>
+          <a:xfrm>
+            <a:off x="6324448" y="4343400"/>
+            <a:ext cx="384048" cy="384048"/>
+          </a:xfrm>
+          <a:prstGeom prst="rect">
+            <a:avLst/>
+          </a:prstGeom>
+          <a:noFill/>
+          <a:ln/>
+        </p:spPr>
+        <p:txBody>
+          <a:bodyPr wrap="square" lIns="0" tIns="0" rIns="0" bIns="0" rtlCol="0" anchor="ctr"/>
+          <a:lstStyle/>
+          <a:p>
+            <a:pPr algn="ctr" indent="0" marL="0">
+              <a:buNone/>
+            </a:pPr>
+            <a:r>
+              <a:rPr lang="en-US" sz="1500" b="1" dirty="0">
+                <a:solidFill>
+                  <a:srgbClr val="FFFFFF"/>
+                </a:solidFill>
+                <a:latin typeface="Calibri" pitchFamily="34" charset="0"/>
+                <a:ea typeface="Calibri" pitchFamily="34" charset="-122"/>
+                <a:cs typeface="Calibri" pitchFamily="34" charset="-120"/>
+              </a:rPr>
+              <a:t>4</a:t>
+            </a:r>
+            <a:endParaRPr lang="en-US" sz="1500" dirty="0"/>
+          </a:p>
+        </p:txBody>
+      </p:sp>
+      <p:sp>
+        <p:nvSpPr>
+          <p:cNvPr id="16" name="Text 14"/>
+          <p:cNvSpPr/>
+          <p:nvPr/>
+        </p:nvSpPr>
+        <p:spPr>
+          <a:xfrm>
+            <a:off x="6873088" y="4343400"/>
+            <a:ext cx="4678528" cy="457200"/>
+          </a:xfrm>
+          <a:prstGeom prst="rect">
+            <a:avLst/>
+          </a:prstGeom>
+          <a:noFill/>
+          <a:ln/>
+        </p:spPr>
+        <p:txBody>
+          <a:bodyPr wrap="square" lIns="0" tIns="0" rIns="0" bIns="0" rtlCol="0" anchor="ctr"/>
+          <a:lstStyle/>
+          <a:p>
+            <a:pPr indent="0" marL="0">
+              <a:buNone/>
+            </a:pPr>
+            <a:r>
+              <a:rPr lang="en-US" sz="1400" dirty="0">
                 <a:solidFill>
                   <a:srgbClr val="E5E7EB"/>
                 </a:solidFill>
@@ -5867,20 +7150,97 @@
                 <a:ea typeface="Calibri" pitchFamily="34" charset="-122"/>
                 <a:cs typeface="Calibri" pitchFamily="34" charset="-120"/>
               </a:rPr>
-              <a:t>Web-Kenntnisse genügen</a:t>
-            </a:r>
-            <a:endParaRPr lang="en-US" sz="1300" dirty="0"/>
-          </a:p>
-          <a:p>
-            <a:pPr marL="342900" indent="-342900">
-              <a:spcAft>
-                <a:spcPts val="1000"/>
-              </a:spcAft>
-              <a:buSzPct val="100000"/>
-              <a:buChar char="•"/>
-            </a:pPr>
-            <a:r>
-              <a:rPr lang="en-US" sz="1300" dirty="0">
+              <a:t>Teilen an eine andere App</a:t>
+            </a:r>
+            <a:endParaRPr lang="en-US" sz="1400" dirty="0"/>
+          </a:p>
+        </p:txBody>
+      </p:sp>
+      <p:sp>
+        <p:nvSpPr>
+          <p:cNvPr id="17" name="Shape 15"/>
+          <p:cNvSpPr/>
+          <p:nvPr/>
+        </p:nvSpPr>
+        <p:spPr>
+          <a:xfrm>
+            <a:off x="640080" y="5120640"/>
+            <a:ext cx="384048" cy="384048"/>
+          </a:xfrm>
+          <a:prstGeom prst="ellipse">
+            <a:avLst/>
+          </a:prstGeom>
+          <a:solidFill>
+            <a:srgbClr val="E23E3E"/>
+          </a:solidFill>
+          <a:ln/>
+        </p:spPr>
+      </p:sp>
+      <p:sp>
+        <p:nvSpPr>
+          <p:cNvPr id="18" name="Text 16"/>
+          <p:cNvSpPr/>
+          <p:nvPr/>
+        </p:nvSpPr>
+        <p:spPr>
+          <a:xfrm>
+            <a:off x="640080" y="5120640"/>
+            <a:ext cx="384048" cy="384048"/>
+          </a:xfrm>
+          <a:prstGeom prst="rect">
+            <a:avLst/>
+          </a:prstGeom>
+          <a:noFill/>
+          <a:ln/>
+        </p:spPr>
+        <p:txBody>
+          <a:bodyPr wrap="square" lIns="0" tIns="0" rIns="0" bIns="0" rtlCol="0" anchor="ctr"/>
+          <a:lstStyle/>
+          <a:p>
+            <a:pPr algn="ctr" indent="0" marL="0">
+              <a:buNone/>
+            </a:pPr>
+            <a:r>
+              <a:rPr lang="en-US" sz="1500" b="1" dirty="0">
+                <a:solidFill>
+                  <a:srgbClr val="FFFFFF"/>
+                </a:solidFill>
+                <a:latin typeface="Calibri" pitchFamily="34" charset="0"/>
+                <a:ea typeface="Calibri" pitchFamily="34" charset="-122"/>
+                <a:cs typeface="Calibri" pitchFamily="34" charset="-120"/>
+              </a:rPr>
+              <a:t>5</a:t>
+            </a:r>
+            <a:endParaRPr lang="en-US" sz="1500" dirty="0"/>
+          </a:p>
+        </p:txBody>
+      </p:sp>
+      <p:sp>
+        <p:nvSpPr>
+          <p:cNvPr id="19" name="Text 17"/>
+          <p:cNvSpPr/>
+          <p:nvPr/>
+        </p:nvSpPr>
+        <p:spPr>
+          <a:xfrm>
+            <a:off x="1188720" y="5120640"/>
+            <a:ext cx="4678528" cy="457200"/>
+          </a:xfrm>
+          <a:prstGeom prst="rect">
+            <a:avLst/>
+          </a:prstGeom>
+          <a:noFill/>
+          <a:ln/>
+        </p:spPr>
+        <p:txBody>
+          <a:bodyPr wrap="square" lIns="0" tIns="0" rIns="0" bIns="0" rtlCol="0" anchor="ctr"/>
+          <a:lstStyle/>
+          <a:p>
+            <a:pPr indent="0" marL="0">
+              <a:buNone/>
+            </a:pPr>
+            <a:r>
+              <a:rPr lang="en-US" sz="1400" dirty="0">
                 <a:solidFill>
                   <a:srgbClr val="E5E7EB"/>
                 </a:solidFill>
@@ -5888,22 +7248,42 @@
                 <a:ea typeface="Calibri" pitchFamily="34" charset="-122"/>
                 <a:cs typeface="Calibri" pitchFamily="34" charset="-120"/>
               </a:rPr>
-              <a:t>Gerätezugriff nur über Plugins</a:t>
-            </a:r>
-            <a:endParaRPr lang="en-US" sz="1300" dirty="0"/>
-          </a:p>
-        </p:txBody>
-      </p:sp>
-      <p:sp>
-        <p:nvSpPr>
-          <p:cNvPr id="13" name="Text 11"/>
-          <p:cNvSpPr/>
-          <p:nvPr/>
-        </p:nvSpPr>
-        <p:spPr>
-          <a:xfrm>
-            <a:off x="4673498" y="5074920"/>
-            <a:ext cx="2844698" cy="320040"/>
+              <a:t>App schließen und neu öffnen — Aufnahme ist noch da</a:t>
+            </a:r>
+            <a:endParaRPr lang="en-US" sz="1400" dirty="0"/>
+          </a:p>
+        </p:txBody>
+      </p:sp>
+      <p:sp>
+        <p:nvSpPr>
+          <p:cNvPr id="20" name="Shape 18"/>
+          <p:cNvSpPr/>
+          <p:nvPr/>
+        </p:nvSpPr>
+        <p:spPr>
+          <a:xfrm>
+            <a:off x="6324448" y="5120640"/>
+            <a:ext cx="384048" cy="384048"/>
+          </a:xfrm>
+          <a:prstGeom prst="ellipse">
+            <a:avLst/>
+          </a:prstGeom>
+          <a:solidFill>
+            <a:srgbClr val="2F6FED"/>
+          </a:solidFill>
+          <a:ln/>
+        </p:spPr>
+      </p:sp>
+      <p:sp>
+        <p:nvSpPr>
+          <p:cNvPr id="21" name="Text 19"/>
+          <p:cNvSpPr/>
+          <p:nvPr/>
+        </p:nvSpPr>
+        <p:spPr>
+          <a:xfrm>
+            <a:off x="6324448" y="5120640"/>
+            <a:ext cx="384048" cy="384048"/>
           </a:xfrm>
           <a:prstGeom prst="rect">
             <a:avLst/>
@@ -5915,56 +7295,34 @@
           <a:bodyPr wrap="square" lIns="0" tIns="0" rIns="0" bIns="0" rtlCol="0" anchor="ctr"/>
           <a:lstStyle/>
           <a:p>
-            <a:pPr indent="0" marL="0">
-              <a:buNone/>
-            </a:pPr>
-            <a:r>
-              <a:rPr lang="en-US" sz="1200" b="1" dirty="0">
-                <a:solidFill>
-                  <a:srgbClr val="E23E3E"/>
-                </a:solidFill>
-                <a:latin typeface="Calibri" pitchFamily="34" charset="0"/>
-                <a:ea typeface="Calibri" pitchFamily="34" charset="-122"/>
-                <a:cs typeface="Calibri" pitchFamily="34" charset="-120"/>
-              </a:rPr>
-              <a:t>unsere Wahl</a:t>
-            </a:r>
-            <a:endParaRPr lang="en-US" sz="1200" dirty="0"/>
-          </a:p>
-        </p:txBody>
-      </p:sp>
-      <p:sp>
-        <p:nvSpPr>
-          <p:cNvPr id="14" name="Shape 12"/>
-          <p:cNvSpPr/>
-          <p:nvPr/>
-        </p:nvSpPr>
-        <p:spPr>
-          <a:xfrm>
-            <a:off x="8158277" y="1691640"/>
-            <a:ext cx="3393338" cy="3931920"/>
-          </a:xfrm>
-          <a:prstGeom prst="roundRect">
-            <a:avLst>
-              <a:gd name="adj" fmla="val 2156"/>
-            </a:avLst>
-          </a:prstGeom>
-          <a:solidFill>
-            <a:srgbClr val="F4F5F7"/>
-          </a:solidFill>
-          <a:ln/>
-        </p:spPr>
-      </p:sp>
-      <p:sp>
-        <p:nvSpPr>
-          <p:cNvPr id="15" name="Text 13"/>
-          <p:cNvSpPr/>
-          <p:nvPr/>
-        </p:nvSpPr>
-        <p:spPr>
-          <a:xfrm>
-            <a:off x="8432597" y="1920240"/>
-            <a:ext cx="2844698" cy="411480"/>
+            <a:pPr algn="ctr" indent="0" marL="0">
+              <a:buNone/>
+            </a:pPr>
+            <a:r>
+              <a:rPr lang="en-US" sz="1500" b="1" dirty="0">
+                <a:solidFill>
+                  <a:srgbClr val="FFFFFF"/>
+                </a:solidFill>
+                <a:latin typeface="Calibri" pitchFamily="34" charset="0"/>
+                <a:ea typeface="Calibri" pitchFamily="34" charset="-122"/>
+                <a:cs typeface="Calibri" pitchFamily="34" charset="-120"/>
+              </a:rPr>
+              <a:t>6</a:t>
+            </a:r>
+            <a:endParaRPr lang="en-US" sz="1500" dirty="0"/>
+          </a:p>
+        </p:txBody>
+      </p:sp>
+      <p:sp>
+        <p:nvSpPr>
+          <p:cNvPr id="22" name="Text 20"/>
+          <p:cNvSpPr/>
+          <p:nvPr/>
+        </p:nvSpPr>
+        <p:spPr>
+          <a:xfrm>
+            <a:off x="6873088" y="5120640"/>
+            <a:ext cx="4678528" cy="457200"/>
           </a:xfrm>
           <a:prstGeom prst="rect">
             <a:avLst/>
@@ -5980,180 +7338,17 @@
               <a:buNone/>
             </a:pPr>
             <a:r>
-              <a:rPr lang="en-US" sz="2200" b="1" dirty="0">
-                <a:solidFill>
-                  <a:srgbClr val="111827"/>
-                </a:solidFill>
-                <a:latin typeface="Cambria" pitchFamily="34" charset="0"/>
-                <a:ea typeface="Cambria" pitchFamily="34" charset="-122"/>
-                <a:cs typeface="Cambria" pitchFamily="34" charset="-120"/>
-              </a:rPr>
-              <a:t>Cross-Platform</a:t>
-            </a:r>
-            <a:endParaRPr lang="en-US" sz="2200" dirty="0"/>
-          </a:p>
-        </p:txBody>
-      </p:sp>
-      <p:sp>
-        <p:nvSpPr>
-          <p:cNvPr id="16" name="Text 14"/>
-          <p:cNvSpPr/>
-          <p:nvPr/>
-        </p:nvSpPr>
-        <p:spPr>
-          <a:xfrm>
-            <a:off x="8432597" y="2359152"/>
-            <a:ext cx="2844698" cy="548640"/>
-          </a:xfrm>
-          <a:prstGeom prst="rect">
-            <a:avLst/>
-          </a:prstGeom>
-          <a:noFill/>
-          <a:ln/>
-        </p:spPr>
-        <p:txBody>
-          <a:bodyPr wrap="square" lIns="0" tIns="0" rIns="0" bIns="0" rtlCol="0" anchor="ctr"/>
-          <a:lstStyle/>
-          <a:p>
-            <a:pPr indent="0" marL="0">
-              <a:buNone/>
-            </a:pPr>
-            <a:r>
-              <a:rPr lang="en-US" sz="1200" i="1" dirty="0">
-                <a:solidFill>
-                  <a:srgbClr val="6B7280"/>
-                </a:solidFill>
-                <a:latin typeface="Calibri" pitchFamily="34" charset="0"/>
-                <a:ea typeface="Calibri" pitchFamily="34" charset="-122"/>
-                <a:cs typeface="Calibri" pitchFamily="34" charset="-120"/>
-              </a:rPr>
-              <a:t>Flutter, React Native</a:t>
-            </a:r>
-            <a:endParaRPr lang="en-US" sz="1200" dirty="0"/>
-          </a:p>
-        </p:txBody>
-      </p:sp>
-      <p:sp>
-        <p:nvSpPr>
-          <p:cNvPr id="17" name="Text 15"/>
-          <p:cNvSpPr/>
-          <p:nvPr/>
-        </p:nvSpPr>
-        <p:spPr>
-          <a:xfrm>
-            <a:off x="8432597" y="2971800"/>
-            <a:ext cx="2844698" cy="2011680"/>
-          </a:xfrm>
-          <a:prstGeom prst="rect">
-            <a:avLst/>
-          </a:prstGeom>
-          <a:noFill/>
-          <a:ln/>
-        </p:spPr>
-        <p:txBody>
-          <a:bodyPr wrap="square" lIns="0" tIns="0" rIns="0" bIns="0" rtlCol="0" anchor="t"/>
-          <a:lstStyle/>
-          <a:p>
-            <a:pPr marL="342900" indent="-342900">
-              <a:spcAft>
-                <a:spcPts val="1000"/>
-              </a:spcAft>
-              <a:buSzPct val="100000"/>
-              <a:buChar char="•"/>
-            </a:pPr>
-            <a:r>
-              <a:rPr lang="en-US" sz="1300" dirty="0">
-                <a:solidFill>
-                  <a:srgbClr val="374151"/>
-                </a:solidFill>
-                <a:latin typeface="Calibri" pitchFamily="34" charset="0"/>
-                <a:ea typeface="Calibri" pitchFamily="34" charset="-122"/>
-                <a:cs typeface="Calibri" pitchFamily="34" charset="-120"/>
-              </a:rPr>
-              <a:t>Eine Codebasis, native Oberfläche</a:t>
-            </a:r>
-            <a:endParaRPr lang="en-US" sz="1300" dirty="0"/>
-          </a:p>
-          <a:p>
-            <a:pPr marL="342900" indent="-342900">
-              <a:spcAft>
-                <a:spcPts val="1000"/>
-              </a:spcAft>
-              <a:buSzPct val="100000"/>
-              <a:buChar char="•"/>
-            </a:pPr>
-            <a:r>
-              <a:rPr lang="en-US" sz="1300" dirty="0">
-                <a:solidFill>
-                  <a:srgbClr val="374151"/>
-                </a:solidFill>
-                <a:latin typeface="Calibri" pitchFamily="34" charset="0"/>
-                <a:ea typeface="Calibri" pitchFamily="34" charset="-122"/>
-                <a:cs typeface="Calibri" pitchFamily="34" charset="-120"/>
-              </a:rPr>
-              <a:t>Eigenes Ökosystem</a:t>
-            </a:r>
-            <a:endParaRPr lang="en-US" sz="1300" dirty="0"/>
-          </a:p>
-          <a:p>
-            <a:pPr marL="342900" indent="-342900">
-              <a:spcAft>
-                <a:spcPts val="1000"/>
-              </a:spcAft>
-              <a:buSzPct val="100000"/>
-              <a:buChar char="•"/>
-            </a:pPr>
-            <a:r>
-              <a:rPr lang="en-US" sz="1300" dirty="0">
-                <a:solidFill>
-                  <a:srgbClr val="374151"/>
-                </a:solidFill>
-                <a:latin typeface="Calibri" pitchFamily="34" charset="0"/>
-                <a:ea typeface="Calibri" pitchFamily="34" charset="-122"/>
-                <a:cs typeface="Calibri" pitchFamily="34" charset="-120"/>
-              </a:rPr>
-              <a:t>Neue Sprache nötig</a:t>
-            </a:r>
-            <a:endParaRPr lang="en-US" sz="1300" dirty="0"/>
-          </a:p>
-        </p:txBody>
-      </p:sp>
-      <p:sp>
-        <p:nvSpPr>
-          <p:cNvPr id="18" name="Text 16"/>
-          <p:cNvSpPr/>
-          <p:nvPr/>
-        </p:nvSpPr>
-        <p:spPr>
-          <a:xfrm>
-            <a:off x="640080" y="5897880"/>
-            <a:ext cx="10911535" cy="365760"/>
-          </a:xfrm>
-          <a:prstGeom prst="rect">
-            <a:avLst/>
-          </a:prstGeom>
-          <a:noFill/>
-          <a:ln/>
-        </p:spPr>
-        <p:txBody>
-          <a:bodyPr wrap="square" lIns="0" tIns="0" rIns="0" bIns="0" rtlCol="0" anchor="ctr"/>
-          <a:lstStyle/>
-          <a:p>
-            <a:pPr indent="0" marL="0">
-              <a:buNone/>
-            </a:pPr>
-            <a:r>
-              <a:rPr lang="en-US" sz="1300" i="1" dirty="0">
-                <a:solidFill>
-                  <a:srgbClr val="6B7280"/>
-                </a:solidFill>
-                <a:latin typeface="Calibri" pitchFamily="34" charset="0"/>
-                <a:ea typeface="Calibri" pitchFamily="34" charset="-122"/>
-                <a:cs typeface="Calibri" pitchFamily="34" charset="-120"/>
-              </a:rPr>
-              <a:t>Die genannten Plugins gibt es nur für Capacitor — damit war der hybride Weg gesetzt.</a:t>
-            </a:r>
-            <a:endParaRPr lang="en-US" sz="1300" dirty="0"/>
+              <a:rPr lang="en-US" sz="1400" dirty="0">
+                <a:solidFill>
+                  <a:srgbClr val="E5E7EB"/>
+                </a:solidFill>
+                <a:latin typeface="Calibri" pitchFamily="34" charset="0"/>
+                <a:ea typeface="Calibri" pitchFamily="34" charset="-122"/>
+                <a:cs typeface="Calibri" pitchFamily="34" charset="-120"/>
+              </a:rPr>
+              <a:t>Löschen</a:t>
+            </a:r>
+            <a:endParaRPr lang="en-US" sz="1400" dirty="0"/>
           </a:p>
         </p:txBody>
       </p:sp>
@@ -6242,7 +7437,7 @@
                 <a:ea typeface="Cambria" pitchFamily="34" charset="-122"/>
                 <a:cs typeface="Cambria" pitchFamily="34" charset="-120"/>
               </a:rPr>
-              <a:t>Wie wir vorgegangen sind</a:t>
+              <a:t>Nativ, hybrid oder cross-platform?</a:t>
             </a:r>
             <a:endParaRPr lang="en-US" sz="3200" dirty="0"/>
           </a:p>
@@ -6250,34 +7445,14 @@
       </p:sp>
       <p:sp>
         <p:nvSpPr>
-          <p:cNvPr id="4" name="Shape 2"/>
-          <p:cNvSpPr/>
-          <p:nvPr/>
-        </p:nvSpPr>
-        <p:spPr>
-          <a:xfrm>
-            <a:off x="640080" y="1737360"/>
-            <a:ext cx="384048" cy="384048"/>
-          </a:xfrm>
-          <a:prstGeom prst="ellipse">
-            <a:avLst/>
-          </a:prstGeom>
-          <a:solidFill>
-            <a:srgbClr val="2F6FED"/>
-          </a:solidFill>
-          <a:ln/>
-        </p:spPr>
-      </p:sp>
-      <p:sp>
-        <p:nvSpPr>
-          <p:cNvPr id="5" name="Text 3"/>
-          <p:cNvSpPr/>
-          <p:nvPr/>
-        </p:nvSpPr>
-        <p:spPr>
-          <a:xfrm>
-            <a:off x="640080" y="1737360"/>
-            <a:ext cx="384048" cy="384048"/>
+          <p:cNvPr id="4" name="Text 2"/>
+          <p:cNvSpPr/>
+          <p:nvPr/>
+        </p:nvSpPr>
+        <p:spPr>
+          <a:xfrm>
+            <a:off x="932688" y="932688"/>
+            <a:ext cx="10618927" cy="320040"/>
           </a:xfrm>
           <a:prstGeom prst="rect">
             <a:avLst/>
@@ -6289,664 +7464,38 @@
           <a:bodyPr wrap="square" lIns="0" tIns="0" rIns="0" bIns="0" rtlCol="0" anchor="ctr"/>
           <a:lstStyle/>
           <a:p>
-            <a:pPr algn="ctr" indent="0" marL="0">
-              <a:buNone/>
-            </a:pPr>
-            <a:r>
-              <a:rPr lang="en-US" sz="1500" b="1" dirty="0">
-                <a:solidFill>
-                  <a:srgbClr val="FFFFFF"/>
-                </a:solidFill>
-                <a:latin typeface="Calibri" pitchFamily="34" charset="0"/>
-                <a:ea typeface="Calibri" pitchFamily="34" charset="-122"/>
-                <a:cs typeface="Calibri" pitchFamily="34" charset="-120"/>
-              </a:rPr>
-              <a:t>1</a:t>
-            </a:r>
-            <a:endParaRPr lang="en-US" sz="1500" dirty="0"/>
-          </a:p>
-        </p:txBody>
-      </p:sp>
-      <p:sp>
-        <p:nvSpPr>
-          <p:cNvPr id="6" name="Text 4"/>
-          <p:cNvSpPr/>
-          <p:nvPr/>
-        </p:nvSpPr>
-        <p:spPr>
-          <a:xfrm>
-            <a:off x="640080" y="2286000"/>
-            <a:ext cx="1926275" cy="365760"/>
-          </a:xfrm>
-          <a:prstGeom prst="rect">
-            <a:avLst/>
-          </a:prstGeom>
-          <a:noFill/>
-          <a:ln/>
-        </p:spPr>
-        <p:txBody>
-          <a:bodyPr wrap="square" lIns="0" tIns="0" rIns="0" bIns="0" rtlCol="0" anchor="ctr"/>
-          <a:lstStyle/>
-          <a:p>
-            <a:pPr indent="0" marL="0">
-              <a:buNone/>
-            </a:pPr>
-            <a:r>
-              <a:rPr lang="en-US" sz="1600" b="1" dirty="0">
-                <a:solidFill>
-                  <a:srgbClr val="111827"/>
-                </a:solidFill>
-                <a:latin typeface="Calibri" pitchFamily="34" charset="0"/>
-                <a:ea typeface="Calibri" pitchFamily="34" charset="-122"/>
-                <a:cs typeface="Calibri" pitchFamily="34" charset="-120"/>
-              </a:rPr>
-              <a:t>Analyse</a:t>
-            </a:r>
-            <a:endParaRPr lang="en-US" sz="1600" dirty="0"/>
-          </a:p>
-        </p:txBody>
-      </p:sp>
-      <p:sp>
-        <p:nvSpPr>
-          <p:cNvPr id="7" name="Text 5"/>
-          <p:cNvSpPr/>
-          <p:nvPr/>
-        </p:nvSpPr>
-        <p:spPr>
-          <a:xfrm>
-            <a:off x="640080" y="2697480"/>
-            <a:ext cx="1926275" cy="1737360"/>
-          </a:xfrm>
-          <a:prstGeom prst="rect">
-            <a:avLst/>
-          </a:prstGeom>
-          <a:noFill/>
-          <a:ln/>
-        </p:spPr>
-        <p:txBody>
-          <a:bodyPr wrap="square" lIns="0" tIns="0" rIns="0" bIns="0" rtlCol="0" anchor="t"/>
-          <a:lstStyle/>
-          <a:p>
-            <a:pPr indent="0" marL="0">
-              <a:buNone/>
-            </a:pPr>
-            <a:r>
-              <a:rPr lang="en-US" sz="1250" dirty="0">
-                <a:solidFill>
-                  <a:srgbClr val="374151"/>
-                </a:solidFill>
-                <a:latin typeface="Calibri" pitchFamily="34" charset="0"/>
-                <a:ea typeface="Calibri" pitchFamily="34" charset="-122"/>
-                <a:cs typeface="Calibri" pitchFamily="34" charset="-120"/>
-              </a:rPr>
-              <a:t>Anforderungen aufgeschlüsselt, Plugins und deren Dokumentation gesichtet</a:t>
-            </a:r>
-            <a:endParaRPr lang="en-US" sz="1250" dirty="0"/>
-          </a:p>
-        </p:txBody>
-      </p:sp>
-      <p:sp>
-        <p:nvSpPr>
-          <p:cNvPr id="8" name="Shape 6"/>
-          <p:cNvSpPr/>
-          <p:nvPr/>
-        </p:nvSpPr>
-        <p:spPr>
-          <a:xfrm>
-            <a:off x="2886395" y="1737360"/>
-            <a:ext cx="384048" cy="384048"/>
-          </a:xfrm>
-          <a:prstGeom prst="ellipse">
-            <a:avLst/>
-          </a:prstGeom>
-          <a:solidFill>
-            <a:srgbClr val="2F6FED"/>
-          </a:solidFill>
-          <a:ln/>
-        </p:spPr>
-      </p:sp>
-      <p:sp>
-        <p:nvSpPr>
-          <p:cNvPr id="9" name="Text 7"/>
-          <p:cNvSpPr/>
-          <p:nvPr/>
-        </p:nvSpPr>
-        <p:spPr>
-          <a:xfrm>
-            <a:off x="2886395" y="1737360"/>
-            <a:ext cx="384048" cy="384048"/>
-          </a:xfrm>
-          <a:prstGeom prst="rect">
-            <a:avLst/>
-          </a:prstGeom>
-          <a:noFill/>
-          <a:ln/>
-        </p:spPr>
-        <p:txBody>
-          <a:bodyPr wrap="square" lIns="0" tIns="0" rIns="0" bIns="0" rtlCol="0" anchor="ctr"/>
-          <a:lstStyle/>
-          <a:p>
-            <a:pPr algn="ctr" indent="0" marL="0">
-              <a:buNone/>
-            </a:pPr>
-            <a:r>
-              <a:rPr lang="en-US" sz="1500" b="1" dirty="0">
-                <a:solidFill>
-                  <a:srgbClr val="FFFFFF"/>
-                </a:solidFill>
-                <a:latin typeface="Calibri" pitchFamily="34" charset="0"/>
-                <a:ea typeface="Calibri" pitchFamily="34" charset="-122"/>
-                <a:cs typeface="Calibri" pitchFamily="34" charset="-120"/>
-              </a:rPr>
-              <a:t>2</a:t>
-            </a:r>
-            <a:endParaRPr lang="en-US" sz="1500" dirty="0"/>
-          </a:p>
-        </p:txBody>
-      </p:sp>
-      <p:sp>
-        <p:nvSpPr>
-          <p:cNvPr id="10" name="Text 8"/>
-          <p:cNvSpPr/>
-          <p:nvPr/>
-        </p:nvSpPr>
-        <p:spPr>
-          <a:xfrm>
-            <a:off x="2886395" y="2286000"/>
-            <a:ext cx="1926275" cy="365760"/>
-          </a:xfrm>
-          <a:prstGeom prst="rect">
-            <a:avLst/>
-          </a:prstGeom>
-          <a:noFill/>
-          <a:ln/>
-        </p:spPr>
-        <p:txBody>
-          <a:bodyPr wrap="square" lIns="0" tIns="0" rIns="0" bIns="0" rtlCol="0" anchor="ctr"/>
-          <a:lstStyle/>
-          <a:p>
-            <a:pPr indent="0" marL="0">
-              <a:buNone/>
-            </a:pPr>
-            <a:r>
-              <a:rPr lang="en-US" sz="1600" b="1" dirty="0">
-                <a:solidFill>
-                  <a:srgbClr val="111827"/>
-                </a:solidFill>
-                <a:latin typeface="Calibri" pitchFamily="34" charset="0"/>
-                <a:ea typeface="Calibri" pitchFamily="34" charset="-122"/>
-                <a:cs typeface="Calibri" pitchFamily="34" charset="-120"/>
-              </a:rPr>
-              <a:t>Erster Wurf</a:t>
-            </a:r>
-            <a:endParaRPr lang="en-US" sz="1600" dirty="0"/>
-          </a:p>
-        </p:txBody>
-      </p:sp>
-      <p:sp>
-        <p:nvSpPr>
-          <p:cNvPr id="11" name="Text 9"/>
-          <p:cNvSpPr/>
-          <p:nvPr/>
-        </p:nvSpPr>
-        <p:spPr>
-          <a:xfrm>
-            <a:off x="2886395" y="2697480"/>
-            <a:ext cx="1926275" cy="1737360"/>
-          </a:xfrm>
-          <a:prstGeom prst="rect">
-            <a:avLst/>
-          </a:prstGeom>
-          <a:noFill/>
-          <a:ln/>
-        </p:spPr>
-        <p:txBody>
-          <a:bodyPr wrap="square" lIns="0" tIns="0" rIns="0" bIns="0" rtlCol="0" anchor="t"/>
-          <a:lstStyle/>
-          <a:p>
-            <a:pPr indent="0" marL="0">
-              <a:buNone/>
-            </a:pPr>
-            <a:r>
-              <a:rPr lang="en-US" sz="1250" dirty="0">
-                <a:solidFill>
-                  <a:srgbClr val="374151"/>
-                </a:solidFill>
-                <a:latin typeface="Calibri" pitchFamily="34" charset="0"/>
-                <a:ea typeface="Calibri" pitchFamily="34" charset="-122"/>
-                <a:cs typeface="Calibri" pitchFamily="34" charset="-120"/>
-              </a:rPr>
-              <a:t>Prototyp mit KI-Unterstützung gebaut — lauffähig, aber am Ziel vorbei</a:t>
-            </a:r>
-            <a:endParaRPr lang="en-US" sz="1250" dirty="0"/>
-          </a:p>
-        </p:txBody>
-      </p:sp>
-      <p:sp>
-        <p:nvSpPr>
-          <p:cNvPr id="12" name="Shape 10"/>
-          <p:cNvSpPr/>
-          <p:nvPr/>
-        </p:nvSpPr>
-        <p:spPr>
-          <a:xfrm>
-            <a:off x="5132710" y="1737360"/>
-            <a:ext cx="384048" cy="384048"/>
-          </a:xfrm>
-          <a:prstGeom prst="ellipse">
-            <a:avLst/>
-          </a:prstGeom>
-          <a:solidFill>
-            <a:srgbClr val="E23E3E"/>
-          </a:solidFill>
-          <a:ln/>
-        </p:spPr>
-      </p:sp>
-      <p:sp>
-        <p:nvSpPr>
-          <p:cNvPr id="13" name="Text 11"/>
-          <p:cNvSpPr/>
-          <p:nvPr/>
-        </p:nvSpPr>
-        <p:spPr>
-          <a:xfrm>
-            <a:off x="5132710" y="1737360"/>
-            <a:ext cx="384048" cy="384048"/>
-          </a:xfrm>
-          <a:prstGeom prst="rect">
-            <a:avLst/>
-          </a:prstGeom>
-          <a:noFill/>
-          <a:ln/>
-        </p:spPr>
-        <p:txBody>
-          <a:bodyPr wrap="square" lIns="0" tIns="0" rIns="0" bIns="0" rtlCol="0" anchor="ctr"/>
-          <a:lstStyle/>
-          <a:p>
-            <a:pPr algn="ctr" indent="0" marL="0">
-              <a:buNone/>
-            </a:pPr>
-            <a:r>
-              <a:rPr lang="en-US" sz="1500" b="1" dirty="0">
-                <a:solidFill>
-                  <a:srgbClr val="FFFFFF"/>
-                </a:solidFill>
-                <a:latin typeface="Calibri" pitchFamily="34" charset="0"/>
-                <a:ea typeface="Calibri" pitchFamily="34" charset="-122"/>
-                <a:cs typeface="Calibri" pitchFamily="34" charset="-120"/>
-              </a:rPr>
-              <a:t>3</a:t>
-            </a:r>
-            <a:endParaRPr lang="en-US" sz="1500" dirty="0"/>
-          </a:p>
-        </p:txBody>
-      </p:sp>
-      <p:sp>
-        <p:nvSpPr>
-          <p:cNvPr id="14" name="Text 12"/>
-          <p:cNvSpPr/>
-          <p:nvPr/>
-        </p:nvSpPr>
-        <p:spPr>
-          <a:xfrm>
-            <a:off x="5132710" y="2286000"/>
-            <a:ext cx="1926275" cy="365760"/>
-          </a:xfrm>
-          <a:prstGeom prst="rect">
-            <a:avLst/>
-          </a:prstGeom>
-          <a:noFill/>
-          <a:ln/>
-        </p:spPr>
-        <p:txBody>
-          <a:bodyPr wrap="square" lIns="0" tIns="0" rIns="0" bIns="0" rtlCol="0" anchor="ctr"/>
-          <a:lstStyle/>
-          <a:p>
-            <a:pPr indent="0" marL="0">
-              <a:buNone/>
-            </a:pPr>
-            <a:r>
-              <a:rPr lang="en-US" sz="1600" b="1" dirty="0">
-                <a:solidFill>
-                  <a:srgbClr val="111827"/>
-                </a:solidFill>
-                <a:latin typeface="Calibri" pitchFamily="34" charset="0"/>
-                <a:ea typeface="Calibri" pitchFamily="34" charset="-122"/>
-                <a:cs typeface="Calibri" pitchFamily="34" charset="-120"/>
-              </a:rPr>
-              <a:t>Kurskorrektur</a:t>
-            </a:r>
-            <a:endParaRPr lang="en-US" sz="1600" dirty="0"/>
-          </a:p>
-        </p:txBody>
-      </p:sp>
-      <p:sp>
-        <p:nvSpPr>
-          <p:cNvPr id="15" name="Text 13"/>
-          <p:cNvSpPr/>
-          <p:nvPr/>
-        </p:nvSpPr>
-        <p:spPr>
-          <a:xfrm>
-            <a:off x="5132710" y="2697480"/>
-            <a:ext cx="1926275" cy="1737360"/>
-          </a:xfrm>
-          <a:prstGeom prst="rect">
-            <a:avLst/>
-          </a:prstGeom>
-          <a:noFill/>
-          <a:ln/>
-        </p:spPr>
-        <p:txBody>
-          <a:bodyPr wrap="square" lIns="0" tIns="0" rIns="0" bIns="0" rtlCol="0" anchor="t"/>
-          <a:lstStyle/>
-          <a:p>
-            <a:pPr indent="0" marL="0">
-              <a:buNone/>
-            </a:pPr>
-            <a:r>
-              <a:rPr lang="en-US" sz="1250" dirty="0">
-                <a:solidFill>
-                  <a:srgbClr val="374151"/>
-                </a:solidFill>
-                <a:latin typeface="Calibri" pitchFamily="34" charset="0"/>
-                <a:ea typeface="Calibri" pitchFamily="34" charset="-122"/>
-                <a:cs typeface="Calibri" pitchFamily="34" charset="-120"/>
-              </a:rPr>
-              <a:t>Architektur verworfen und auf Capacitor neu aufgesetzt</a:t>
-            </a:r>
-            <a:endParaRPr lang="en-US" sz="1250" dirty="0"/>
-          </a:p>
-        </p:txBody>
-      </p:sp>
-      <p:sp>
-        <p:nvSpPr>
-          <p:cNvPr id="16" name="Shape 14"/>
-          <p:cNvSpPr/>
-          <p:nvPr/>
-        </p:nvSpPr>
-        <p:spPr>
-          <a:xfrm>
-            <a:off x="7379025" y="1737360"/>
-            <a:ext cx="384048" cy="384048"/>
-          </a:xfrm>
-          <a:prstGeom prst="ellipse">
-            <a:avLst/>
-          </a:prstGeom>
-          <a:solidFill>
-            <a:srgbClr val="2F6FED"/>
-          </a:solidFill>
-          <a:ln/>
-        </p:spPr>
-      </p:sp>
-      <p:sp>
-        <p:nvSpPr>
-          <p:cNvPr id="17" name="Text 15"/>
-          <p:cNvSpPr/>
-          <p:nvPr/>
-        </p:nvSpPr>
-        <p:spPr>
-          <a:xfrm>
-            <a:off x="7379025" y="1737360"/>
-            <a:ext cx="384048" cy="384048"/>
-          </a:xfrm>
-          <a:prstGeom prst="rect">
-            <a:avLst/>
-          </a:prstGeom>
-          <a:noFill/>
-          <a:ln/>
-        </p:spPr>
-        <p:txBody>
-          <a:bodyPr wrap="square" lIns="0" tIns="0" rIns="0" bIns="0" rtlCol="0" anchor="ctr"/>
-          <a:lstStyle/>
-          <a:p>
-            <a:pPr algn="ctr" indent="0" marL="0">
-              <a:buNone/>
-            </a:pPr>
-            <a:r>
-              <a:rPr lang="en-US" sz="1500" b="1" dirty="0">
-                <a:solidFill>
-                  <a:srgbClr val="FFFFFF"/>
-                </a:solidFill>
-                <a:latin typeface="Calibri" pitchFamily="34" charset="0"/>
-                <a:ea typeface="Calibri" pitchFamily="34" charset="-122"/>
-                <a:cs typeface="Calibri" pitchFamily="34" charset="-120"/>
-              </a:rPr>
-              <a:t>4</a:t>
-            </a:r>
-            <a:endParaRPr lang="en-US" sz="1500" dirty="0"/>
-          </a:p>
-        </p:txBody>
-      </p:sp>
-      <p:sp>
-        <p:nvSpPr>
-          <p:cNvPr id="18" name="Text 16"/>
-          <p:cNvSpPr/>
-          <p:nvPr/>
-        </p:nvSpPr>
-        <p:spPr>
-          <a:xfrm>
-            <a:off x="7379025" y="2286000"/>
-            <a:ext cx="1926275" cy="365760"/>
-          </a:xfrm>
-          <a:prstGeom prst="rect">
-            <a:avLst/>
-          </a:prstGeom>
-          <a:noFill/>
-          <a:ln/>
-        </p:spPr>
-        <p:txBody>
-          <a:bodyPr wrap="square" lIns="0" tIns="0" rIns="0" bIns="0" rtlCol="0" anchor="ctr"/>
-          <a:lstStyle/>
-          <a:p>
-            <a:pPr indent="0" marL="0">
-              <a:buNone/>
-            </a:pPr>
-            <a:r>
-              <a:rPr lang="en-US" sz="1600" b="1" dirty="0">
-                <a:solidFill>
-                  <a:srgbClr val="111827"/>
-                </a:solidFill>
-                <a:latin typeface="Calibri" pitchFamily="34" charset="0"/>
-                <a:ea typeface="Calibri" pitchFamily="34" charset="-122"/>
-                <a:cs typeface="Calibri" pitchFamily="34" charset="-120"/>
-              </a:rPr>
-              <a:t>Umsetzung</a:t>
-            </a:r>
-            <a:endParaRPr lang="en-US" sz="1600" dirty="0"/>
-          </a:p>
-        </p:txBody>
-      </p:sp>
-      <p:sp>
-        <p:nvSpPr>
-          <p:cNvPr id="19" name="Text 17"/>
-          <p:cNvSpPr/>
-          <p:nvPr/>
-        </p:nvSpPr>
-        <p:spPr>
-          <a:xfrm>
-            <a:off x="7379025" y="2697480"/>
-            <a:ext cx="1926275" cy="1737360"/>
-          </a:xfrm>
-          <a:prstGeom prst="rect">
-            <a:avLst/>
-          </a:prstGeom>
-          <a:noFill/>
-          <a:ln/>
-        </p:spPr>
-        <p:txBody>
-          <a:bodyPr wrap="square" lIns="0" tIns="0" rIns="0" bIns="0" rtlCol="0" anchor="t"/>
-          <a:lstStyle/>
-          <a:p>
-            <a:pPr indent="0" marL="0">
-              <a:buNone/>
-            </a:pPr>
-            <a:r>
-              <a:rPr lang="en-US" sz="1250" dirty="0">
-                <a:solidFill>
-                  <a:srgbClr val="374151"/>
-                </a:solidFill>
-                <a:latin typeface="Calibri" pitchFamily="34" charset="0"/>
-                <a:ea typeface="Calibri" pitchFamily="34" charset="-122"/>
-                <a:cs typeface="Calibri" pitchFamily="34" charset="-120"/>
-              </a:rPr>
-              <a:t>Aufnahme, Wiedergabe, Dateiverwaltung und Oberfläche gebaut</a:t>
-            </a:r>
-            <a:endParaRPr lang="en-US" sz="1250" dirty="0"/>
-          </a:p>
-        </p:txBody>
-      </p:sp>
-      <p:sp>
-        <p:nvSpPr>
-          <p:cNvPr id="20" name="Shape 18"/>
-          <p:cNvSpPr/>
-          <p:nvPr/>
-        </p:nvSpPr>
-        <p:spPr>
-          <a:xfrm>
-            <a:off x="9625340" y="1737360"/>
-            <a:ext cx="384048" cy="384048"/>
-          </a:xfrm>
-          <a:prstGeom prst="ellipse">
-            <a:avLst/>
-          </a:prstGeom>
-          <a:solidFill>
-            <a:srgbClr val="2F6FED"/>
-          </a:solidFill>
-          <a:ln/>
-        </p:spPr>
-      </p:sp>
-      <p:sp>
-        <p:nvSpPr>
-          <p:cNvPr id="21" name="Text 19"/>
-          <p:cNvSpPr/>
-          <p:nvPr/>
-        </p:nvSpPr>
-        <p:spPr>
-          <a:xfrm>
-            <a:off x="9625340" y="1737360"/>
-            <a:ext cx="384048" cy="384048"/>
-          </a:xfrm>
-          <a:prstGeom prst="rect">
-            <a:avLst/>
-          </a:prstGeom>
-          <a:noFill/>
-          <a:ln/>
-        </p:spPr>
-        <p:txBody>
-          <a:bodyPr wrap="square" lIns="0" tIns="0" rIns="0" bIns="0" rtlCol="0" anchor="ctr"/>
-          <a:lstStyle/>
-          <a:p>
-            <a:pPr algn="ctr" indent="0" marL="0">
-              <a:buNone/>
-            </a:pPr>
-            <a:r>
-              <a:rPr lang="en-US" sz="1500" b="1" dirty="0">
-                <a:solidFill>
-                  <a:srgbClr val="FFFFFF"/>
-                </a:solidFill>
-                <a:latin typeface="Calibri" pitchFamily="34" charset="0"/>
-                <a:ea typeface="Calibri" pitchFamily="34" charset="-122"/>
-                <a:cs typeface="Calibri" pitchFamily="34" charset="-120"/>
-              </a:rPr>
-              <a:t>5</a:t>
-            </a:r>
-            <a:endParaRPr lang="en-US" sz="1500" dirty="0"/>
-          </a:p>
-        </p:txBody>
-      </p:sp>
-      <p:sp>
-        <p:nvSpPr>
-          <p:cNvPr id="22" name="Text 20"/>
-          <p:cNvSpPr/>
-          <p:nvPr/>
-        </p:nvSpPr>
-        <p:spPr>
-          <a:xfrm>
-            <a:off x="9625340" y="2286000"/>
-            <a:ext cx="1926275" cy="365760"/>
-          </a:xfrm>
-          <a:prstGeom prst="rect">
-            <a:avLst/>
-          </a:prstGeom>
-          <a:noFill/>
-          <a:ln/>
-        </p:spPr>
-        <p:txBody>
-          <a:bodyPr wrap="square" lIns="0" tIns="0" rIns="0" bIns="0" rtlCol="0" anchor="ctr"/>
-          <a:lstStyle/>
-          <a:p>
-            <a:pPr indent="0" marL="0">
-              <a:buNone/>
-            </a:pPr>
-            <a:r>
-              <a:rPr lang="en-US" sz="1600" b="1" dirty="0">
-                <a:solidFill>
-                  <a:srgbClr val="111827"/>
-                </a:solidFill>
-                <a:latin typeface="Calibri" pitchFamily="34" charset="0"/>
-                <a:ea typeface="Calibri" pitchFamily="34" charset="-122"/>
-                <a:cs typeface="Calibri" pitchFamily="34" charset="-120"/>
-              </a:rPr>
-              <a:t>Absicherung</a:t>
-            </a:r>
-            <a:endParaRPr lang="en-US" sz="1600" dirty="0"/>
-          </a:p>
-        </p:txBody>
-      </p:sp>
-      <p:sp>
-        <p:nvSpPr>
-          <p:cNvPr id="23" name="Text 21"/>
-          <p:cNvSpPr/>
-          <p:nvPr/>
-        </p:nvSpPr>
-        <p:spPr>
-          <a:xfrm>
-            <a:off x="9625340" y="2697480"/>
-            <a:ext cx="1926275" cy="1737360"/>
-          </a:xfrm>
-          <a:prstGeom prst="rect">
-            <a:avLst/>
-          </a:prstGeom>
-          <a:noFill/>
-          <a:ln/>
-        </p:spPr>
-        <p:txBody>
-          <a:bodyPr wrap="square" lIns="0" tIns="0" rIns="0" bIns="0" rtlCol="0" anchor="t"/>
-          <a:lstStyle/>
-          <a:p>
-            <a:pPr indent="0" marL="0">
-              <a:buNone/>
-            </a:pPr>
-            <a:r>
-              <a:rPr lang="en-US" sz="1250" dirty="0">
-                <a:solidFill>
-                  <a:srgbClr val="374151"/>
-                </a:solidFill>
-                <a:latin typeface="Calibri" pitchFamily="34" charset="0"/>
-                <a:ea typeface="Calibri" pitchFamily="34" charset="-122"/>
-                <a:cs typeface="Calibri" pitchFamily="34" charset="-120"/>
-              </a:rPr>
-              <a:t>Build geprüft, Repository bereinigt, auf Gerät getestet</a:t>
-            </a:r>
-            <a:endParaRPr lang="en-US" sz="1250" dirty="0"/>
-          </a:p>
-        </p:txBody>
-      </p:sp>
-      <p:sp>
-        <p:nvSpPr>
-          <p:cNvPr id="24" name="Shape 22"/>
-          <p:cNvSpPr/>
-          <p:nvPr/>
-        </p:nvSpPr>
-        <p:spPr>
-          <a:xfrm>
-            <a:off x="640080" y="4754880"/>
-            <a:ext cx="10911535" cy="1234440"/>
+            <a:pPr indent="0" marL="0">
+              <a:buNone/>
+            </a:pPr>
+            <a:r>
+              <a:rPr lang="en-US" sz="1400" dirty="0">
+                <a:solidFill>
+                  <a:srgbClr val="6B7280"/>
+                </a:solidFill>
+                <a:latin typeface="Calibri" pitchFamily="34" charset="0"/>
+                <a:ea typeface="Calibri" pitchFamily="34" charset="-122"/>
+                <a:cs typeface="Calibri" pitchFamily="34" charset="-120"/>
+              </a:rPr>
+              <a:t>Die Vorgabe der Plugins hat die Entscheidung faktisch vorweggenommen</a:t>
+            </a:r>
+            <a:endParaRPr lang="en-US" sz="1400" dirty="0"/>
+          </a:p>
+        </p:txBody>
+      </p:sp>
+      <p:sp>
+        <p:nvSpPr>
+          <p:cNvPr id="5" name="Shape 3"/>
+          <p:cNvSpPr/>
+          <p:nvPr/>
+        </p:nvSpPr>
+        <p:spPr>
+          <a:xfrm>
+            <a:off x="640080" y="1691640"/>
+            <a:ext cx="3393338" cy="3931920"/>
           </a:xfrm>
           <a:prstGeom prst="roundRect">
             <a:avLst>
-              <a:gd name="adj" fmla="val 5926"/>
+              <a:gd name="adj" fmla="val 2156"/>
             </a:avLst>
           </a:prstGeom>
           <a:solidFill>
@@ -6957,14 +7506,14 @@
       </p:sp>
       <p:sp>
         <p:nvSpPr>
-          <p:cNvPr id="25" name="Text 23"/>
-          <p:cNvSpPr/>
-          <p:nvPr/>
-        </p:nvSpPr>
-        <p:spPr>
-          <a:xfrm>
-            <a:off x="1005840" y="4983480"/>
-            <a:ext cx="10180015" cy="777240"/>
+          <p:cNvPr id="6" name="Text 4"/>
+          <p:cNvSpPr/>
+          <p:nvPr/>
+        </p:nvSpPr>
+        <p:spPr>
+          <a:xfrm>
+            <a:off x="914400" y="1920240"/>
+            <a:ext cx="2844698" cy="411480"/>
           </a:xfrm>
           <a:prstGeom prst="rect">
             <a:avLst/>
@@ -6980,17 +7529,589 @@
               <a:buNone/>
             </a:pPr>
             <a:r>
-              <a:rPr lang="en-US" sz="1500" i="1" dirty="0">
+              <a:rPr lang="en-US" sz="2200" b="1" dirty="0">
                 <a:solidFill>
                   <a:srgbClr val="111827"/>
                 </a:solidFill>
-                <a:latin typeface="Calibri" pitchFamily="34" charset="0"/>
-                <a:ea typeface="Calibri" pitchFamily="34" charset="-122"/>
-                <a:cs typeface="Calibri" pitchFamily="34" charset="-120"/>
-              </a:rPr>
-              <a:t>Der Bruch in Schritt 3 hat uns Zeit gekostet — und war der lehrreichste Teil des Projekts.</a:t>
-            </a:r>
-            <a:endParaRPr lang="en-US" sz="1500" dirty="0"/>
+                <a:latin typeface="Cambria" pitchFamily="34" charset="0"/>
+                <a:ea typeface="Cambria" pitchFamily="34" charset="-122"/>
+                <a:cs typeface="Cambria" pitchFamily="34" charset="-120"/>
+              </a:rPr>
+              <a:t>Nativ</a:t>
+            </a:r>
+            <a:endParaRPr lang="en-US" sz="2200" dirty="0"/>
+          </a:p>
+        </p:txBody>
+      </p:sp>
+      <p:sp>
+        <p:nvSpPr>
+          <p:cNvPr id="7" name="Text 5"/>
+          <p:cNvSpPr/>
+          <p:nvPr/>
+        </p:nvSpPr>
+        <p:spPr>
+          <a:xfrm>
+            <a:off x="914400" y="2359152"/>
+            <a:ext cx="2844698" cy="548640"/>
+          </a:xfrm>
+          <a:prstGeom prst="rect">
+            <a:avLst/>
+          </a:prstGeom>
+          <a:noFill/>
+          <a:ln/>
+        </p:spPr>
+        <p:txBody>
+          <a:bodyPr wrap="square" lIns="0" tIns="0" rIns="0" bIns="0" rtlCol="0" anchor="ctr"/>
+          <a:lstStyle/>
+          <a:p>
+            <a:pPr indent="0" marL="0">
+              <a:buNone/>
+            </a:pPr>
+            <a:r>
+              <a:rPr lang="en-US" sz="1200" i="1" dirty="0">
+                <a:solidFill>
+                  <a:srgbClr val="6B7280"/>
+                </a:solidFill>
+                <a:latin typeface="Calibri" pitchFamily="34" charset="0"/>
+                <a:ea typeface="Calibri" pitchFamily="34" charset="-122"/>
+                <a:cs typeface="Calibri" pitchFamily="34" charset="-120"/>
+              </a:rPr>
+              <a:t>Kotlin oder Java, direkt gegen Android</a:t>
+            </a:r>
+            <a:endParaRPr lang="en-US" sz="1200" dirty="0"/>
+          </a:p>
+        </p:txBody>
+      </p:sp>
+      <p:sp>
+        <p:nvSpPr>
+          <p:cNvPr id="8" name="Text 6"/>
+          <p:cNvSpPr/>
+          <p:nvPr/>
+        </p:nvSpPr>
+        <p:spPr>
+          <a:xfrm>
+            <a:off x="914400" y="2971800"/>
+            <a:ext cx="2844698" cy="2011680"/>
+          </a:xfrm>
+          <a:prstGeom prst="rect">
+            <a:avLst/>
+          </a:prstGeom>
+          <a:noFill/>
+          <a:ln/>
+        </p:spPr>
+        <p:txBody>
+          <a:bodyPr wrap="square" lIns="0" tIns="0" rIns="0" bIns="0" rtlCol="0" anchor="t"/>
+          <a:lstStyle/>
+          <a:p>
+            <a:pPr marL="342900" indent="-342900">
+              <a:spcAft>
+                <a:spcPts val="1000"/>
+              </a:spcAft>
+              <a:buSzPct val="100000"/>
+              <a:buChar char="•"/>
+            </a:pPr>
+            <a:r>
+              <a:rPr lang="en-US" sz="1300" dirty="0">
+                <a:solidFill>
+                  <a:srgbClr val="374151"/>
+                </a:solidFill>
+                <a:latin typeface="Calibri" pitchFamily="34" charset="0"/>
+                <a:ea typeface="Calibri" pitchFamily="34" charset="-122"/>
+                <a:cs typeface="Calibri" pitchFamily="34" charset="-120"/>
+              </a:rPr>
+              <a:t>Volle Kontrolle</a:t>
+            </a:r>
+            <a:endParaRPr lang="en-US" sz="1300" dirty="0"/>
+          </a:p>
+          <a:p>
+            <a:pPr marL="342900" indent="-342900">
+              <a:spcAft>
+                <a:spcPts val="1000"/>
+              </a:spcAft>
+              <a:buSzPct val="100000"/>
+              <a:buChar char="•"/>
+            </a:pPr>
+            <a:r>
+              <a:rPr lang="en-US" sz="1300" dirty="0">
+                <a:solidFill>
+                  <a:srgbClr val="374151"/>
+                </a:solidFill>
+                <a:latin typeface="Calibri" pitchFamily="34" charset="0"/>
+                <a:ea typeface="Calibri" pitchFamily="34" charset="-122"/>
+                <a:cs typeface="Calibri" pitchFamily="34" charset="-120"/>
+              </a:rPr>
+              <a:t>Beste Performance</a:t>
+            </a:r>
+            <a:endParaRPr lang="en-US" sz="1300" dirty="0"/>
+          </a:p>
+          <a:p>
+            <a:pPr marL="342900" indent="-342900">
+              <a:spcAft>
+                <a:spcPts val="1000"/>
+              </a:spcAft>
+              <a:buSzPct val="100000"/>
+              <a:buChar char="•"/>
+            </a:pPr>
+            <a:r>
+              <a:rPr lang="en-US" sz="1300" dirty="0">
+                <a:solidFill>
+                  <a:srgbClr val="374151"/>
+                </a:solidFill>
+                <a:latin typeface="Calibri" pitchFamily="34" charset="0"/>
+                <a:ea typeface="Calibri" pitchFamily="34" charset="-122"/>
+                <a:cs typeface="Calibri" pitchFamily="34" charset="-120"/>
+              </a:rPr>
+              <a:t>Pro Plattform komplett neu</a:t>
+            </a:r>
+            <a:endParaRPr lang="en-US" sz="1300" dirty="0"/>
+          </a:p>
+        </p:txBody>
+      </p:sp>
+      <p:sp>
+        <p:nvSpPr>
+          <p:cNvPr id="9" name="Shape 7"/>
+          <p:cNvSpPr/>
+          <p:nvPr/>
+        </p:nvSpPr>
+        <p:spPr>
+          <a:xfrm>
+            <a:off x="4399178" y="1691640"/>
+            <a:ext cx="3393338" cy="3931920"/>
+          </a:xfrm>
+          <a:prstGeom prst="roundRect">
+            <a:avLst>
+              <a:gd name="adj" fmla="val 2156"/>
+            </a:avLst>
+          </a:prstGeom>
+          <a:solidFill>
+            <a:srgbClr val="0F1419"/>
+          </a:solidFill>
+          <a:ln/>
+        </p:spPr>
+      </p:sp>
+      <p:sp>
+        <p:nvSpPr>
+          <p:cNvPr id="10" name="Text 8"/>
+          <p:cNvSpPr/>
+          <p:nvPr/>
+        </p:nvSpPr>
+        <p:spPr>
+          <a:xfrm>
+            <a:off x="4673498" y="1920240"/>
+            <a:ext cx="2844698" cy="411480"/>
+          </a:xfrm>
+          <a:prstGeom prst="rect">
+            <a:avLst/>
+          </a:prstGeom>
+          <a:noFill/>
+          <a:ln/>
+        </p:spPr>
+        <p:txBody>
+          <a:bodyPr wrap="square" lIns="0" tIns="0" rIns="0" bIns="0" rtlCol="0" anchor="ctr"/>
+          <a:lstStyle/>
+          <a:p>
+            <a:pPr indent="0" marL="0">
+              <a:buNone/>
+            </a:pPr>
+            <a:r>
+              <a:rPr lang="en-US" sz="2200" b="1" dirty="0">
+                <a:solidFill>
+                  <a:srgbClr val="FFFFFF"/>
+                </a:solidFill>
+                <a:latin typeface="Cambria" pitchFamily="34" charset="0"/>
+                <a:ea typeface="Cambria" pitchFamily="34" charset="-122"/>
+                <a:cs typeface="Cambria" pitchFamily="34" charset="-120"/>
+              </a:rPr>
+              <a:t>Hybrid</a:t>
+            </a:r>
+            <a:endParaRPr lang="en-US" sz="2200" dirty="0"/>
+          </a:p>
+        </p:txBody>
+      </p:sp>
+      <p:sp>
+        <p:nvSpPr>
+          <p:cNvPr id="11" name="Text 9"/>
+          <p:cNvSpPr/>
+          <p:nvPr/>
+        </p:nvSpPr>
+        <p:spPr>
+          <a:xfrm>
+            <a:off x="4673498" y="2359152"/>
+            <a:ext cx="2844698" cy="548640"/>
+          </a:xfrm>
+          <a:prstGeom prst="rect">
+            <a:avLst/>
+          </a:prstGeom>
+          <a:noFill/>
+          <a:ln/>
+        </p:spPr>
+        <p:txBody>
+          <a:bodyPr wrap="square" lIns="0" tIns="0" rIns="0" bIns="0" rtlCol="0" anchor="ctr"/>
+          <a:lstStyle/>
+          <a:p>
+            <a:pPr indent="0" marL="0">
+              <a:buNone/>
+            </a:pPr>
+            <a:r>
+              <a:rPr lang="en-US" sz="1200" i="1" dirty="0">
+                <a:solidFill>
+                  <a:srgbClr val="9AA4B2"/>
+                </a:solidFill>
+                <a:latin typeface="Calibri" pitchFamily="34" charset="0"/>
+                <a:ea typeface="Calibri" pitchFamily="34" charset="-122"/>
+                <a:cs typeface="Calibri" pitchFamily="34" charset="-120"/>
+              </a:rPr>
+              <a:t>Webseite in einer App-Hülle</a:t>
+            </a:r>
+            <a:endParaRPr lang="en-US" sz="1200" dirty="0"/>
+          </a:p>
+        </p:txBody>
+      </p:sp>
+      <p:sp>
+        <p:nvSpPr>
+          <p:cNvPr id="12" name="Text 10"/>
+          <p:cNvSpPr/>
+          <p:nvPr/>
+        </p:nvSpPr>
+        <p:spPr>
+          <a:xfrm>
+            <a:off x="4673498" y="2971800"/>
+            <a:ext cx="2844698" cy="2011680"/>
+          </a:xfrm>
+          <a:prstGeom prst="rect">
+            <a:avLst/>
+          </a:prstGeom>
+          <a:noFill/>
+          <a:ln/>
+        </p:spPr>
+        <p:txBody>
+          <a:bodyPr wrap="square" lIns="0" tIns="0" rIns="0" bIns="0" rtlCol="0" anchor="t"/>
+          <a:lstStyle/>
+          <a:p>
+            <a:pPr marL="342900" indent="-342900">
+              <a:spcAft>
+                <a:spcPts val="1000"/>
+              </a:spcAft>
+              <a:buSzPct val="100000"/>
+              <a:buChar char="•"/>
+            </a:pPr>
+            <a:r>
+              <a:rPr lang="en-US" sz="1300" dirty="0">
+                <a:solidFill>
+                  <a:srgbClr val="E5E7EB"/>
+                </a:solidFill>
+                <a:latin typeface="Calibri" pitchFamily="34" charset="0"/>
+                <a:ea typeface="Calibri" pitchFamily="34" charset="-122"/>
+                <a:cs typeface="Calibri" pitchFamily="34" charset="-120"/>
+              </a:rPr>
+              <a:t>Eine Codebasis für Android und iOS</a:t>
+            </a:r>
+            <a:endParaRPr lang="en-US" sz="1300" dirty="0"/>
+          </a:p>
+          <a:p>
+            <a:pPr marL="342900" indent="-342900">
+              <a:spcAft>
+                <a:spcPts val="1000"/>
+              </a:spcAft>
+              <a:buSzPct val="100000"/>
+              <a:buChar char="•"/>
+            </a:pPr>
+            <a:r>
+              <a:rPr lang="en-US" sz="1300" dirty="0">
+                <a:solidFill>
+                  <a:srgbClr val="E5E7EB"/>
+                </a:solidFill>
+                <a:latin typeface="Calibri" pitchFamily="34" charset="0"/>
+                <a:ea typeface="Calibri" pitchFamily="34" charset="-122"/>
+                <a:cs typeface="Calibri" pitchFamily="34" charset="-120"/>
+              </a:rPr>
+              <a:t>Web-Kenntnisse genügen</a:t>
+            </a:r>
+            <a:endParaRPr lang="en-US" sz="1300" dirty="0"/>
+          </a:p>
+          <a:p>
+            <a:pPr marL="342900" indent="-342900">
+              <a:spcAft>
+                <a:spcPts val="1000"/>
+              </a:spcAft>
+              <a:buSzPct val="100000"/>
+              <a:buChar char="•"/>
+            </a:pPr>
+            <a:r>
+              <a:rPr lang="en-US" sz="1300" dirty="0">
+                <a:solidFill>
+                  <a:srgbClr val="E5E7EB"/>
+                </a:solidFill>
+                <a:latin typeface="Calibri" pitchFamily="34" charset="0"/>
+                <a:ea typeface="Calibri" pitchFamily="34" charset="-122"/>
+                <a:cs typeface="Calibri" pitchFamily="34" charset="-120"/>
+              </a:rPr>
+              <a:t>Gerätezugriff nur über Plugins</a:t>
+            </a:r>
+            <a:endParaRPr lang="en-US" sz="1300" dirty="0"/>
+          </a:p>
+        </p:txBody>
+      </p:sp>
+      <p:sp>
+        <p:nvSpPr>
+          <p:cNvPr id="13" name="Text 11"/>
+          <p:cNvSpPr/>
+          <p:nvPr/>
+        </p:nvSpPr>
+        <p:spPr>
+          <a:xfrm>
+            <a:off x="4673498" y="5074920"/>
+            <a:ext cx="2844698" cy="320040"/>
+          </a:xfrm>
+          <a:prstGeom prst="rect">
+            <a:avLst/>
+          </a:prstGeom>
+          <a:noFill/>
+          <a:ln/>
+        </p:spPr>
+        <p:txBody>
+          <a:bodyPr wrap="square" lIns="0" tIns="0" rIns="0" bIns="0" rtlCol="0" anchor="ctr"/>
+          <a:lstStyle/>
+          <a:p>
+            <a:pPr indent="0" marL="0">
+              <a:buNone/>
+            </a:pPr>
+            <a:r>
+              <a:rPr lang="en-US" sz="1200" b="1" dirty="0">
+                <a:solidFill>
+                  <a:srgbClr val="E23E3E"/>
+                </a:solidFill>
+                <a:latin typeface="Calibri" pitchFamily="34" charset="0"/>
+                <a:ea typeface="Calibri" pitchFamily="34" charset="-122"/>
+                <a:cs typeface="Calibri" pitchFamily="34" charset="-120"/>
+              </a:rPr>
+              <a:t>unsere Wahl</a:t>
+            </a:r>
+            <a:endParaRPr lang="en-US" sz="1200" dirty="0"/>
+          </a:p>
+        </p:txBody>
+      </p:sp>
+      <p:sp>
+        <p:nvSpPr>
+          <p:cNvPr id="14" name="Shape 12"/>
+          <p:cNvSpPr/>
+          <p:nvPr/>
+        </p:nvSpPr>
+        <p:spPr>
+          <a:xfrm>
+            <a:off x="8158277" y="1691640"/>
+            <a:ext cx="3393338" cy="3931920"/>
+          </a:xfrm>
+          <a:prstGeom prst="roundRect">
+            <a:avLst>
+              <a:gd name="adj" fmla="val 2156"/>
+            </a:avLst>
+          </a:prstGeom>
+          <a:solidFill>
+            <a:srgbClr val="F4F5F7"/>
+          </a:solidFill>
+          <a:ln/>
+        </p:spPr>
+      </p:sp>
+      <p:sp>
+        <p:nvSpPr>
+          <p:cNvPr id="15" name="Text 13"/>
+          <p:cNvSpPr/>
+          <p:nvPr/>
+        </p:nvSpPr>
+        <p:spPr>
+          <a:xfrm>
+            <a:off x="8432597" y="1920240"/>
+            <a:ext cx="2844698" cy="411480"/>
+          </a:xfrm>
+          <a:prstGeom prst="rect">
+            <a:avLst/>
+          </a:prstGeom>
+          <a:noFill/>
+          <a:ln/>
+        </p:spPr>
+        <p:txBody>
+          <a:bodyPr wrap="square" lIns="0" tIns="0" rIns="0" bIns="0" rtlCol="0" anchor="ctr"/>
+          <a:lstStyle/>
+          <a:p>
+            <a:pPr indent="0" marL="0">
+              <a:buNone/>
+            </a:pPr>
+            <a:r>
+              <a:rPr lang="en-US" sz="2200" b="1" dirty="0">
+                <a:solidFill>
+                  <a:srgbClr val="111827"/>
+                </a:solidFill>
+                <a:latin typeface="Cambria" pitchFamily="34" charset="0"/>
+                <a:ea typeface="Cambria" pitchFamily="34" charset="-122"/>
+                <a:cs typeface="Cambria" pitchFamily="34" charset="-120"/>
+              </a:rPr>
+              <a:t>Cross-Platform</a:t>
+            </a:r>
+            <a:endParaRPr lang="en-US" sz="2200" dirty="0"/>
+          </a:p>
+        </p:txBody>
+      </p:sp>
+      <p:sp>
+        <p:nvSpPr>
+          <p:cNvPr id="16" name="Text 14"/>
+          <p:cNvSpPr/>
+          <p:nvPr/>
+        </p:nvSpPr>
+        <p:spPr>
+          <a:xfrm>
+            <a:off x="8432597" y="2359152"/>
+            <a:ext cx="2844698" cy="548640"/>
+          </a:xfrm>
+          <a:prstGeom prst="rect">
+            <a:avLst/>
+          </a:prstGeom>
+          <a:noFill/>
+          <a:ln/>
+        </p:spPr>
+        <p:txBody>
+          <a:bodyPr wrap="square" lIns="0" tIns="0" rIns="0" bIns="0" rtlCol="0" anchor="ctr"/>
+          <a:lstStyle/>
+          <a:p>
+            <a:pPr indent="0" marL="0">
+              <a:buNone/>
+            </a:pPr>
+            <a:r>
+              <a:rPr lang="en-US" sz="1200" i="1" dirty="0">
+                <a:solidFill>
+                  <a:srgbClr val="6B7280"/>
+                </a:solidFill>
+                <a:latin typeface="Calibri" pitchFamily="34" charset="0"/>
+                <a:ea typeface="Calibri" pitchFamily="34" charset="-122"/>
+                <a:cs typeface="Calibri" pitchFamily="34" charset="-120"/>
+              </a:rPr>
+              <a:t>Flutter, React Native</a:t>
+            </a:r>
+            <a:endParaRPr lang="en-US" sz="1200" dirty="0"/>
+          </a:p>
+        </p:txBody>
+      </p:sp>
+      <p:sp>
+        <p:nvSpPr>
+          <p:cNvPr id="17" name="Text 15"/>
+          <p:cNvSpPr/>
+          <p:nvPr/>
+        </p:nvSpPr>
+        <p:spPr>
+          <a:xfrm>
+            <a:off x="8432597" y="2971800"/>
+            <a:ext cx="2844698" cy="2011680"/>
+          </a:xfrm>
+          <a:prstGeom prst="rect">
+            <a:avLst/>
+          </a:prstGeom>
+          <a:noFill/>
+          <a:ln/>
+        </p:spPr>
+        <p:txBody>
+          <a:bodyPr wrap="square" lIns="0" tIns="0" rIns="0" bIns="0" rtlCol="0" anchor="t"/>
+          <a:lstStyle/>
+          <a:p>
+            <a:pPr marL="342900" indent="-342900">
+              <a:spcAft>
+                <a:spcPts val="1000"/>
+              </a:spcAft>
+              <a:buSzPct val="100000"/>
+              <a:buChar char="•"/>
+            </a:pPr>
+            <a:r>
+              <a:rPr lang="en-US" sz="1300" dirty="0">
+                <a:solidFill>
+                  <a:srgbClr val="374151"/>
+                </a:solidFill>
+                <a:latin typeface="Calibri" pitchFamily="34" charset="0"/>
+                <a:ea typeface="Calibri" pitchFamily="34" charset="-122"/>
+                <a:cs typeface="Calibri" pitchFamily="34" charset="-120"/>
+              </a:rPr>
+              <a:t>Eine Codebasis, native Oberfläche</a:t>
+            </a:r>
+            <a:endParaRPr lang="en-US" sz="1300" dirty="0"/>
+          </a:p>
+          <a:p>
+            <a:pPr marL="342900" indent="-342900">
+              <a:spcAft>
+                <a:spcPts val="1000"/>
+              </a:spcAft>
+              <a:buSzPct val="100000"/>
+              <a:buChar char="•"/>
+            </a:pPr>
+            <a:r>
+              <a:rPr lang="en-US" sz="1300" dirty="0">
+                <a:solidFill>
+                  <a:srgbClr val="374151"/>
+                </a:solidFill>
+                <a:latin typeface="Calibri" pitchFamily="34" charset="0"/>
+                <a:ea typeface="Calibri" pitchFamily="34" charset="-122"/>
+                <a:cs typeface="Calibri" pitchFamily="34" charset="-120"/>
+              </a:rPr>
+              <a:t>Eigenes Ökosystem</a:t>
+            </a:r>
+            <a:endParaRPr lang="en-US" sz="1300" dirty="0"/>
+          </a:p>
+          <a:p>
+            <a:pPr marL="342900" indent="-342900">
+              <a:spcAft>
+                <a:spcPts val="1000"/>
+              </a:spcAft>
+              <a:buSzPct val="100000"/>
+              <a:buChar char="•"/>
+            </a:pPr>
+            <a:r>
+              <a:rPr lang="en-US" sz="1300" dirty="0">
+                <a:solidFill>
+                  <a:srgbClr val="374151"/>
+                </a:solidFill>
+                <a:latin typeface="Calibri" pitchFamily="34" charset="0"/>
+                <a:ea typeface="Calibri" pitchFamily="34" charset="-122"/>
+                <a:cs typeface="Calibri" pitchFamily="34" charset="-120"/>
+              </a:rPr>
+              <a:t>Neue Sprache nötig</a:t>
+            </a:r>
+            <a:endParaRPr lang="en-US" sz="1300" dirty="0"/>
+          </a:p>
+        </p:txBody>
+      </p:sp>
+      <p:sp>
+        <p:nvSpPr>
+          <p:cNvPr id="18" name="Text 16"/>
+          <p:cNvSpPr/>
+          <p:nvPr/>
+        </p:nvSpPr>
+        <p:spPr>
+          <a:xfrm>
+            <a:off x="640080" y="5897880"/>
+            <a:ext cx="10911535" cy="365760"/>
+          </a:xfrm>
+          <a:prstGeom prst="rect">
+            <a:avLst/>
+          </a:prstGeom>
+          <a:noFill/>
+          <a:ln/>
+        </p:spPr>
+        <p:txBody>
+          <a:bodyPr wrap="square" lIns="0" tIns="0" rIns="0" bIns="0" rtlCol="0" anchor="ctr"/>
+          <a:lstStyle/>
+          <a:p>
+            <a:pPr indent="0" marL="0">
+              <a:buNone/>
+            </a:pPr>
+            <a:r>
+              <a:rPr lang="en-US" sz="1300" i="1" dirty="0">
+                <a:solidFill>
+                  <a:srgbClr val="6B7280"/>
+                </a:solidFill>
+                <a:latin typeface="Calibri" pitchFamily="34" charset="0"/>
+                <a:ea typeface="Calibri" pitchFamily="34" charset="-122"/>
+                <a:cs typeface="Calibri" pitchFamily="34" charset="-120"/>
+              </a:rPr>
+              <a:t>Die genannten Plugins gibt es nur für Capacitor — damit war der hybride Weg gesetzt.</a:t>
+            </a:r>
+            <a:endParaRPr lang="en-US" sz="1300" dirty="0"/>
           </a:p>
         </p:txBody>
       </p:sp>
@@ -7079,7 +8200,7 @@
                 <a:ea typeface="Cambria" pitchFamily="34" charset="-122"/>
                 <a:cs typeface="Cambria" pitchFamily="34" charset="-120"/>
               </a:rPr>
-              <a:t>KI-Agenten als Werkzeug</a:t>
+              <a:t>Die nativen Schnittstellen</a:t>
             </a:r>
             <a:endParaRPr lang="en-US" sz="3200" dirty="0"/>
           </a:p>
@@ -7118,7 +8239,7 @@
                 <a:ea typeface="Calibri" pitchFamily="34" charset="-122"/>
                 <a:cs typeface="Calibri" pitchFamily="34" charset="-120"/>
               </a:rPr>
-              <a:t>Claude und Gemini haben wir durchgehend eingesetzt — mit klaren Stärken und Grenzen</a:t>
+              <a:t>Fünf Plugins — und was zwischen JavaScript und Android passiert</a:t>
             </a:r>
             <a:endParaRPr lang="en-US" sz="1400" dirty="0"/>
           </a:p>
@@ -7132,12 +8253,12 @@
         </p:nvSpPr>
         <p:spPr>
           <a:xfrm>
-            <a:off x="640080" y="1600200"/>
-            <a:ext cx="5227168" cy="2286000"/>
+            <a:off x="640080" y="1645920"/>
+            <a:ext cx="5227168" cy="4114800"/>
           </a:xfrm>
           <a:prstGeom prst="roundRect">
             <a:avLst>
-              <a:gd name="adj" fmla="val 3200"/>
+              <a:gd name="adj" fmla="val 1778"/>
             </a:avLst>
           </a:prstGeom>
           <a:solidFill>
@@ -7154,7 +8275,7 @@
         </p:nvSpPr>
         <p:spPr>
           <a:xfrm>
-            <a:off x="960120" y="1810512"/>
+            <a:off x="960120" y="1847088"/>
             <a:ext cx="4587088" cy="320040"/>
           </a:xfrm>
           <a:prstGeom prst="rect">
@@ -7179,7 +8300,7 @@
                 <a:ea typeface="Calibri" pitchFamily="34" charset="-122"/>
                 <a:cs typeface="Calibri" pitchFamily="34" charset="-120"/>
               </a:rPr>
-              <a:t>Wobei es gut funktioniert hat</a:t>
+              <a:t>Welche Plugins</a:t>
             </a:r>
             <a:endParaRPr lang="en-US" sz="1500" dirty="0"/>
           </a:p>
@@ -7187,14 +8308,73 @@
       </p:sp>
       <p:sp>
         <p:nvSpPr>
-          <p:cNvPr id="7" name="Text 5"/>
-          <p:cNvSpPr/>
-          <p:nvPr/>
-        </p:nvSpPr>
-        <p:spPr>
-          <a:xfrm>
-            <a:off x="960120" y="2212848"/>
-            <a:ext cx="4587088" cy="1554480"/>
+          <p:cNvPr id="7" name="Shape 5"/>
+          <p:cNvSpPr/>
+          <p:nvPr/>
+        </p:nvSpPr>
+        <p:spPr>
+          <a:xfrm>
+            <a:off x="987552" y="2340864"/>
+            <a:ext cx="109728" cy="109728"/>
+          </a:xfrm>
+          <a:prstGeom prst="ellipse">
+            <a:avLst/>
+          </a:prstGeom>
+          <a:solidFill>
+            <a:srgbClr val="E23E3E"/>
+          </a:solidFill>
+          <a:ln/>
+        </p:spPr>
+      </p:sp>
+      <p:sp>
+        <p:nvSpPr>
+          <p:cNvPr id="8" name="Text 6"/>
+          <p:cNvSpPr/>
+          <p:nvPr/>
+        </p:nvSpPr>
+        <p:spPr>
+          <a:xfrm>
+            <a:off x="1207008" y="2221992"/>
+            <a:ext cx="4358488" cy="274320"/>
+          </a:xfrm>
+          <a:prstGeom prst="rect">
+            <a:avLst/>
+          </a:prstGeom>
+          <a:noFill/>
+          <a:ln/>
+        </p:spPr>
+        <p:txBody>
+          <a:bodyPr wrap="square" lIns="0" tIns="0" rIns="0" bIns="0" rtlCol="0" anchor="ctr"/>
+          <a:lstStyle/>
+          <a:p>
+            <a:pPr indent="0" marL="0">
+              <a:buNone/>
+            </a:pPr>
+            <a:r>
+              <a:rPr lang="en-US" sz="1350" b="1" dirty="0">
+                <a:solidFill>
+                  <a:srgbClr val="111827"/>
+                </a:solidFill>
+                <a:latin typeface="Calibri" pitchFamily="34" charset="0"/>
+                <a:ea typeface="Calibri" pitchFamily="34" charset="-122"/>
+                <a:cs typeface="Calibri" pitchFamily="34" charset="-120"/>
+              </a:rPr>
+              <a:t>Audio Recorder</a:t>
+            </a:r>
+            <a:endParaRPr lang="en-US" sz="1350" dirty="0"/>
+          </a:p>
+        </p:txBody>
+      </p:sp>
+      <p:sp>
+        <p:nvSpPr>
+          <p:cNvPr id="9" name="Text 7"/>
+          <p:cNvSpPr/>
+          <p:nvPr/>
+        </p:nvSpPr>
+        <p:spPr>
+          <a:xfrm>
+            <a:off x="1207008" y="2478024"/>
+            <a:ext cx="4358488" cy="347472"/>
           </a:xfrm>
           <a:prstGeom prst="rect">
             <a:avLst/>
@@ -7206,15 +8386,11 @@
           <a:bodyPr wrap="square" lIns="0" tIns="0" rIns="0" bIns="0" rtlCol="0" anchor="t"/>
           <a:lstStyle/>
           <a:p>
-            <a:pPr marL="342900" indent="-342900">
-              <a:spcAft>
-                <a:spcPts val="700"/>
-              </a:spcAft>
-              <a:buSzPct val="100000"/>
-              <a:buChar char="•"/>
-            </a:pPr>
-            <a:r>
-              <a:rPr lang="en-US" sz="1250" dirty="0">
+            <a:pPr indent="0" marL="0">
+              <a:buNone/>
+            </a:pPr>
+            <a:r>
+              <a:rPr lang="en-US" sz="1200" dirty="0">
                 <a:solidFill>
                   <a:srgbClr val="374151"/>
                 </a:solidFill>
@@ -7222,20 +8398,97 @@
                 <a:ea typeface="Calibri" pitchFamily="34" charset="-122"/>
                 <a:cs typeface="Calibri" pitchFamily="34" charset="-120"/>
               </a:rPr>
-              <a:t>Überblick über eine unbekannte Dateistruktur gewinnen</a:t>
-            </a:r>
-            <a:endParaRPr lang="en-US" sz="1250" dirty="0"/>
-          </a:p>
-          <a:p>
-            <a:pPr marL="342900" indent="-342900">
-              <a:spcAft>
-                <a:spcPts val="700"/>
-              </a:spcAft>
-              <a:buSzPct val="100000"/>
-              <a:buChar char="•"/>
-            </a:pPr>
-            <a:r>
-              <a:rPr lang="en-US" sz="1250" dirty="0">
+              <a:t>Aufnehmen, pausieren, fortsetzen, Mikrofon-Berechtigung</a:t>
+            </a:r>
+            <a:endParaRPr lang="en-US" sz="1200" dirty="0"/>
+          </a:p>
+        </p:txBody>
+      </p:sp>
+      <p:sp>
+        <p:nvSpPr>
+          <p:cNvPr id="10" name="Shape 8"/>
+          <p:cNvSpPr/>
+          <p:nvPr/>
+        </p:nvSpPr>
+        <p:spPr>
+          <a:xfrm>
+            <a:off x="987552" y="2962656"/>
+            <a:ext cx="109728" cy="109728"/>
+          </a:xfrm>
+          <a:prstGeom prst="ellipse">
+            <a:avLst/>
+          </a:prstGeom>
+          <a:solidFill>
+            <a:srgbClr val="E23E3E"/>
+          </a:solidFill>
+          <a:ln/>
+        </p:spPr>
+      </p:sp>
+      <p:sp>
+        <p:nvSpPr>
+          <p:cNvPr id="11" name="Text 9"/>
+          <p:cNvSpPr/>
+          <p:nvPr/>
+        </p:nvSpPr>
+        <p:spPr>
+          <a:xfrm>
+            <a:off x="1207008" y="2843784"/>
+            <a:ext cx="4358488" cy="274320"/>
+          </a:xfrm>
+          <a:prstGeom prst="rect">
+            <a:avLst/>
+          </a:prstGeom>
+          <a:noFill/>
+          <a:ln/>
+        </p:spPr>
+        <p:txBody>
+          <a:bodyPr wrap="square" lIns="0" tIns="0" rIns="0" bIns="0" rtlCol="0" anchor="ctr"/>
+          <a:lstStyle/>
+          <a:p>
+            <a:pPr indent="0" marL="0">
+              <a:buNone/>
+            </a:pPr>
+            <a:r>
+              <a:rPr lang="en-US" sz="1350" b="1" dirty="0">
+                <a:solidFill>
+                  <a:srgbClr val="111827"/>
+                </a:solidFill>
+                <a:latin typeface="Calibri" pitchFamily="34" charset="0"/>
+                <a:ea typeface="Calibri" pitchFamily="34" charset="-122"/>
+                <a:cs typeface="Calibri" pitchFamily="34" charset="-120"/>
+              </a:rPr>
+              <a:t>Audio Player</a:t>
+            </a:r>
+            <a:endParaRPr lang="en-US" sz="1350" dirty="0"/>
+          </a:p>
+        </p:txBody>
+      </p:sp>
+      <p:sp>
+        <p:nvSpPr>
+          <p:cNvPr id="12" name="Text 10"/>
+          <p:cNvSpPr/>
+          <p:nvPr/>
+        </p:nvSpPr>
+        <p:spPr>
+          <a:xfrm>
+            <a:off x="1207008" y="3099816"/>
+            <a:ext cx="4358488" cy="347472"/>
+          </a:xfrm>
+          <a:prstGeom prst="rect">
+            <a:avLst/>
+          </a:prstGeom>
+          <a:noFill/>
+          <a:ln/>
+        </p:spPr>
+        <p:txBody>
+          <a:bodyPr wrap="square" lIns="0" tIns="0" rIns="0" bIns="0" rtlCol="0" anchor="t"/>
+          <a:lstStyle/>
+          <a:p>
+            <a:pPr indent="0" marL="0">
+              <a:buNone/>
+            </a:pPr>
+            <a:r>
+              <a:rPr lang="en-US" sz="1200" dirty="0">
                 <a:solidFill>
                   <a:srgbClr val="374151"/>
                 </a:solidFill>
@@ -7243,20 +8496,97 @@
                 <a:ea typeface="Calibri" pitchFamily="34" charset="-122"/>
                 <a:cs typeface="Calibri" pitchFamily="34" charset="-120"/>
               </a:rPr>
-              <a:t>Plugin-Dokumentation zusammenfassen und einordnen</a:t>
-            </a:r>
-            <a:endParaRPr lang="en-US" sz="1250" dirty="0"/>
-          </a:p>
-          <a:p>
-            <a:pPr marL="342900" indent="-342900">
-              <a:spcAft>
-                <a:spcPts val="700"/>
-              </a:spcAft>
-              <a:buSzPct val="100000"/>
-              <a:buChar char="•"/>
-            </a:pPr>
-            <a:r>
-              <a:rPr lang="en-US" sz="1250" dirty="0">
+              <a:t>Abspielen, Position und Dauer, meldet das Ende</a:t>
+            </a:r>
+            <a:endParaRPr lang="en-US" sz="1200" dirty="0"/>
+          </a:p>
+        </p:txBody>
+      </p:sp>
+      <p:sp>
+        <p:nvSpPr>
+          <p:cNvPr id="13" name="Shape 11"/>
+          <p:cNvSpPr/>
+          <p:nvPr/>
+        </p:nvSpPr>
+        <p:spPr>
+          <a:xfrm>
+            <a:off x="987552" y="3584448"/>
+            <a:ext cx="109728" cy="109728"/>
+          </a:xfrm>
+          <a:prstGeom prst="ellipse">
+            <a:avLst/>
+          </a:prstGeom>
+          <a:solidFill>
+            <a:srgbClr val="2F6FED"/>
+          </a:solidFill>
+          <a:ln/>
+        </p:spPr>
+      </p:sp>
+      <p:sp>
+        <p:nvSpPr>
+          <p:cNvPr id="14" name="Text 12"/>
+          <p:cNvSpPr/>
+          <p:nvPr/>
+        </p:nvSpPr>
+        <p:spPr>
+          <a:xfrm>
+            <a:off x="1207008" y="3465576"/>
+            <a:ext cx="4358488" cy="274320"/>
+          </a:xfrm>
+          <a:prstGeom prst="rect">
+            <a:avLst/>
+          </a:prstGeom>
+          <a:noFill/>
+          <a:ln/>
+        </p:spPr>
+        <p:txBody>
+          <a:bodyPr wrap="square" lIns="0" tIns="0" rIns="0" bIns="0" rtlCol="0" anchor="ctr"/>
+          <a:lstStyle/>
+          <a:p>
+            <a:pPr indent="0" marL="0">
+              <a:buNone/>
+            </a:pPr>
+            <a:r>
+              <a:rPr lang="en-US" sz="1350" b="1" dirty="0">
+                <a:solidFill>
+                  <a:srgbClr val="111827"/>
+                </a:solidFill>
+                <a:latin typeface="Calibri" pitchFamily="34" charset="0"/>
+                <a:ea typeface="Calibri" pitchFamily="34" charset="-122"/>
+                <a:cs typeface="Calibri" pitchFamily="34" charset="-120"/>
+              </a:rPr>
+              <a:t>File Picker</a:t>
+            </a:r>
+            <a:endParaRPr lang="en-US" sz="1350" dirty="0"/>
+          </a:p>
+        </p:txBody>
+      </p:sp>
+      <p:sp>
+        <p:nvSpPr>
+          <p:cNvPr id="15" name="Text 13"/>
+          <p:cNvSpPr/>
+          <p:nvPr/>
+        </p:nvSpPr>
+        <p:spPr>
+          <a:xfrm>
+            <a:off x="1207008" y="3721608"/>
+            <a:ext cx="4358488" cy="347472"/>
+          </a:xfrm>
+          <a:prstGeom prst="rect">
+            <a:avLst/>
+          </a:prstGeom>
+          <a:noFill/>
+          <a:ln/>
+        </p:spPr>
+        <p:txBody>
+          <a:bodyPr wrap="square" lIns="0" tIns="0" rIns="0" bIns="0" rtlCol="0" anchor="t"/>
+          <a:lstStyle/>
+          <a:p>
+            <a:pPr indent="0" marL="0">
+              <a:buNone/>
+            </a:pPr>
+            <a:r>
+              <a:rPr lang="en-US" sz="1200" dirty="0">
                 <a:solidFill>
                   <a:srgbClr val="374151"/>
                 </a:solidFill>
@@ -7264,20 +8594,97 @@
                 <a:ea typeface="Calibri" pitchFamily="34" charset="-122"/>
                 <a:cs typeface="Calibri" pitchFamily="34" charset="-120"/>
               </a:rPr>
-              <a:t>Fehlermeldungen einordnen, die nichts über die Ursache verraten</a:t>
-            </a:r>
-            <a:endParaRPr lang="en-US" sz="1250" dirty="0"/>
-          </a:p>
-          <a:p>
-            <a:pPr marL="342900" indent="-342900">
-              <a:spcAft>
-                <a:spcPts val="700"/>
-              </a:spcAft>
-              <a:buSzPct val="100000"/>
-              <a:buChar char="•"/>
-            </a:pPr>
-            <a:r>
-              <a:rPr lang="en-US" sz="1250" dirty="0">
+              <a:t>Kopiert die Aufnahme aus dem Zwischenspeicher</a:t>
+            </a:r>
+            <a:endParaRPr lang="en-US" sz="1200" dirty="0"/>
+          </a:p>
+        </p:txBody>
+      </p:sp>
+      <p:sp>
+        <p:nvSpPr>
+          <p:cNvPr id="16" name="Shape 14"/>
+          <p:cNvSpPr/>
+          <p:nvPr/>
+        </p:nvSpPr>
+        <p:spPr>
+          <a:xfrm>
+            <a:off x="987552" y="4206240"/>
+            <a:ext cx="109728" cy="109728"/>
+          </a:xfrm>
+          <a:prstGeom prst="ellipse">
+            <a:avLst/>
+          </a:prstGeom>
+          <a:solidFill>
+            <a:srgbClr val="2F6FED"/>
+          </a:solidFill>
+          <a:ln/>
+        </p:spPr>
+      </p:sp>
+      <p:sp>
+        <p:nvSpPr>
+          <p:cNvPr id="17" name="Text 15"/>
+          <p:cNvSpPr/>
+          <p:nvPr/>
+        </p:nvSpPr>
+        <p:spPr>
+          <a:xfrm>
+            <a:off x="1207008" y="4087368"/>
+            <a:ext cx="4358488" cy="274320"/>
+          </a:xfrm>
+          <a:prstGeom prst="rect">
+            <a:avLst/>
+          </a:prstGeom>
+          <a:noFill/>
+          <a:ln/>
+        </p:spPr>
+        <p:txBody>
+          <a:bodyPr wrap="square" lIns="0" tIns="0" rIns="0" bIns="0" rtlCol="0" anchor="ctr"/>
+          <a:lstStyle/>
+          <a:p>
+            <a:pPr indent="0" marL="0">
+              <a:buNone/>
+            </a:pPr>
+            <a:r>
+              <a:rPr lang="en-US" sz="1350" b="1" dirty="0">
+                <a:solidFill>
+                  <a:srgbClr val="111827"/>
+                </a:solidFill>
+                <a:latin typeface="Calibri" pitchFamily="34" charset="0"/>
+                <a:ea typeface="Calibri" pitchFamily="34" charset="-122"/>
+                <a:cs typeface="Calibri" pitchFamily="34" charset="-120"/>
+              </a:rPr>
+              <a:t>Filesystem</a:t>
+            </a:r>
+            <a:endParaRPr lang="en-US" sz="1350" dirty="0"/>
+          </a:p>
+        </p:txBody>
+      </p:sp>
+      <p:sp>
+        <p:nvSpPr>
+          <p:cNvPr id="18" name="Text 16"/>
+          <p:cNvSpPr/>
+          <p:nvPr/>
+        </p:nvSpPr>
+        <p:spPr>
+          <a:xfrm>
+            <a:off x="1207008" y="4343400"/>
+            <a:ext cx="4358488" cy="347472"/>
+          </a:xfrm>
+          <a:prstGeom prst="rect">
+            <a:avLst/>
+          </a:prstGeom>
+          <a:noFill/>
+          <a:ln/>
+        </p:spPr>
+        <p:txBody>
+          <a:bodyPr wrap="square" lIns="0" tIns="0" rIns="0" bIns="0" rtlCol="0" anchor="t"/>
+          <a:lstStyle/>
+          <a:p>
+            <a:pPr indent="0" marL="0">
+              <a:buNone/>
+            </a:pPr>
+            <a:r>
+              <a:rPr lang="en-US" sz="1200" dirty="0">
                 <a:solidFill>
                   <a:srgbClr val="374151"/>
                 </a:solidFill>
@@ -7285,193 +8692,163 @@
                 <a:ea typeface="Calibri" pitchFamily="34" charset="-122"/>
                 <a:cs typeface="Calibri" pitchFamily="34" charset="-120"/>
               </a:rPr>
-              <a:t>Routinearbeit: Konfiguration, Gerüstcode, Dokumentation</a:t>
-            </a:r>
-            <a:endParaRPr lang="en-US" sz="1250" dirty="0"/>
-          </a:p>
-        </p:txBody>
-      </p:sp>
-      <p:sp>
-        <p:nvSpPr>
-          <p:cNvPr id="8" name="Shape 6"/>
-          <p:cNvSpPr/>
-          <p:nvPr/>
-        </p:nvSpPr>
-        <p:spPr>
-          <a:xfrm>
-            <a:off x="6324448" y="1600200"/>
-            <a:ext cx="5227168" cy="2286000"/>
+              <a:t>Ordner anlegen und lesen, umbenennen, löschen</a:t>
+            </a:r>
+            <a:endParaRPr lang="en-US" sz="1200" dirty="0"/>
+          </a:p>
+        </p:txBody>
+      </p:sp>
+      <p:sp>
+        <p:nvSpPr>
+          <p:cNvPr id="19" name="Shape 17"/>
+          <p:cNvSpPr/>
+          <p:nvPr/>
+        </p:nvSpPr>
+        <p:spPr>
+          <a:xfrm>
+            <a:off x="987552" y="4828032"/>
+            <a:ext cx="109728" cy="109728"/>
+          </a:xfrm>
+          <a:prstGeom prst="ellipse">
+            <a:avLst/>
+          </a:prstGeom>
+          <a:solidFill>
+            <a:srgbClr val="2F6FED"/>
+          </a:solidFill>
+          <a:ln/>
+        </p:spPr>
+      </p:sp>
+      <p:sp>
+        <p:nvSpPr>
+          <p:cNvPr id="20" name="Text 18"/>
+          <p:cNvSpPr/>
+          <p:nvPr/>
+        </p:nvSpPr>
+        <p:spPr>
+          <a:xfrm>
+            <a:off x="1207008" y="4709160"/>
+            <a:ext cx="4358488" cy="274320"/>
+          </a:xfrm>
+          <a:prstGeom prst="rect">
+            <a:avLst/>
+          </a:prstGeom>
+          <a:noFill/>
+          <a:ln/>
+        </p:spPr>
+        <p:txBody>
+          <a:bodyPr wrap="square" lIns="0" tIns="0" rIns="0" bIns="0" rtlCol="0" anchor="ctr"/>
+          <a:lstStyle/>
+          <a:p>
+            <a:pPr indent="0" marL="0">
+              <a:buNone/>
+            </a:pPr>
+            <a:r>
+              <a:rPr lang="en-US" sz="1350" b="1" dirty="0">
+                <a:solidFill>
+                  <a:srgbClr val="111827"/>
+                </a:solidFill>
+                <a:latin typeface="Calibri" pitchFamily="34" charset="0"/>
+                <a:ea typeface="Calibri" pitchFamily="34" charset="-122"/>
+                <a:cs typeface="Calibri" pitchFamily="34" charset="-120"/>
+              </a:rPr>
+              <a:t>Share</a:t>
+            </a:r>
+            <a:endParaRPr lang="en-US" sz="1350" dirty="0"/>
+          </a:p>
+        </p:txBody>
+      </p:sp>
+      <p:sp>
+        <p:nvSpPr>
+          <p:cNvPr id="21" name="Text 19"/>
+          <p:cNvSpPr/>
+          <p:nvPr/>
+        </p:nvSpPr>
+        <p:spPr>
+          <a:xfrm>
+            <a:off x="1207008" y="4965192"/>
+            <a:ext cx="4358488" cy="347472"/>
+          </a:xfrm>
+          <a:prstGeom prst="rect">
+            <a:avLst/>
+          </a:prstGeom>
+          <a:noFill/>
+          <a:ln/>
+        </p:spPr>
+        <p:txBody>
+          <a:bodyPr wrap="square" lIns="0" tIns="0" rIns="0" bIns="0" rtlCol="0" anchor="t"/>
+          <a:lstStyle/>
+          <a:p>
+            <a:pPr indent="0" marL="0">
+              <a:buNone/>
+            </a:pPr>
+            <a:r>
+              <a:rPr lang="en-US" sz="1200" dirty="0">
+                <a:solidFill>
+                  <a:srgbClr val="374151"/>
+                </a:solidFill>
+                <a:latin typeface="Calibri" pitchFamily="34" charset="0"/>
+                <a:ea typeface="Calibri" pitchFamily="34" charset="-122"/>
+                <a:cs typeface="Calibri" pitchFamily="34" charset="-120"/>
+              </a:rPr>
+              <a:t>Öffnet den Teilen-Dialog des Systems</a:t>
+            </a:r>
+            <a:endParaRPr lang="en-US" sz="1200" dirty="0"/>
+          </a:p>
+        </p:txBody>
+      </p:sp>
+      <p:sp>
+        <p:nvSpPr>
+          <p:cNvPr id="22" name="Text 20"/>
+          <p:cNvSpPr/>
+          <p:nvPr/>
+        </p:nvSpPr>
+        <p:spPr>
+          <a:xfrm>
+            <a:off x="960120" y="5394960"/>
+            <a:ext cx="4587088" cy="320040"/>
+          </a:xfrm>
+          <a:prstGeom prst="rect">
+            <a:avLst/>
+          </a:prstGeom>
+          <a:noFill/>
+          <a:ln/>
+        </p:spPr>
+        <p:txBody>
+          <a:bodyPr wrap="square" lIns="0" tIns="0" rIns="0" bIns="0" rtlCol="0" anchor="ctr"/>
+          <a:lstStyle/>
+          <a:p>
+            <a:pPr indent="0" marL="0">
+              <a:buNone/>
+            </a:pPr>
+            <a:r>
+              <a:rPr lang="en-US" sz="1150" i="1" dirty="0">
+                <a:solidFill>
+                  <a:srgbClr val="6B7280"/>
+                </a:solidFill>
+                <a:latin typeface="Calibri" pitchFamily="34" charset="0"/>
+                <a:ea typeface="Calibri" pitchFamily="34" charset="-122"/>
+                <a:cs typeface="Calibri" pitchFamily="34" charset="-120"/>
+              </a:rPr>
+              <a:t>Die beiden roten sind kostenpflichtig und brauchen einen Lizenzschlüssel.</a:t>
+            </a:r>
+            <a:endParaRPr lang="en-US" sz="1150" dirty="0"/>
+          </a:p>
+        </p:txBody>
+      </p:sp>
+      <p:sp>
+        <p:nvSpPr>
+          <p:cNvPr id="23" name="Shape 21"/>
+          <p:cNvSpPr/>
+          <p:nvPr/>
+        </p:nvSpPr>
+        <p:spPr>
+          <a:xfrm>
+            <a:off x="6324448" y="1645920"/>
+            <a:ext cx="5227168" cy="4114800"/>
           </a:xfrm>
           <a:prstGeom prst="roundRect">
             <a:avLst>
-              <a:gd name="adj" fmla="val 3200"/>
-            </a:avLst>
-          </a:prstGeom>
-          <a:solidFill>
-            <a:srgbClr val="F4F5F7"/>
-          </a:solidFill>
-          <a:ln/>
-        </p:spPr>
-      </p:sp>
-      <p:sp>
-        <p:nvSpPr>
-          <p:cNvPr id="9" name="Text 7"/>
-          <p:cNvSpPr/>
-          <p:nvPr/>
-        </p:nvSpPr>
-        <p:spPr>
-          <a:xfrm>
-            <a:off x="6644488" y="1810512"/>
-            <a:ext cx="4587088" cy="320040"/>
-          </a:xfrm>
-          <a:prstGeom prst="rect">
-            <a:avLst/>
-          </a:prstGeom>
-          <a:noFill/>
-          <a:ln/>
-        </p:spPr>
-        <p:txBody>
-          <a:bodyPr wrap="square" lIns="0" tIns="0" rIns="0" bIns="0" rtlCol="0" anchor="ctr"/>
-          <a:lstStyle/>
-          <a:p>
-            <a:pPr indent="0" marL="0">
-              <a:buNone/>
-            </a:pPr>
-            <a:r>
-              <a:rPr lang="en-US" sz="1500" b="1" dirty="0">
-                <a:solidFill>
-                  <a:srgbClr val="111827"/>
-                </a:solidFill>
-                <a:latin typeface="Calibri" pitchFamily="34" charset="0"/>
-                <a:ea typeface="Calibri" pitchFamily="34" charset="-122"/>
-                <a:cs typeface="Calibri" pitchFamily="34" charset="-120"/>
-              </a:rPr>
-              <a:t>Wo wir aufpassen mussten</a:t>
-            </a:r>
-            <a:endParaRPr lang="en-US" sz="1500" dirty="0"/>
-          </a:p>
-        </p:txBody>
-      </p:sp>
-      <p:sp>
-        <p:nvSpPr>
-          <p:cNvPr id="10" name="Text 8"/>
-          <p:cNvSpPr/>
-          <p:nvPr/>
-        </p:nvSpPr>
-        <p:spPr>
-          <a:xfrm>
-            <a:off x="6644488" y="2212848"/>
-            <a:ext cx="4587088" cy="1554480"/>
-          </a:xfrm>
-          <a:prstGeom prst="rect">
-            <a:avLst/>
-          </a:prstGeom>
-          <a:noFill/>
-          <a:ln/>
-        </p:spPr>
-        <p:txBody>
-          <a:bodyPr wrap="square" lIns="0" tIns="0" rIns="0" bIns="0" rtlCol="0" anchor="t"/>
-          <a:lstStyle/>
-          <a:p>
-            <a:pPr marL="342900" indent="-342900">
-              <a:spcAft>
-                <a:spcPts val="700"/>
-              </a:spcAft>
-              <a:buSzPct val="100000"/>
-              <a:buChar char="•"/>
-            </a:pPr>
-            <a:r>
-              <a:rPr lang="en-US" sz="1250" dirty="0">
-                <a:solidFill>
-                  <a:srgbClr val="374151"/>
-                </a:solidFill>
-                <a:latin typeface="Calibri" pitchFamily="34" charset="0"/>
-                <a:ea typeface="Calibri" pitchFamily="34" charset="-122"/>
-                <a:cs typeface="Calibri" pitchFamily="34" charset="-120"/>
-              </a:rPr>
-              <a:t>Überzeugend formulierte Lösungen, die an der Aufgabe vorbeigehen</a:t>
-            </a:r>
-            <a:endParaRPr lang="en-US" sz="1250" dirty="0"/>
-          </a:p>
-          <a:p>
-            <a:pPr marL="342900" indent="-342900">
-              <a:spcAft>
-                <a:spcPts val="700"/>
-              </a:spcAft>
-              <a:buSzPct val="100000"/>
-              <a:buChar char="•"/>
-            </a:pPr>
-            <a:r>
-              <a:rPr lang="en-US" sz="1250" dirty="0">
-                <a:solidFill>
-                  <a:srgbClr val="374151"/>
-                </a:solidFill>
-                <a:latin typeface="Calibri" pitchFamily="34" charset="0"/>
-                <a:ea typeface="Calibri" pitchFamily="34" charset="-122"/>
-                <a:cs typeface="Calibri" pitchFamily="34" charset="-120"/>
-              </a:rPr>
-              <a:t>Veraltete Annahmen über Versionen und Bezugsquellen</a:t>
-            </a:r>
-            <a:endParaRPr lang="en-US" sz="1250" dirty="0"/>
-          </a:p>
-          <a:p>
-            <a:pPr marL="342900" indent="-342900">
-              <a:spcAft>
-                <a:spcPts val="700"/>
-              </a:spcAft>
-              <a:buSzPct val="100000"/>
-              <a:buChar char="•"/>
-            </a:pPr>
-            <a:r>
-              <a:rPr lang="en-US" sz="1250" dirty="0">
-                <a:solidFill>
-                  <a:srgbClr val="374151"/>
-                </a:solidFill>
-                <a:latin typeface="Calibri" pitchFamily="34" charset="0"/>
-                <a:ea typeface="Calibri" pitchFamily="34" charset="-122"/>
-                <a:cs typeface="Calibri" pitchFamily="34" charset="-120"/>
-              </a:rPr>
-              <a:t>Kein Wissen über den Zustand unseres Rechners</a:t>
-            </a:r>
-            <a:endParaRPr lang="en-US" sz="1250" dirty="0"/>
-          </a:p>
-          <a:p>
-            <a:pPr marL="342900" indent="-342900">
-              <a:spcAft>
-                <a:spcPts val="700"/>
-              </a:spcAft>
-              <a:buSzPct val="100000"/>
-              <a:buChar char="•"/>
-            </a:pPr>
-            <a:r>
-              <a:rPr lang="en-US" sz="1250" dirty="0">
-                <a:solidFill>
-                  <a:srgbClr val="374151"/>
-                </a:solidFill>
-                <a:latin typeface="Calibri" pitchFamily="34" charset="0"/>
-                <a:ea typeface="Calibri" pitchFamily="34" charset="-122"/>
-                <a:cs typeface="Calibri" pitchFamily="34" charset="-120"/>
-              </a:rPr>
-              <a:t>Kein Ersatz für den Test auf echter Hardware</a:t>
-            </a:r>
-            <a:endParaRPr lang="en-US" sz="1250" dirty="0"/>
-          </a:p>
-        </p:txBody>
-      </p:sp>
-      <p:sp>
-        <p:nvSpPr>
-          <p:cNvPr id="11" name="Shape 9"/>
-          <p:cNvSpPr/>
-          <p:nvPr/>
-        </p:nvSpPr>
-        <p:spPr>
-          <a:xfrm>
-            <a:off x="640080" y="4114800"/>
-            <a:ext cx="10911535" cy="1783080"/>
-          </a:xfrm>
-          <a:prstGeom prst="roundRect">
-            <a:avLst>
-              <a:gd name="adj" fmla="val 4103"/>
+              <a:gd name="adj" fmla="val 1778"/>
             </a:avLst>
           </a:prstGeom>
           <a:solidFill>
@@ -7482,34 +8859,73 @@
       </p:sp>
       <p:sp>
         <p:nvSpPr>
-          <p:cNvPr id="12" name="Shape 10"/>
-          <p:cNvSpPr/>
-          <p:nvPr/>
-        </p:nvSpPr>
-        <p:spPr>
-          <a:xfrm>
-            <a:off x="1005840" y="4416552"/>
-            <a:ext cx="146304" cy="146304"/>
+          <p:cNvPr id="24" name="Text 22"/>
+          <p:cNvSpPr/>
+          <p:nvPr/>
+        </p:nvSpPr>
+        <p:spPr>
+          <a:xfrm>
+            <a:off x="6644488" y="1847088"/>
+            <a:ext cx="4587088" cy="320040"/>
+          </a:xfrm>
+          <a:prstGeom prst="rect">
+            <a:avLst/>
+          </a:prstGeom>
+          <a:noFill/>
+          <a:ln/>
+        </p:spPr>
+        <p:txBody>
+          <a:bodyPr wrap="square" lIns="0" tIns="0" rIns="0" bIns="0" rtlCol="0" anchor="ctr"/>
+          <a:lstStyle/>
+          <a:p>
+            <a:pPr indent="0" marL="0">
+              <a:buNone/>
+            </a:pPr>
+            <a:r>
+              <a:rPr lang="en-US" sz="1500" b="1" dirty="0">
+                <a:solidFill>
+                  <a:srgbClr val="FFFFFF"/>
+                </a:solidFill>
+                <a:latin typeface="Calibri" pitchFamily="34" charset="0"/>
+                <a:ea typeface="Calibri" pitchFamily="34" charset="-122"/>
+                <a:cs typeface="Calibri" pitchFamily="34" charset="-120"/>
+              </a:rPr>
+              <a:t>Wie sie funktionieren</a:t>
+            </a:r>
+            <a:endParaRPr lang="en-US" sz="1500" dirty="0"/>
+          </a:p>
+        </p:txBody>
+      </p:sp>
+      <p:sp>
+        <p:nvSpPr>
+          <p:cNvPr id="25" name="Shape 23"/>
+          <p:cNvSpPr/>
+          <p:nvPr/>
+        </p:nvSpPr>
+        <p:spPr>
+          <a:xfrm>
+            <a:off x="6644488" y="2240280"/>
+            <a:ext cx="384048" cy="384048"/>
           </a:xfrm>
           <a:prstGeom prst="ellipse">
             <a:avLst/>
           </a:prstGeom>
           <a:solidFill>
-            <a:srgbClr val="E23E3E"/>
+            <a:srgbClr val="2F6FED"/>
           </a:solidFill>
           <a:ln/>
         </p:spPr>
       </p:sp>
       <p:sp>
         <p:nvSpPr>
-          <p:cNvPr id="13" name="Text 11"/>
-          <p:cNvSpPr/>
-          <p:nvPr/>
-        </p:nvSpPr>
-        <p:spPr>
-          <a:xfrm>
-            <a:off x="1298448" y="4315968"/>
-            <a:ext cx="9814255" cy="365760"/>
+          <p:cNvPr id="26" name="Text 24"/>
+          <p:cNvSpPr/>
+          <p:nvPr/>
+        </p:nvSpPr>
+        <p:spPr>
+          <a:xfrm>
+            <a:off x="6644488" y="2240280"/>
+            <a:ext cx="384048" cy="384048"/>
           </a:xfrm>
           <a:prstGeom prst="rect">
             <a:avLst/>
@@ -7521,7 +8937,7 @@
           <a:bodyPr wrap="square" lIns="0" tIns="0" rIns="0" bIns="0" rtlCol="0" anchor="ctr"/>
           <a:lstStyle/>
           <a:p>
-            <a:pPr indent="0" marL="0">
+            <a:pPr algn="ctr" indent="0" marL="0">
               <a:buNone/>
             </a:pPr>
             <a:r>
@@ -7533,7 +8949,7 @@
                 <a:ea typeface="Calibri" pitchFamily="34" charset="-122"/>
                 <a:cs typeface="Calibri" pitchFamily="34" charset="-120"/>
               </a:rPr>
-              <a:t>Unsere Regel daraus</a:t>
+              <a:t>1</a:t>
             </a:r>
             <a:endParaRPr lang="en-US" sz="1500" dirty="0"/>
           </a:p>
@@ -7541,14 +8957,53 @@
       </p:sp>
       <p:sp>
         <p:nvSpPr>
-          <p:cNvPr id="14" name="Text 12"/>
-          <p:cNvSpPr/>
-          <p:nvPr/>
-        </p:nvSpPr>
-        <p:spPr>
-          <a:xfrm>
-            <a:off x="1005840" y="4754880"/>
-            <a:ext cx="10180015" cy="960120"/>
+          <p:cNvPr id="27" name="Text 25"/>
+          <p:cNvSpPr/>
+          <p:nvPr/>
+        </p:nvSpPr>
+        <p:spPr>
+          <a:xfrm>
+            <a:off x="7165696" y="2221992"/>
+            <a:ext cx="4038448" cy="320040"/>
+          </a:xfrm>
+          <a:prstGeom prst="rect">
+            <a:avLst/>
+          </a:prstGeom>
+          <a:noFill/>
+          <a:ln/>
+        </p:spPr>
+        <p:txBody>
+          <a:bodyPr wrap="square" lIns="0" tIns="0" rIns="0" bIns="0" rtlCol="0" anchor="ctr"/>
+          <a:lstStyle/>
+          <a:p>
+            <a:pPr indent="0" marL="0">
+              <a:buNone/>
+            </a:pPr>
+            <a:r>
+              <a:rPr lang="en-US" sz="1350" b="1" dirty="0">
+                <a:solidFill>
+                  <a:srgbClr val="FFFFFF"/>
+                </a:solidFill>
+                <a:latin typeface="Calibri" pitchFamily="34" charset="0"/>
+                <a:ea typeface="Calibri" pitchFamily="34" charset="-122"/>
+                <a:cs typeface="Calibri" pitchFamily="34" charset="-120"/>
+              </a:rPr>
+              <a:t>JavaScript ruft auf</a:t>
+            </a:r>
+            <a:endParaRPr lang="en-US" sz="1350" dirty="0"/>
+          </a:p>
+        </p:txBody>
+      </p:sp>
+      <p:sp>
+        <p:nvSpPr>
+          <p:cNvPr id="28" name="Text 26"/>
+          <p:cNvSpPr/>
+          <p:nvPr/>
+        </p:nvSpPr>
+        <p:spPr>
+          <a:xfrm>
+            <a:off x="7165696" y="2551176"/>
+            <a:ext cx="4038448" cy="365760"/>
           </a:xfrm>
           <a:prstGeom prst="rect">
             <a:avLst/>
@@ -7564,7 +9019,457 @@
               <a:buNone/>
             </a:pPr>
             <a:r>
-              <a:rPr lang="en-US" sz="1350" dirty="0">
+              <a:rPr lang="en-US" sz="1150" dirty="0">
+                <a:solidFill>
+                  <a:srgbClr val="9AA4B2"/>
+                </a:solidFill>
+                <a:latin typeface="Calibri" pitchFamily="34" charset="0"/>
+                <a:ea typeface="Calibri" pitchFamily="34" charset="-122"/>
+                <a:cs typeface="Calibri" pitchFamily="34" charset="-120"/>
+              </a:rPr>
+              <a:t>Im Code steht ein gewöhnlicher Funktionsaufruf</a:t>
+            </a:r>
+            <a:endParaRPr lang="en-US" sz="1150" dirty="0"/>
+          </a:p>
+        </p:txBody>
+      </p:sp>
+      <p:sp>
+        <p:nvSpPr>
+          <p:cNvPr id="29" name="Shape 27"/>
+          <p:cNvSpPr/>
+          <p:nvPr/>
+        </p:nvSpPr>
+        <p:spPr>
+          <a:xfrm>
+            <a:off x="6644488" y="2971800"/>
+            <a:ext cx="384048" cy="384048"/>
+          </a:xfrm>
+          <a:prstGeom prst="ellipse">
+            <a:avLst/>
+          </a:prstGeom>
+          <a:solidFill>
+            <a:srgbClr val="2F6FED"/>
+          </a:solidFill>
+          <a:ln/>
+        </p:spPr>
+      </p:sp>
+      <p:sp>
+        <p:nvSpPr>
+          <p:cNvPr id="30" name="Text 28"/>
+          <p:cNvSpPr/>
+          <p:nvPr/>
+        </p:nvSpPr>
+        <p:spPr>
+          <a:xfrm>
+            <a:off x="6644488" y="2971800"/>
+            <a:ext cx="384048" cy="384048"/>
+          </a:xfrm>
+          <a:prstGeom prst="rect">
+            <a:avLst/>
+          </a:prstGeom>
+          <a:noFill/>
+          <a:ln/>
+        </p:spPr>
+        <p:txBody>
+          <a:bodyPr wrap="square" lIns="0" tIns="0" rIns="0" bIns="0" rtlCol="0" anchor="ctr"/>
+          <a:lstStyle/>
+          <a:p>
+            <a:pPr algn="ctr" indent="0" marL="0">
+              <a:buNone/>
+            </a:pPr>
+            <a:r>
+              <a:rPr lang="en-US" sz="1500" b="1" dirty="0">
+                <a:solidFill>
+                  <a:srgbClr val="FFFFFF"/>
+                </a:solidFill>
+                <a:latin typeface="Calibri" pitchFamily="34" charset="0"/>
+                <a:ea typeface="Calibri" pitchFamily="34" charset="-122"/>
+                <a:cs typeface="Calibri" pitchFamily="34" charset="-120"/>
+              </a:rPr>
+              <a:t>2</a:t>
+            </a:r>
+            <a:endParaRPr lang="en-US" sz="1500" dirty="0"/>
+          </a:p>
+        </p:txBody>
+      </p:sp>
+      <p:sp>
+        <p:nvSpPr>
+          <p:cNvPr id="31" name="Text 29"/>
+          <p:cNvSpPr/>
+          <p:nvPr/>
+        </p:nvSpPr>
+        <p:spPr>
+          <a:xfrm>
+            <a:off x="7165696" y="2953512"/>
+            <a:ext cx="4038448" cy="320040"/>
+          </a:xfrm>
+          <a:prstGeom prst="rect">
+            <a:avLst/>
+          </a:prstGeom>
+          <a:noFill/>
+          <a:ln/>
+        </p:spPr>
+        <p:txBody>
+          <a:bodyPr wrap="square" lIns="0" tIns="0" rIns="0" bIns="0" rtlCol="0" anchor="ctr"/>
+          <a:lstStyle/>
+          <a:p>
+            <a:pPr indent="0" marL="0">
+              <a:buNone/>
+            </a:pPr>
+            <a:r>
+              <a:rPr lang="en-US" sz="1350" b="1" dirty="0">
+                <a:solidFill>
+                  <a:srgbClr val="FFFFFF"/>
+                </a:solidFill>
+                <a:latin typeface="Calibri" pitchFamily="34" charset="0"/>
+                <a:ea typeface="Calibri" pitchFamily="34" charset="-122"/>
+                <a:cs typeface="Calibri" pitchFamily="34" charset="-120"/>
+              </a:rPr>
+              <a:t>Die Capacitor-Bridge übersetzt</a:t>
+            </a:r>
+            <a:endParaRPr lang="en-US" sz="1350" dirty="0"/>
+          </a:p>
+        </p:txBody>
+      </p:sp>
+      <p:sp>
+        <p:nvSpPr>
+          <p:cNvPr id="32" name="Text 30"/>
+          <p:cNvSpPr/>
+          <p:nvPr/>
+        </p:nvSpPr>
+        <p:spPr>
+          <a:xfrm>
+            <a:off x="7165696" y="3282696"/>
+            <a:ext cx="4038448" cy="365760"/>
+          </a:xfrm>
+          <a:prstGeom prst="rect">
+            <a:avLst/>
+          </a:prstGeom>
+          <a:noFill/>
+          <a:ln/>
+        </p:spPr>
+        <p:txBody>
+          <a:bodyPr wrap="square" lIns="0" tIns="0" rIns="0" bIns="0" rtlCol="0" anchor="t"/>
+          <a:lstStyle/>
+          <a:p>
+            <a:pPr indent="0" marL="0">
+              <a:buNone/>
+            </a:pPr>
+            <a:r>
+              <a:rPr lang="en-US" sz="1150" dirty="0">
+                <a:solidFill>
+                  <a:srgbClr val="9AA4B2"/>
+                </a:solidFill>
+                <a:latin typeface="Calibri" pitchFamily="34" charset="0"/>
+                <a:ea typeface="Calibri" pitchFamily="34" charset="-122"/>
+                <a:cs typeface="Calibri" pitchFamily="34" charset="-120"/>
+              </a:rPr>
+              <a:t>Sie reicht den Aufruf aus dem Web-Fenster nach unten durch</a:t>
+            </a:r>
+            <a:endParaRPr lang="en-US" sz="1150" dirty="0"/>
+          </a:p>
+        </p:txBody>
+      </p:sp>
+      <p:sp>
+        <p:nvSpPr>
+          <p:cNvPr id="33" name="Shape 31"/>
+          <p:cNvSpPr/>
+          <p:nvPr/>
+        </p:nvSpPr>
+        <p:spPr>
+          <a:xfrm>
+            <a:off x="6644488" y="3703320"/>
+            <a:ext cx="384048" cy="384048"/>
+          </a:xfrm>
+          <a:prstGeom prst="ellipse">
+            <a:avLst/>
+          </a:prstGeom>
+          <a:solidFill>
+            <a:srgbClr val="2F6FED"/>
+          </a:solidFill>
+          <a:ln/>
+        </p:spPr>
+      </p:sp>
+      <p:sp>
+        <p:nvSpPr>
+          <p:cNvPr id="34" name="Text 32"/>
+          <p:cNvSpPr/>
+          <p:nvPr/>
+        </p:nvSpPr>
+        <p:spPr>
+          <a:xfrm>
+            <a:off x="6644488" y="3703320"/>
+            <a:ext cx="384048" cy="384048"/>
+          </a:xfrm>
+          <a:prstGeom prst="rect">
+            <a:avLst/>
+          </a:prstGeom>
+          <a:noFill/>
+          <a:ln/>
+        </p:spPr>
+        <p:txBody>
+          <a:bodyPr wrap="square" lIns="0" tIns="0" rIns="0" bIns="0" rtlCol="0" anchor="ctr"/>
+          <a:lstStyle/>
+          <a:p>
+            <a:pPr algn="ctr" indent="0" marL="0">
+              <a:buNone/>
+            </a:pPr>
+            <a:r>
+              <a:rPr lang="en-US" sz="1500" b="1" dirty="0">
+                <a:solidFill>
+                  <a:srgbClr val="FFFFFF"/>
+                </a:solidFill>
+                <a:latin typeface="Calibri" pitchFamily="34" charset="0"/>
+                <a:ea typeface="Calibri" pitchFamily="34" charset="-122"/>
+                <a:cs typeface="Calibri" pitchFamily="34" charset="-120"/>
+              </a:rPr>
+              <a:t>3</a:t>
+            </a:r>
+            <a:endParaRPr lang="en-US" sz="1500" dirty="0"/>
+          </a:p>
+        </p:txBody>
+      </p:sp>
+      <p:sp>
+        <p:nvSpPr>
+          <p:cNvPr id="35" name="Text 33"/>
+          <p:cNvSpPr/>
+          <p:nvPr/>
+        </p:nvSpPr>
+        <p:spPr>
+          <a:xfrm>
+            <a:off x="7165696" y="3685032"/>
+            <a:ext cx="4038448" cy="320040"/>
+          </a:xfrm>
+          <a:prstGeom prst="rect">
+            <a:avLst/>
+          </a:prstGeom>
+          <a:noFill/>
+          <a:ln/>
+        </p:spPr>
+        <p:txBody>
+          <a:bodyPr wrap="square" lIns="0" tIns="0" rIns="0" bIns="0" rtlCol="0" anchor="ctr"/>
+          <a:lstStyle/>
+          <a:p>
+            <a:pPr indent="0" marL="0">
+              <a:buNone/>
+            </a:pPr>
+            <a:r>
+              <a:rPr lang="en-US" sz="1350" b="1" dirty="0">
+                <a:solidFill>
+                  <a:srgbClr val="FFFFFF"/>
+                </a:solidFill>
+                <a:latin typeface="Calibri" pitchFamily="34" charset="0"/>
+                <a:ea typeface="Calibri" pitchFamily="34" charset="-122"/>
+                <a:cs typeface="Calibri" pitchFamily="34" charset="-120"/>
+              </a:rPr>
+              <a:t>Nativer Plugin-Code läuft</a:t>
+            </a:r>
+            <a:endParaRPr lang="en-US" sz="1350" dirty="0"/>
+          </a:p>
+        </p:txBody>
+      </p:sp>
+      <p:sp>
+        <p:nvSpPr>
+          <p:cNvPr id="36" name="Text 34"/>
+          <p:cNvSpPr/>
+          <p:nvPr/>
+        </p:nvSpPr>
+        <p:spPr>
+          <a:xfrm>
+            <a:off x="7165696" y="4014216"/>
+            <a:ext cx="4038448" cy="365760"/>
+          </a:xfrm>
+          <a:prstGeom prst="rect">
+            <a:avLst/>
+          </a:prstGeom>
+          <a:noFill/>
+          <a:ln/>
+        </p:spPr>
+        <p:txBody>
+          <a:bodyPr wrap="square" lIns="0" tIns="0" rIns="0" bIns="0" rtlCol="0" anchor="t"/>
+          <a:lstStyle/>
+          <a:p>
+            <a:pPr indent="0" marL="0">
+              <a:buNone/>
+            </a:pPr>
+            <a:r>
+              <a:rPr lang="en-US" sz="1150" dirty="0">
+                <a:solidFill>
+                  <a:srgbClr val="9AA4B2"/>
+                </a:solidFill>
+                <a:latin typeface="Calibri" pitchFamily="34" charset="0"/>
+                <a:ea typeface="Calibri" pitchFamily="34" charset="-122"/>
+                <a:cs typeface="Calibri" pitchFamily="34" charset="-120"/>
+              </a:rPr>
+              <a:t>In Kotlin bzw. Java geschrieben — nur nicht von uns</a:t>
+            </a:r>
+            <a:endParaRPr lang="en-US" sz="1150" dirty="0"/>
+          </a:p>
+        </p:txBody>
+      </p:sp>
+      <p:sp>
+        <p:nvSpPr>
+          <p:cNvPr id="37" name="Shape 35"/>
+          <p:cNvSpPr/>
+          <p:nvPr/>
+        </p:nvSpPr>
+        <p:spPr>
+          <a:xfrm>
+            <a:off x="6644488" y="4434840"/>
+            <a:ext cx="384048" cy="384048"/>
+          </a:xfrm>
+          <a:prstGeom prst="ellipse">
+            <a:avLst/>
+          </a:prstGeom>
+          <a:solidFill>
+            <a:srgbClr val="2F6FED"/>
+          </a:solidFill>
+          <a:ln/>
+        </p:spPr>
+      </p:sp>
+      <p:sp>
+        <p:nvSpPr>
+          <p:cNvPr id="38" name="Text 36"/>
+          <p:cNvSpPr/>
+          <p:nvPr/>
+        </p:nvSpPr>
+        <p:spPr>
+          <a:xfrm>
+            <a:off x="6644488" y="4434840"/>
+            <a:ext cx="384048" cy="384048"/>
+          </a:xfrm>
+          <a:prstGeom prst="rect">
+            <a:avLst/>
+          </a:prstGeom>
+          <a:noFill/>
+          <a:ln/>
+        </p:spPr>
+        <p:txBody>
+          <a:bodyPr wrap="square" lIns="0" tIns="0" rIns="0" bIns="0" rtlCol="0" anchor="ctr"/>
+          <a:lstStyle/>
+          <a:p>
+            <a:pPr algn="ctr" indent="0" marL="0">
+              <a:buNone/>
+            </a:pPr>
+            <a:r>
+              <a:rPr lang="en-US" sz="1500" b="1" dirty="0">
+                <a:solidFill>
+                  <a:srgbClr val="FFFFFF"/>
+                </a:solidFill>
+                <a:latin typeface="Calibri" pitchFamily="34" charset="0"/>
+                <a:ea typeface="Calibri" pitchFamily="34" charset="-122"/>
+                <a:cs typeface="Calibri" pitchFamily="34" charset="-120"/>
+              </a:rPr>
+              <a:t>4</a:t>
+            </a:r>
+            <a:endParaRPr lang="en-US" sz="1500" dirty="0"/>
+          </a:p>
+        </p:txBody>
+      </p:sp>
+      <p:sp>
+        <p:nvSpPr>
+          <p:cNvPr id="39" name="Text 37"/>
+          <p:cNvSpPr/>
+          <p:nvPr/>
+        </p:nvSpPr>
+        <p:spPr>
+          <a:xfrm>
+            <a:off x="7165696" y="4416552"/>
+            <a:ext cx="4038448" cy="320040"/>
+          </a:xfrm>
+          <a:prstGeom prst="rect">
+            <a:avLst/>
+          </a:prstGeom>
+          <a:noFill/>
+          <a:ln/>
+        </p:spPr>
+        <p:txBody>
+          <a:bodyPr wrap="square" lIns="0" tIns="0" rIns="0" bIns="0" rtlCol="0" anchor="ctr"/>
+          <a:lstStyle/>
+          <a:p>
+            <a:pPr indent="0" marL="0">
+              <a:buNone/>
+            </a:pPr>
+            <a:r>
+              <a:rPr lang="en-US" sz="1350" b="1" dirty="0">
+                <a:solidFill>
+                  <a:srgbClr val="FFFFFF"/>
+                </a:solidFill>
+                <a:latin typeface="Calibri" pitchFamily="34" charset="0"/>
+                <a:ea typeface="Calibri" pitchFamily="34" charset="-122"/>
+                <a:cs typeface="Calibri" pitchFamily="34" charset="-120"/>
+              </a:rPr>
+              <a:t>Die Antwort kommt zurück</a:t>
+            </a:r>
+            <a:endParaRPr lang="en-US" sz="1350" dirty="0"/>
+          </a:p>
+        </p:txBody>
+      </p:sp>
+      <p:sp>
+        <p:nvSpPr>
+          <p:cNvPr id="40" name="Text 38"/>
+          <p:cNvSpPr/>
+          <p:nvPr/>
+        </p:nvSpPr>
+        <p:spPr>
+          <a:xfrm>
+            <a:off x="7165696" y="4745736"/>
+            <a:ext cx="4038448" cy="365760"/>
+          </a:xfrm>
+          <a:prstGeom prst="rect">
+            <a:avLst/>
+          </a:prstGeom>
+          <a:noFill/>
+          <a:ln/>
+        </p:spPr>
+        <p:txBody>
+          <a:bodyPr wrap="square" lIns="0" tIns="0" rIns="0" bIns="0" rtlCol="0" anchor="t"/>
+          <a:lstStyle/>
+          <a:p>
+            <a:pPr indent="0" marL="0">
+              <a:buNone/>
+            </a:pPr>
+            <a:r>
+              <a:rPr lang="en-US" sz="1150" dirty="0">
+                <a:solidFill>
+                  <a:srgbClr val="9AA4B2"/>
+                </a:solidFill>
+                <a:latin typeface="Calibri" pitchFamily="34" charset="0"/>
+                <a:ea typeface="Calibri" pitchFamily="34" charset="-122"/>
+                <a:cs typeface="Calibri" pitchFamily="34" charset="-120"/>
+              </a:rPr>
+              <a:t>Wieder über die Bridge, als Ergebnis im JavaScript</a:t>
+            </a:r>
+            <a:endParaRPr lang="en-US" sz="1150" dirty="0"/>
+          </a:p>
+        </p:txBody>
+      </p:sp>
+      <p:sp>
+        <p:nvSpPr>
+          <p:cNvPr id="41" name="Text 39"/>
+          <p:cNvSpPr/>
+          <p:nvPr/>
+        </p:nvSpPr>
+        <p:spPr>
+          <a:xfrm>
+            <a:off x="6644488" y="5394960"/>
+            <a:ext cx="4587088" cy="320040"/>
+          </a:xfrm>
+          <a:prstGeom prst="rect">
+            <a:avLst/>
+          </a:prstGeom>
+          <a:noFill/>
+          <a:ln/>
+        </p:spPr>
+        <p:txBody>
+          <a:bodyPr wrap="square" lIns="0" tIns="0" rIns="0" bIns="0" rtlCol="0" anchor="ctr"/>
+          <a:lstStyle/>
+          <a:p>
+            <a:pPr indent="0" marL="0">
+              <a:buNone/>
+            </a:pPr>
+            <a:r>
+              <a:rPr lang="en-US" sz="1150" i="1" dirty="0">
                 <a:solidFill>
                   <a:srgbClr val="D1D5DB"/>
                 </a:solidFill>
@@ -7572,9 +9477,9 @@
                 <a:ea typeface="Calibri" pitchFamily="34" charset="-122"/>
                 <a:cs typeface="Calibri" pitchFamily="34" charset="-120"/>
               </a:rPr>
-              <a:t>Ein Agent liefert einen Vorschlag, kein Ergebnis. Die Aufgabenstellung bleibt das Prüfkriterium — nicht die Frage, ob der Code läuft. Wir haben nach der Kurskorrektur jede Anforderung einzeln gegen den Code abgeglichen statt gegen den Eindruck, dass es funktioniert.</a:t>
-            </a:r>
-            <a:endParaRPr lang="en-US" sz="1350" dirty="0"/>
+              <a:t>Der native Code steckt in den Plugins — eingekauft, nicht selbst geschrieben.</a:t>
+            </a:r>
+            <a:endParaRPr lang="en-US" sz="1150" dirty="0"/>
           </a:p>
         </p:txBody>
       </p:sp>
@@ -7663,7 +9568,7 @@
                 <a:ea typeface="Cambria" pitchFamily="34" charset="-122"/>
                 <a:cs typeface="Cambria" pitchFamily="34" charset="-120"/>
               </a:rPr>
-              <a:t>Problem 1: Die Lösung war fertig — und falsch</a:t>
+              <a:t>Wie wir vorgegangen sind</a:t>
             </a:r>
             <a:endParaRPr lang="en-US" sz="3200" dirty="0"/>
           </a:p>
@@ -7677,12 +9582,697 @@
         </p:nvSpPr>
         <p:spPr>
           <a:xfrm>
-            <a:off x="640080" y="1554480"/>
-            <a:ext cx="5227168" cy="3200400"/>
+            <a:off x="640080" y="1737360"/>
+            <a:ext cx="384048" cy="384048"/>
+          </a:xfrm>
+          <a:prstGeom prst="ellipse">
+            <a:avLst/>
+          </a:prstGeom>
+          <a:solidFill>
+            <a:srgbClr val="2F6FED"/>
+          </a:solidFill>
+          <a:ln/>
+        </p:spPr>
+      </p:sp>
+      <p:sp>
+        <p:nvSpPr>
+          <p:cNvPr id="5" name="Text 3"/>
+          <p:cNvSpPr/>
+          <p:nvPr/>
+        </p:nvSpPr>
+        <p:spPr>
+          <a:xfrm>
+            <a:off x="640080" y="1737360"/>
+            <a:ext cx="384048" cy="384048"/>
+          </a:xfrm>
+          <a:prstGeom prst="rect">
+            <a:avLst/>
+          </a:prstGeom>
+          <a:noFill/>
+          <a:ln/>
+        </p:spPr>
+        <p:txBody>
+          <a:bodyPr wrap="square" lIns="0" tIns="0" rIns="0" bIns="0" rtlCol="0" anchor="ctr"/>
+          <a:lstStyle/>
+          <a:p>
+            <a:pPr algn="ctr" indent="0" marL="0">
+              <a:buNone/>
+            </a:pPr>
+            <a:r>
+              <a:rPr lang="en-US" sz="1500" b="1" dirty="0">
+                <a:solidFill>
+                  <a:srgbClr val="FFFFFF"/>
+                </a:solidFill>
+                <a:latin typeface="Calibri" pitchFamily="34" charset="0"/>
+                <a:ea typeface="Calibri" pitchFamily="34" charset="-122"/>
+                <a:cs typeface="Calibri" pitchFamily="34" charset="-120"/>
+              </a:rPr>
+              <a:t>1</a:t>
+            </a:r>
+            <a:endParaRPr lang="en-US" sz="1500" dirty="0"/>
+          </a:p>
+        </p:txBody>
+      </p:sp>
+      <p:sp>
+        <p:nvSpPr>
+          <p:cNvPr id="6" name="Text 4"/>
+          <p:cNvSpPr/>
+          <p:nvPr/>
+        </p:nvSpPr>
+        <p:spPr>
+          <a:xfrm>
+            <a:off x="640080" y="2286000"/>
+            <a:ext cx="1926275" cy="365760"/>
+          </a:xfrm>
+          <a:prstGeom prst="rect">
+            <a:avLst/>
+          </a:prstGeom>
+          <a:noFill/>
+          <a:ln/>
+        </p:spPr>
+        <p:txBody>
+          <a:bodyPr wrap="square" lIns="0" tIns="0" rIns="0" bIns="0" rtlCol="0" anchor="ctr"/>
+          <a:lstStyle/>
+          <a:p>
+            <a:pPr indent="0" marL="0">
+              <a:buNone/>
+            </a:pPr>
+            <a:r>
+              <a:rPr lang="en-US" sz="1600" b="1" dirty="0">
+                <a:solidFill>
+                  <a:srgbClr val="111827"/>
+                </a:solidFill>
+                <a:latin typeface="Calibri" pitchFamily="34" charset="0"/>
+                <a:ea typeface="Calibri" pitchFamily="34" charset="-122"/>
+                <a:cs typeface="Calibri" pitchFamily="34" charset="-120"/>
+              </a:rPr>
+              <a:t>Analyse</a:t>
+            </a:r>
+            <a:endParaRPr lang="en-US" sz="1600" dirty="0"/>
+          </a:p>
+        </p:txBody>
+      </p:sp>
+      <p:sp>
+        <p:nvSpPr>
+          <p:cNvPr id="7" name="Text 5"/>
+          <p:cNvSpPr/>
+          <p:nvPr/>
+        </p:nvSpPr>
+        <p:spPr>
+          <a:xfrm>
+            <a:off x="640080" y="2697480"/>
+            <a:ext cx="1926275" cy="1737360"/>
+          </a:xfrm>
+          <a:prstGeom prst="rect">
+            <a:avLst/>
+          </a:prstGeom>
+          <a:noFill/>
+          <a:ln/>
+        </p:spPr>
+        <p:txBody>
+          <a:bodyPr wrap="square" lIns="0" tIns="0" rIns="0" bIns="0" rtlCol="0" anchor="t"/>
+          <a:lstStyle/>
+          <a:p>
+            <a:pPr indent="0" marL="0">
+              <a:buNone/>
+            </a:pPr>
+            <a:r>
+              <a:rPr lang="en-US" sz="1250" dirty="0">
+                <a:solidFill>
+                  <a:srgbClr val="374151"/>
+                </a:solidFill>
+                <a:latin typeface="Calibri" pitchFamily="34" charset="0"/>
+                <a:ea typeface="Calibri" pitchFamily="34" charset="-122"/>
+                <a:cs typeface="Calibri" pitchFamily="34" charset="-120"/>
+              </a:rPr>
+              <a:t>Anforderungen aufgeschlüsselt, Plugins und deren Dokumentation gesichtet</a:t>
+            </a:r>
+            <a:endParaRPr lang="en-US" sz="1250" dirty="0"/>
+          </a:p>
+        </p:txBody>
+      </p:sp>
+      <p:sp>
+        <p:nvSpPr>
+          <p:cNvPr id="8" name="Shape 6"/>
+          <p:cNvSpPr/>
+          <p:nvPr/>
+        </p:nvSpPr>
+        <p:spPr>
+          <a:xfrm>
+            <a:off x="2886395" y="1737360"/>
+            <a:ext cx="384048" cy="384048"/>
+          </a:xfrm>
+          <a:prstGeom prst="ellipse">
+            <a:avLst/>
+          </a:prstGeom>
+          <a:solidFill>
+            <a:srgbClr val="2F6FED"/>
+          </a:solidFill>
+          <a:ln/>
+        </p:spPr>
+      </p:sp>
+      <p:sp>
+        <p:nvSpPr>
+          <p:cNvPr id="9" name="Text 7"/>
+          <p:cNvSpPr/>
+          <p:nvPr/>
+        </p:nvSpPr>
+        <p:spPr>
+          <a:xfrm>
+            <a:off x="2886395" y="1737360"/>
+            <a:ext cx="384048" cy="384048"/>
+          </a:xfrm>
+          <a:prstGeom prst="rect">
+            <a:avLst/>
+          </a:prstGeom>
+          <a:noFill/>
+          <a:ln/>
+        </p:spPr>
+        <p:txBody>
+          <a:bodyPr wrap="square" lIns="0" tIns="0" rIns="0" bIns="0" rtlCol="0" anchor="ctr"/>
+          <a:lstStyle/>
+          <a:p>
+            <a:pPr algn="ctr" indent="0" marL="0">
+              <a:buNone/>
+            </a:pPr>
+            <a:r>
+              <a:rPr lang="en-US" sz="1500" b="1" dirty="0">
+                <a:solidFill>
+                  <a:srgbClr val="FFFFFF"/>
+                </a:solidFill>
+                <a:latin typeface="Calibri" pitchFamily="34" charset="0"/>
+                <a:ea typeface="Calibri" pitchFamily="34" charset="-122"/>
+                <a:cs typeface="Calibri" pitchFamily="34" charset="-120"/>
+              </a:rPr>
+              <a:t>2</a:t>
+            </a:r>
+            <a:endParaRPr lang="en-US" sz="1500" dirty="0"/>
+          </a:p>
+        </p:txBody>
+      </p:sp>
+      <p:sp>
+        <p:nvSpPr>
+          <p:cNvPr id="10" name="Text 8"/>
+          <p:cNvSpPr/>
+          <p:nvPr/>
+        </p:nvSpPr>
+        <p:spPr>
+          <a:xfrm>
+            <a:off x="2886395" y="2286000"/>
+            <a:ext cx="1926275" cy="365760"/>
+          </a:xfrm>
+          <a:prstGeom prst="rect">
+            <a:avLst/>
+          </a:prstGeom>
+          <a:noFill/>
+          <a:ln/>
+        </p:spPr>
+        <p:txBody>
+          <a:bodyPr wrap="square" lIns="0" tIns="0" rIns="0" bIns="0" rtlCol="0" anchor="ctr"/>
+          <a:lstStyle/>
+          <a:p>
+            <a:pPr indent="0" marL="0">
+              <a:buNone/>
+            </a:pPr>
+            <a:r>
+              <a:rPr lang="en-US" sz="1600" b="1" dirty="0">
+                <a:solidFill>
+                  <a:srgbClr val="111827"/>
+                </a:solidFill>
+                <a:latin typeface="Calibri" pitchFamily="34" charset="0"/>
+                <a:ea typeface="Calibri" pitchFamily="34" charset="-122"/>
+                <a:cs typeface="Calibri" pitchFamily="34" charset="-120"/>
+              </a:rPr>
+              <a:t>Erster Wurf</a:t>
+            </a:r>
+            <a:endParaRPr lang="en-US" sz="1600" dirty="0"/>
+          </a:p>
+        </p:txBody>
+      </p:sp>
+      <p:sp>
+        <p:nvSpPr>
+          <p:cNvPr id="11" name="Text 9"/>
+          <p:cNvSpPr/>
+          <p:nvPr/>
+        </p:nvSpPr>
+        <p:spPr>
+          <a:xfrm>
+            <a:off x="2886395" y="2697480"/>
+            <a:ext cx="1926275" cy="1737360"/>
+          </a:xfrm>
+          <a:prstGeom prst="rect">
+            <a:avLst/>
+          </a:prstGeom>
+          <a:noFill/>
+          <a:ln/>
+        </p:spPr>
+        <p:txBody>
+          <a:bodyPr wrap="square" lIns="0" tIns="0" rIns="0" bIns="0" rtlCol="0" anchor="t"/>
+          <a:lstStyle/>
+          <a:p>
+            <a:pPr indent="0" marL="0">
+              <a:buNone/>
+            </a:pPr>
+            <a:r>
+              <a:rPr lang="en-US" sz="1250" dirty="0">
+                <a:solidFill>
+                  <a:srgbClr val="374151"/>
+                </a:solidFill>
+                <a:latin typeface="Calibri" pitchFamily="34" charset="0"/>
+                <a:ea typeface="Calibri" pitchFamily="34" charset="-122"/>
+                <a:cs typeface="Calibri" pitchFamily="34" charset="-120"/>
+              </a:rPr>
+              <a:t>Prototyp mit KI-Unterstützung gebaut — lauffähig, aber am Ziel vorbei</a:t>
+            </a:r>
+            <a:endParaRPr lang="en-US" sz="1250" dirty="0"/>
+          </a:p>
+        </p:txBody>
+      </p:sp>
+      <p:sp>
+        <p:nvSpPr>
+          <p:cNvPr id="12" name="Shape 10"/>
+          <p:cNvSpPr/>
+          <p:nvPr/>
+        </p:nvSpPr>
+        <p:spPr>
+          <a:xfrm>
+            <a:off x="5132710" y="1737360"/>
+            <a:ext cx="384048" cy="384048"/>
+          </a:xfrm>
+          <a:prstGeom prst="ellipse">
+            <a:avLst/>
+          </a:prstGeom>
+          <a:solidFill>
+            <a:srgbClr val="E23E3E"/>
+          </a:solidFill>
+          <a:ln/>
+        </p:spPr>
+      </p:sp>
+      <p:sp>
+        <p:nvSpPr>
+          <p:cNvPr id="13" name="Text 11"/>
+          <p:cNvSpPr/>
+          <p:nvPr/>
+        </p:nvSpPr>
+        <p:spPr>
+          <a:xfrm>
+            <a:off x="5132710" y="1737360"/>
+            <a:ext cx="384048" cy="384048"/>
+          </a:xfrm>
+          <a:prstGeom prst="rect">
+            <a:avLst/>
+          </a:prstGeom>
+          <a:noFill/>
+          <a:ln/>
+        </p:spPr>
+        <p:txBody>
+          <a:bodyPr wrap="square" lIns="0" tIns="0" rIns="0" bIns="0" rtlCol="0" anchor="ctr"/>
+          <a:lstStyle/>
+          <a:p>
+            <a:pPr algn="ctr" indent="0" marL="0">
+              <a:buNone/>
+            </a:pPr>
+            <a:r>
+              <a:rPr lang="en-US" sz="1500" b="1" dirty="0">
+                <a:solidFill>
+                  <a:srgbClr val="FFFFFF"/>
+                </a:solidFill>
+                <a:latin typeface="Calibri" pitchFamily="34" charset="0"/>
+                <a:ea typeface="Calibri" pitchFamily="34" charset="-122"/>
+                <a:cs typeface="Calibri" pitchFamily="34" charset="-120"/>
+              </a:rPr>
+              <a:t>3</a:t>
+            </a:r>
+            <a:endParaRPr lang="en-US" sz="1500" dirty="0"/>
+          </a:p>
+        </p:txBody>
+      </p:sp>
+      <p:sp>
+        <p:nvSpPr>
+          <p:cNvPr id="14" name="Text 12"/>
+          <p:cNvSpPr/>
+          <p:nvPr/>
+        </p:nvSpPr>
+        <p:spPr>
+          <a:xfrm>
+            <a:off x="5132710" y="2286000"/>
+            <a:ext cx="1926275" cy="365760"/>
+          </a:xfrm>
+          <a:prstGeom prst="rect">
+            <a:avLst/>
+          </a:prstGeom>
+          <a:noFill/>
+          <a:ln/>
+        </p:spPr>
+        <p:txBody>
+          <a:bodyPr wrap="square" lIns="0" tIns="0" rIns="0" bIns="0" rtlCol="0" anchor="ctr"/>
+          <a:lstStyle/>
+          <a:p>
+            <a:pPr indent="0" marL="0">
+              <a:buNone/>
+            </a:pPr>
+            <a:r>
+              <a:rPr lang="en-US" sz="1600" b="1" dirty="0">
+                <a:solidFill>
+                  <a:srgbClr val="111827"/>
+                </a:solidFill>
+                <a:latin typeface="Calibri" pitchFamily="34" charset="0"/>
+                <a:ea typeface="Calibri" pitchFamily="34" charset="-122"/>
+                <a:cs typeface="Calibri" pitchFamily="34" charset="-120"/>
+              </a:rPr>
+              <a:t>Kurskorrektur</a:t>
+            </a:r>
+            <a:endParaRPr lang="en-US" sz="1600" dirty="0"/>
+          </a:p>
+        </p:txBody>
+      </p:sp>
+      <p:sp>
+        <p:nvSpPr>
+          <p:cNvPr id="15" name="Text 13"/>
+          <p:cNvSpPr/>
+          <p:nvPr/>
+        </p:nvSpPr>
+        <p:spPr>
+          <a:xfrm>
+            <a:off x="5132710" y="2697480"/>
+            <a:ext cx="1926275" cy="1737360"/>
+          </a:xfrm>
+          <a:prstGeom prst="rect">
+            <a:avLst/>
+          </a:prstGeom>
+          <a:noFill/>
+          <a:ln/>
+        </p:spPr>
+        <p:txBody>
+          <a:bodyPr wrap="square" lIns="0" tIns="0" rIns="0" bIns="0" rtlCol="0" anchor="t"/>
+          <a:lstStyle/>
+          <a:p>
+            <a:pPr indent="0" marL="0">
+              <a:buNone/>
+            </a:pPr>
+            <a:r>
+              <a:rPr lang="en-US" sz="1250" dirty="0">
+                <a:solidFill>
+                  <a:srgbClr val="374151"/>
+                </a:solidFill>
+                <a:latin typeface="Calibri" pitchFamily="34" charset="0"/>
+                <a:ea typeface="Calibri" pitchFamily="34" charset="-122"/>
+                <a:cs typeface="Calibri" pitchFamily="34" charset="-120"/>
+              </a:rPr>
+              <a:t>Architektur verworfen und auf Capacitor neu aufgesetzt</a:t>
+            </a:r>
+            <a:endParaRPr lang="en-US" sz="1250" dirty="0"/>
+          </a:p>
+        </p:txBody>
+      </p:sp>
+      <p:sp>
+        <p:nvSpPr>
+          <p:cNvPr id="16" name="Shape 14"/>
+          <p:cNvSpPr/>
+          <p:nvPr/>
+        </p:nvSpPr>
+        <p:spPr>
+          <a:xfrm>
+            <a:off x="7379025" y="1737360"/>
+            <a:ext cx="384048" cy="384048"/>
+          </a:xfrm>
+          <a:prstGeom prst="ellipse">
+            <a:avLst/>
+          </a:prstGeom>
+          <a:solidFill>
+            <a:srgbClr val="2F6FED"/>
+          </a:solidFill>
+          <a:ln/>
+        </p:spPr>
+      </p:sp>
+      <p:sp>
+        <p:nvSpPr>
+          <p:cNvPr id="17" name="Text 15"/>
+          <p:cNvSpPr/>
+          <p:nvPr/>
+        </p:nvSpPr>
+        <p:spPr>
+          <a:xfrm>
+            <a:off x="7379025" y="1737360"/>
+            <a:ext cx="384048" cy="384048"/>
+          </a:xfrm>
+          <a:prstGeom prst="rect">
+            <a:avLst/>
+          </a:prstGeom>
+          <a:noFill/>
+          <a:ln/>
+        </p:spPr>
+        <p:txBody>
+          <a:bodyPr wrap="square" lIns="0" tIns="0" rIns="0" bIns="0" rtlCol="0" anchor="ctr"/>
+          <a:lstStyle/>
+          <a:p>
+            <a:pPr algn="ctr" indent="0" marL="0">
+              <a:buNone/>
+            </a:pPr>
+            <a:r>
+              <a:rPr lang="en-US" sz="1500" b="1" dirty="0">
+                <a:solidFill>
+                  <a:srgbClr val="FFFFFF"/>
+                </a:solidFill>
+                <a:latin typeface="Calibri" pitchFamily="34" charset="0"/>
+                <a:ea typeface="Calibri" pitchFamily="34" charset="-122"/>
+                <a:cs typeface="Calibri" pitchFamily="34" charset="-120"/>
+              </a:rPr>
+              <a:t>4</a:t>
+            </a:r>
+            <a:endParaRPr lang="en-US" sz="1500" dirty="0"/>
+          </a:p>
+        </p:txBody>
+      </p:sp>
+      <p:sp>
+        <p:nvSpPr>
+          <p:cNvPr id="18" name="Text 16"/>
+          <p:cNvSpPr/>
+          <p:nvPr/>
+        </p:nvSpPr>
+        <p:spPr>
+          <a:xfrm>
+            <a:off x="7379025" y="2286000"/>
+            <a:ext cx="1926275" cy="365760"/>
+          </a:xfrm>
+          <a:prstGeom prst="rect">
+            <a:avLst/>
+          </a:prstGeom>
+          <a:noFill/>
+          <a:ln/>
+        </p:spPr>
+        <p:txBody>
+          <a:bodyPr wrap="square" lIns="0" tIns="0" rIns="0" bIns="0" rtlCol="0" anchor="ctr"/>
+          <a:lstStyle/>
+          <a:p>
+            <a:pPr indent="0" marL="0">
+              <a:buNone/>
+            </a:pPr>
+            <a:r>
+              <a:rPr lang="en-US" sz="1600" b="1" dirty="0">
+                <a:solidFill>
+                  <a:srgbClr val="111827"/>
+                </a:solidFill>
+                <a:latin typeface="Calibri" pitchFamily="34" charset="0"/>
+                <a:ea typeface="Calibri" pitchFamily="34" charset="-122"/>
+                <a:cs typeface="Calibri" pitchFamily="34" charset="-120"/>
+              </a:rPr>
+              <a:t>Umsetzung</a:t>
+            </a:r>
+            <a:endParaRPr lang="en-US" sz="1600" dirty="0"/>
+          </a:p>
+        </p:txBody>
+      </p:sp>
+      <p:sp>
+        <p:nvSpPr>
+          <p:cNvPr id="19" name="Text 17"/>
+          <p:cNvSpPr/>
+          <p:nvPr/>
+        </p:nvSpPr>
+        <p:spPr>
+          <a:xfrm>
+            <a:off x="7379025" y="2697480"/>
+            <a:ext cx="1926275" cy="1737360"/>
+          </a:xfrm>
+          <a:prstGeom prst="rect">
+            <a:avLst/>
+          </a:prstGeom>
+          <a:noFill/>
+          <a:ln/>
+        </p:spPr>
+        <p:txBody>
+          <a:bodyPr wrap="square" lIns="0" tIns="0" rIns="0" bIns="0" rtlCol="0" anchor="t"/>
+          <a:lstStyle/>
+          <a:p>
+            <a:pPr indent="0" marL="0">
+              <a:buNone/>
+            </a:pPr>
+            <a:r>
+              <a:rPr lang="en-US" sz="1250" dirty="0">
+                <a:solidFill>
+                  <a:srgbClr val="374151"/>
+                </a:solidFill>
+                <a:latin typeface="Calibri" pitchFamily="34" charset="0"/>
+                <a:ea typeface="Calibri" pitchFamily="34" charset="-122"/>
+                <a:cs typeface="Calibri" pitchFamily="34" charset="-120"/>
+              </a:rPr>
+              <a:t>Aufnahme, Wiedergabe, Dateiverwaltung und Oberfläche gebaut</a:t>
+            </a:r>
+            <a:endParaRPr lang="en-US" sz="1250" dirty="0"/>
+          </a:p>
+        </p:txBody>
+      </p:sp>
+      <p:sp>
+        <p:nvSpPr>
+          <p:cNvPr id="20" name="Shape 18"/>
+          <p:cNvSpPr/>
+          <p:nvPr/>
+        </p:nvSpPr>
+        <p:spPr>
+          <a:xfrm>
+            <a:off x="9625340" y="1737360"/>
+            <a:ext cx="384048" cy="384048"/>
+          </a:xfrm>
+          <a:prstGeom prst="ellipse">
+            <a:avLst/>
+          </a:prstGeom>
+          <a:solidFill>
+            <a:srgbClr val="2F6FED"/>
+          </a:solidFill>
+          <a:ln/>
+        </p:spPr>
+      </p:sp>
+      <p:sp>
+        <p:nvSpPr>
+          <p:cNvPr id="21" name="Text 19"/>
+          <p:cNvSpPr/>
+          <p:nvPr/>
+        </p:nvSpPr>
+        <p:spPr>
+          <a:xfrm>
+            <a:off x="9625340" y="1737360"/>
+            <a:ext cx="384048" cy="384048"/>
+          </a:xfrm>
+          <a:prstGeom prst="rect">
+            <a:avLst/>
+          </a:prstGeom>
+          <a:noFill/>
+          <a:ln/>
+        </p:spPr>
+        <p:txBody>
+          <a:bodyPr wrap="square" lIns="0" tIns="0" rIns="0" bIns="0" rtlCol="0" anchor="ctr"/>
+          <a:lstStyle/>
+          <a:p>
+            <a:pPr algn="ctr" indent="0" marL="0">
+              <a:buNone/>
+            </a:pPr>
+            <a:r>
+              <a:rPr lang="en-US" sz="1500" b="1" dirty="0">
+                <a:solidFill>
+                  <a:srgbClr val="FFFFFF"/>
+                </a:solidFill>
+                <a:latin typeface="Calibri" pitchFamily="34" charset="0"/>
+                <a:ea typeface="Calibri" pitchFamily="34" charset="-122"/>
+                <a:cs typeface="Calibri" pitchFamily="34" charset="-120"/>
+              </a:rPr>
+              <a:t>5</a:t>
+            </a:r>
+            <a:endParaRPr lang="en-US" sz="1500" dirty="0"/>
+          </a:p>
+        </p:txBody>
+      </p:sp>
+      <p:sp>
+        <p:nvSpPr>
+          <p:cNvPr id="22" name="Text 20"/>
+          <p:cNvSpPr/>
+          <p:nvPr/>
+        </p:nvSpPr>
+        <p:spPr>
+          <a:xfrm>
+            <a:off x="9625340" y="2286000"/>
+            <a:ext cx="1926275" cy="365760"/>
+          </a:xfrm>
+          <a:prstGeom prst="rect">
+            <a:avLst/>
+          </a:prstGeom>
+          <a:noFill/>
+          <a:ln/>
+        </p:spPr>
+        <p:txBody>
+          <a:bodyPr wrap="square" lIns="0" tIns="0" rIns="0" bIns="0" rtlCol="0" anchor="ctr"/>
+          <a:lstStyle/>
+          <a:p>
+            <a:pPr indent="0" marL="0">
+              <a:buNone/>
+            </a:pPr>
+            <a:r>
+              <a:rPr lang="en-US" sz="1600" b="1" dirty="0">
+                <a:solidFill>
+                  <a:srgbClr val="111827"/>
+                </a:solidFill>
+                <a:latin typeface="Calibri" pitchFamily="34" charset="0"/>
+                <a:ea typeface="Calibri" pitchFamily="34" charset="-122"/>
+                <a:cs typeface="Calibri" pitchFamily="34" charset="-120"/>
+              </a:rPr>
+              <a:t>Absicherung</a:t>
+            </a:r>
+            <a:endParaRPr lang="en-US" sz="1600" dirty="0"/>
+          </a:p>
+        </p:txBody>
+      </p:sp>
+      <p:sp>
+        <p:nvSpPr>
+          <p:cNvPr id="23" name="Text 21"/>
+          <p:cNvSpPr/>
+          <p:nvPr/>
+        </p:nvSpPr>
+        <p:spPr>
+          <a:xfrm>
+            <a:off x="9625340" y="2697480"/>
+            <a:ext cx="1926275" cy="1737360"/>
+          </a:xfrm>
+          <a:prstGeom prst="rect">
+            <a:avLst/>
+          </a:prstGeom>
+          <a:noFill/>
+          <a:ln/>
+        </p:spPr>
+        <p:txBody>
+          <a:bodyPr wrap="square" lIns="0" tIns="0" rIns="0" bIns="0" rtlCol="0" anchor="t"/>
+          <a:lstStyle/>
+          <a:p>
+            <a:pPr indent="0" marL="0">
+              <a:buNone/>
+            </a:pPr>
+            <a:r>
+              <a:rPr lang="en-US" sz="1250" dirty="0">
+                <a:solidFill>
+                  <a:srgbClr val="374151"/>
+                </a:solidFill>
+                <a:latin typeface="Calibri" pitchFamily="34" charset="0"/>
+                <a:ea typeface="Calibri" pitchFamily="34" charset="-122"/>
+                <a:cs typeface="Calibri" pitchFamily="34" charset="-120"/>
+              </a:rPr>
+              <a:t>Build geprüft, Repository bereinigt, auf Gerät getestet</a:t>
+            </a:r>
+            <a:endParaRPr lang="en-US" sz="1250" dirty="0"/>
+          </a:p>
+        </p:txBody>
+      </p:sp>
+      <p:sp>
+        <p:nvSpPr>
+          <p:cNvPr id="24" name="Shape 22"/>
+          <p:cNvSpPr/>
+          <p:nvPr/>
+        </p:nvSpPr>
+        <p:spPr>
+          <a:xfrm>
+            <a:off x="640080" y="4754880"/>
+            <a:ext cx="10911535" cy="1234440"/>
           </a:xfrm>
           <a:prstGeom prst="roundRect">
             <a:avLst>
-              <a:gd name="adj" fmla="val 2286"/>
+              <a:gd name="adj" fmla="val 5926"/>
             </a:avLst>
           </a:prstGeom>
           <a:solidFill>
@@ -7693,14 +10283,14 @@
       </p:sp>
       <p:sp>
         <p:nvSpPr>
-          <p:cNvPr id="5" name="Text 3"/>
-          <p:cNvSpPr/>
-          <p:nvPr/>
-        </p:nvSpPr>
-        <p:spPr>
-          <a:xfrm>
-            <a:off x="960120" y="1783080"/>
-            <a:ext cx="4587088" cy="320040"/>
+          <p:cNvPr id="25" name="Text 23"/>
+          <p:cNvSpPr/>
+          <p:nvPr/>
+        </p:nvSpPr>
+        <p:spPr>
+          <a:xfrm>
+            <a:off x="1005840" y="4983480"/>
+            <a:ext cx="10180015" cy="777240"/>
           </a:xfrm>
           <a:prstGeom prst="rect">
             <a:avLst/>
@@ -7716,329 +10306,17 @@
               <a:buNone/>
             </a:pPr>
             <a:r>
-              <a:rPr lang="en-US" sz="1500" b="1" dirty="0">
-                <a:solidFill>
-                  <a:srgbClr val="E23E3E"/>
-                </a:solidFill>
-                <a:latin typeface="Calibri" pitchFamily="34" charset="0"/>
-                <a:ea typeface="Calibri" pitchFamily="34" charset="-122"/>
-                <a:cs typeface="Calibri" pitchFamily="34" charset="-120"/>
-              </a:rPr>
-              <a:t>Was wir hatten</a:t>
+              <a:rPr lang="en-US" sz="1500" i="1" dirty="0">
+                <a:solidFill>
+                  <a:srgbClr val="111827"/>
+                </a:solidFill>
+                <a:latin typeface="Calibri" pitchFamily="34" charset="0"/>
+                <a:ea typeface="Calibri" pitchFamily="34" charset="-122"/>
+                <a:cs typeface="Calibri" pitchFamily="34" charset="-120"/>
+              </a:rPr>
+              <a:t>Der Bruch in Schritt 3 hat uns Zeit gekostet — und war der lehrreichste Teil des Projekts.</a:t>
             </a:r>
             <a:endParaRPr lang="en-US" sz="1500" dirty="0"/>
-          </a:p>
-        </p:txBody>
-      </p:sp>
-      <p:sp>
-        <p:nvSpPr>
-          <p:cNvPr id="6" name="Text 4"/>
-          <p:cNvSpPr/>
-          <p:nvPr/>
-        </p:nvSpPr>
-        <p:spPr>
-          <a:xfrm>
-            <a:off x="960120" y="2194560"/>
-            <a:ext cx="4587088" cy="2286000"/>
-          </a:xfrm>
-          <a:prstGeom prst="rect">
-            <a:avLst/>
-          </a:prstGeom>
-          <a:noFill/>
-          <a:ln/>
-        </p:spPr>
-        <p:txBody>
-          <a:bodyPr wrap="square" lIns="0" tIns="0" rIns="0" bIns="0" rtlCol="0" anchor="t"/>
-          <a:lstStyle/>
-          <a:p>
-            <a:pPr marL="342900" indent="-342900">
-              <a:spcAft>
-                <a:spcPts val="900"/>
-              </a:spcAft>
-              <a:buSzPct val="100000"/>
-              <a:buChar char="•"/>
-            </a:pPr>
-            <a:r>
-              <a:rPr lang="en-US" sz="1350" dirty="0">
-                <a:solidFill>
-                  <a:srgbClr val="374151"/>
-                </a:solidFill>
-                <a:latin typeface="Calibri" pitchFamily="34" charset="0"/>
-                <a:ea typeface="Calibri" pitchFamily="34" charset="-122"/>
-                <a:cs typeface="Calibri" pitchFamily="34" charset="-120"/>
-              </a:rPr>
-              <a:t>Eine native Android-App in Kotlin</a:t>
-            </a:r>
-            <a:endParaRPr lang="en-US" sz="1350" dirty="0"/>
-          </a:p>
-          <a:p>
-            <a:pPr marL="342900" indent="-342900">
-              <a:spcAft>
-                <a:spcPts val="900"/>
-              </a:spcAft>
-              <a:buSzPct val="100000"/>
-              <a:buChar char="•"/>
-            </a:pPr>
-            <a:r>
-              <a:rPr lang="en-US" sz="1350" dirty="0">
-                <a:solidFill>
-                  <a:srgbClr val="374151"/>
-                </a:solidFill>
-                <a:latin typeface="Calibri" pitchFamily="34" charset="0"/>
-                <a:ea typeface="Calibri" pitchFamily="34" charset="-122"/>
-                <a:cs typeface="Calibri" pitchFamily="34" charset="-120"/>
-              </a:rPr>
-              <a:t>Alle elf Anforderungen sichtbar erfüllt</a:t>
-            </a:r>
-            <a:endParaRPr lang="en-US" sz="1350" dirty="0"/>
-          </a:p>
-          <a:p>
-            <a:pPr marL="342900" indent="-342900">
-              <a:spcAft>
-                <a:spcPts val="900"/>
-              </a:spcAft>
-              <a:buSzPct val="100000"/>
-              <a:buChar char="•"/>
-            </a:pPr>
-            <a:r>
-              <a:rPr lang="en-US" sz="1350" dirty="0">
-                <a:solidFill>
-                  <a:srgbClr val="374151"/>
-                </a:solidFill>
-                <a:latin typeface="Calibri" pitchFamily="34" charset="0"/>
-                <a:ea typeface="Calibri" pitchFamily="34" charset="-122"/>
-                <a:cs typeface="Calibri" pitchFamily="34" charset="-120"/>
-              </a:rPr>
-              <a:t>Lief einwandfrei auf dem Gerät</a:t>
-            </a:r>
-            <a:endParaRPr lang="en-US" sz="1350" dirty="0"/>
-          </a:p>
-          <a:p>
-            <a:pPr marL="342900" indent="-342900">
-              <a:spcAft>
-                <a:spcPts val="900"/>
-              </a:spcAft>
-              <a:buSzPct val="100000"/>
-              <a:buChar char="•"/>
-            </a:pPr>
-            <a:r>
-              <a:rPr lang="en-US" sz="1350" dirty="0">
-                <a:solidFill>
-                  <a:srgbClr val="374151"/>
-                </a:solidFill>
-                <a:latin typeface="Calibri" pitchFamily="34" charset="0"/>
-                <a:ea typeface="Calibri" pitchFamily="34" charset="-122"/>
-                <a:cs typeface="Calibri" pitchFamily="34" charset="-120"/>
-              </a:rPr>
-              <a:t>Die Plugins waren nachgebaut statt eingebunden</a:t>
-            </a:r>
-            <a:endParaRPr lang="en-US" sz="1350" dirty="0"/>
-          </a:p>
-        </p:txBody>
-      </p:sp>
-      <p:sp>
-        <p:nvSpPr>
-          <p:cNvPr id="7" name="Shape 5"/>
-          <p:cNvSpPr/>
-          <p:nvPr/>
-        </p:nvSpPr>
-        <p:spPr>
-          <a:xfrm>
-            <a:off x="6324448" y="1554480"/>
-            <a:ext cx="5227168" cy="3200400"/>
-          </a:xfrm>
-          <a:prstGeom prst="roundRect">
-            <a:avLst>
-              <a:gd name="adj" fmla="val 2286"/>
-            </a:avLst>
-          </a:prstGeom>
-          <a:solidFill>
-            <a:srgbClr val="0F1419"/>
-          </a:solidFill>
-          <a:ln/>
-        </p:spPr>
-      </p:sp>
-      <p:sp>
-        <p:nvSpPr>
-          <p:cNvPr id="8" name="Text 6"/>
-          <p:cNvSpPr/>
-          <p:nvPr/>
-        </p:nvSpPr>
-        <p:spPr>
-          <a:xfrm>
-            <a:off x="6644488" y="1783080"/>
-            <a:ext cx="4587088" cy="320040"/>
-          </a:xfrm>
-          <a:prstGeom prst="rect">
-            <a:avLst/>
-          </a:prstGeom>
-          <a:noFill/>
-          <a:ln/>
-        </p:spPr>
-        <p:txBody>
-          <a:bodyPr wrap="square" lIns="0" tIns="0" rIns="0" bIns="0" rtlCol="0" anchor="ctr"/>
-          <a:lstStyle/>
-          <a:p>
-            <a:pPr indent="0" marL="0">
-              <a:buNone/>
-            </a:pPr>
-            <a:r>
-              <a:rPr lang="en-US" sz="1500" b="1" dirty="0">
-                <a:solidFill>
-                  <a:srgbClr val="FFFFFF"/>
-                </a:solidFill>
-                <a:latin typeface="Calibri" pitchFamily="34" charset="0"/>
-                <a:ea typeface="Calibri" pitchFamily="34" charset="-122"/>
-                <a:cs typeface="Calibri" pitchFamily="34" charset="-120"/>
-              </a:rPr>
-              <a:t>Was gefordert war</a:t>
-            </a:r>
-            <a:endParaRPr lang="en-US" sz="1500" dirty="0"/>
-          </a:p>
-        </p:txBody>
-      </p:sp>
-      <p:sp>
-        <p:nvSpPr>
-          <p:cNvPr id="9" name="Text 7"/>
-          <p:cNvSpPr/>
-          <p:nvPr/>
-        </p:nvSpPr>
-        <p:spPr>
-          <a:xfrm>
-            <a:off x="6644488" y="2194560"/>
-            <a:ext cx="4587088" cy="2286000"/>
-          </a:xfrm>
-          <a:prstGeom prst="rect">
-            <a:avLst/>
-          </a:prstGeom>
-          <a:noFill/>
-          <a:ln/>
-        </p:spPr>
-        <p:txBody>
-          <a:bodyPr wrap="square" lIns="0" tIns="0" rIns="0" bIns="0" rtlCol="0" anchor="t"/>
-          <a:lstStyle/>
-          <a:p>
-            <a:pPr marL="342900" indent="-342900">
-              <a:spcAft>
-                <a:spcPts val="900"/>
-              </a:spcAft>
-              <a:buSzPct val="100000"/>
-              <a:buChar char="•"/>
-            </a:pPr>
-            <a:r>
-              <a:rPr lang="en-US" sz="1350" dirty="0">
-                <a:solidFill>
-                  <a:srgbClr val="E5E7EB"/>
-                </a:solidFill>
-                <a:latin typeface="Calibri" pitchFamily="34" charset="0"/>
-                <a:ea typeface="Calibri" pitchFamily="34" charset="-122"/>
-                <a:cs typeface="Calibri" pitchFamily="34" charset="-120"/>
-              </a:rPr>
-              <a:t>Eine hybride App mit Ionic Capacitor</a:t>
-            </a:r>
-            <a:endParaRPr lang="en-US" sz="1350" dirty="0"/>
-          </a:p>
-          <a:p>
-            <a:pPr marL="342900" indent="-342900">
-              <a:spcAft>
-                <a:spcPts val="900"/>
-              </a:spcAft>
-              <a:buSzPct val="100000"/>
-              <a:buChar char="•"/>
-            </a:pPr>
-            <a:r>
-              <a:rPr lang="en-US" sz="1350" dirty="0">
-                <a:solidFill>
-                  <a:srgbClr val="E5E7EB"/>
-                </a:solidFill>
-                <a:latin typeface="Calibri" pitchFamily="34" charset="0"/>
-                <a:ea typeface="Calibri" pitchFamily="34" charset="-122"/>
-                <a:cs typeface="Calibri" pitchFamily="34" charset="-120"/>
-              </a:rPr>
-              <a:t>Die fünf genannten Plugins im Einsatz</a:t>
-            </a:r>
-            <a:endParaRPr lang="en-US" sz="1350" dirty="0"/>
-          </a:p>
-          <a:p>
-            <a:pPr marL="342900" indent="-342900">
-              <a:spcAft>
-                <a:spcPts val="900"/>
-              </a:spcAft>
-              <a:buSzPct val="100000"/>
-              <a:buChar char="•"/>
-            </a:pPr>
-            <a:r>
-              <a:rPr lang="en-US" sz="1350" dirty="0">
-                <a:solidFill>
-                  <a:srgbClr val="E5E7EB"/>
-                </a:solidFill>
-                <a:latin typeface="Calibri" pitchFamily="34" charset="0"/>
-                <a:ea typeface="Calibri" pitchFamily="34" charset="-122"/>
-                <a:cs typeface="Calibri" pitchFamily="34" charset="-120"/>
-              </a:rPr>
-              <a:t>Modul heißt „Hybride App-Entwicklung"</a:t>
-            </a:r>
-            <a:endParaRPr lang="en-US" sz="1350" dirty="0"/>
-          </a:p>
-          <a:p>
-            <a:pPr marL="342900" indent="-342900">
-              <a:spcAft>
-                <a:spcPts val="900"/>
-              </a:spcAft>
-              <a:buSzPct val="100000"/>
-              <a:buChar char="•"/>
-            </a:pPr>
-            <a:r>
-              <a:rPr lang="en-US" sz="1350" dirty="0">
-                <a:solidFill>
-                  <a:srgbClr val="E5E7EB"/>
-                </a:solidFill>
-                <a:latin typeface="Calibri" pitchFamily="34" charset="0"/>
-                <a:ea typeface="Calibri" pitchFamily="34" charset="-122"/>
-                <a:cs typeface="Calibri" pitchFamily="34" charset="-120"/>
-              </a:rPr>
-              <a:t>Die Lizenzschlüssel ergeben nur mit den echten Plugins Sinn</a:t>
-            </a:r>
-            <a:endParaRPr lang="en-US" sz="1350" dirty="0"/>
-          </a:p>
-        </p:txBody>
-      </p:sp>
-      <p:sp>
-        <p:nvSpPr>
-          <p:cNvPr id="10" name="Text 8"/>
-          <p:cNvSpPr/>
-          <p:nvPr/>
-        </p:nvSpPr>
-        <p:spPr>
-          <a:xfrm>
-            <a:off x="640080" y="5029200"/>
-            <a:ext cx="10911535" cy="822960"/>
-          </a:xfrm>
-          <a:prstGeom prst="rect">
-            <a:avLst/>
-          </a:prstGeom>
-          <a:noFill/>
-          <a:ln/>
-        </p:spPr>
-        <p:txBody>
-          <a:bodyPr wrap="square" lIns="0" tIns="0" rIns="0" bIns="0" rtlCol="0" anchor="ctr"/>
-          <a:lstStyle/>
-          <a:p>
-            <a:pPr indent="0" marL="0">
-              <a:buNone/>
-            </a:pPr>
-            <a:r>
-              <a:rPr lang="en-US" sz="1900" i="1" dirty="0">
-                <a:solidFill>
-                  <a:srgbClr val="111827"/>
-                </a:solidFill>
-                <a:latin typeface="Cambria" pitchFamily="34" charset="0"/>
-                <a:ea typeface="Cambria" pitchFamily="34" charset="-122"/>
-                <a:cs typeface="Cambria" pitchFamily="34" charset="-120"/>
-              </a:rPr>
-              <a:t>Eine App, die tut was sie soll, kann die Aufgabe trotzdem verfehlen. „Funktioniert" ist kein Abnahmekriterium.</a:t>
-            </a:r>
-            <a:endParaRPr lang="en-US" sz="1900" dirty="0"/>
           </a:p>
         </p:txBody>
       </p:sp>
@@ -8127,7 +10405,7 @@
                 <a:ea typeface="Cambria" pitchFamily="34" charset="-122"/>
                 <a:cs typeface="Cambria" pitchFamily="34" charset="-120"/>
               </a:rPr>
-              <a:t>Problem 2: Die Werkzeugkette</a:t>
+              <a:t>KI-Agenten als Werkzeug</a:t>
             </a:r>
             <a:endParaRPr lang="en-US" sz="3200" dirty="0"/>
           </a:p>
@@ -8166,7 +10444,7 @@
                 <a:ea typeface="Calibri" pitchFamily="34" charset="-122"/>
                 <a:cs typeface="Calibri" pitchFamily="34" charset="-120"/>
               </a:rPr>
-              <a:t>Zwei Blocker, die nichts mit unserem Code zu tun hatten</a:t>
+              <a:t>Claude und Gemini haben wir durchgehend eingesetzt — mit klaren Stärken und Grenzen</a:t>
             </a:r>
             <a:endParaRPr lang="en-US" sz="1400" dirty="0"/>
           </a:p>
@@ -8180,12 +10458,12 @@
         </p:nvSpPr>
         <p:spPr>
           <a:xfrm>
-            <a:off x="640080" y="1645920"/>
-            <a:ext cx="5227168" cy="4023360"/>
+            <a:off x="640080" y="1600200"/>
+            <a:ext cx="5227168" cy="2286000"/>
           </a:xfrm>
           <a:prstGeom prst="roundRect">
             <a:avLst>
-              <a:gd name="adj" fmla="val 1818"/>
+              <a:gd name="adj" fmla="val 3200"/>
             </a:avLst>
           </a:prstGeom>
           <a:solidFill>
@@ -8196,23 +10474,42 @@
       </p:sp>
       <p:sp>
         <p:nvSpPr>
-          <p:cNvPr id="6" name="Shape 4"/>
-          <p:cNvSpPr/>
-          <p:nvPr/>
-        </p:nvSpPr>
-        <p:spPr>
-          <a:xfrm>
-            <a:off x="960120" y="1874520"/>
-            <a:ext cx="384048" cy="384048"/>
-          </a:xfrm>
-          <a:prstGeom prst="ellipse">
-            <a:avLst/>
-          </a:prstGeom>
-          <a:solidFill>
-            <a:srgbClr val="2F6FED"/>
-          </a:solidFill>
-          <a:ln/>
-        </p:spPr>
+          <p:cNvPr id="6" name="Text 4"/>
+          <p:cNvSpPr/>
+          <p:nvPr/>
+        </p:nvSpPr>
+        <p:spPr>
+          <a:xfrm>
+            <a:off x="960120" y="1810512"/>
+            <a:ext cx="4587088" cy="320040"/>
+          </a:xfrm>
+          <a:prstGeom prst="rect">
+            <a:avLst/>
+          </a:prstGeom>
+          <a:noFill/>
+          <a:ln/>
+        </p:spPr>
+        <p:txBody>
+          <a:bodyPr wrap="square" lIns="0" tIns="0" rIns="0" bIns="0" rtlCol="0" anchor="ctr"/>
+          <a:lstStyle/>
+          <a:p>
+            <a:pPr indent="0" marL="0">
+              <a:buNone/>
+            </a:pPr>
+            <a:r>
+              <a:rPr lang="en-US" sz="1500" b="1" dirty="0">
+                <a:solidFill>
+                  <a:srgbClr val="111827"/>
+                </a:solidFill>
+                <a:latin typeface="Calibri" pitchFamily="34" charset="0"/>
+                <a:ea typeface="Calibri" pitchFamily="34" charset="-122"/>
+                <a:cs typeface="Calibri" pitchFamily="34" charset="-120"/>
+              </a:rPr>
+              <a:t>Wobei es gut funktioniert hat</a:t>
+            </a:r>
+            <a:endParaRPr lang="en-US" sz="1500" dirty="0"/>
+          </a:p>
+        </p:txBody>
       </p:sp>
       <p:sp>
         <p:nvSpPr>
@@ -8222,86 +10519,8 @@
         </p:nvSpPr>
         <p:spPr>
           <a:xfrm>
-            <a:off x="960120" y="1874520"/>
-            <a:ext cx="384048" cy="384048"/>
-          </a:xfrm>
-          <a:prstGeom prst="rect">
-            <a:avLst/>
-          </a:prstGeom>
-          <a:noFill/>
-          <a:ln/>
-        </p:spPr>
-        <p:txBody>
-          <a:bodyPr wrap="square" lIns="0" tIns="0" rIns="0" bIns="0" rtlCol="0" anchor="ctr"/>
-          <a:lstStyle/>
-          <a:p>
-            <a:pPr algn="ctr" indent="0" marL="0">
-              <a:buNone/>
-            </a:pPr>
-            <a:r>
-              <a:rPr lang="en-US" sz="1500" b="1" dirty="0">
-                <a:solidFill>
-                  <a:srgbClr val="FFFFFF"/>
-                </a:solidFill>
-                <a:latin typeface="Calibri" pitchFamily="34" charset="0"/>
-                <a:ea typeface="Calibri" pitchFamily="34" charset="-122"/>
-                <a:cs typeface="Calibri" pitchFamily="34" charset="-120"/>
-              </a:rPr>
-              <a:t>1</a:t>
-            </a:r>
-            <a:endParaRPr lang="en-US" sz="1500" dirty="0"/>
-          </a:p>
-        </p:txBody>
-      </p:sp>
-      <p:sp>
-        <p:nvSpPr>
-          <p:cNvPr id="8" name="Text 6"/>
-          <p:cNvSpPr/>
-          <p:nvPr/>
-        </p:nvSpPr>
-        <p:spPr>
-          <a:xfrm>
-            <a:off x="1463040" y="1874520"/>
-            <a:ext cx="4084168" cy="411480"/>
-          </a:xfrm>
-          <a:prstGeom prst="rect">
-            <a:avLst/>
-          </a:prstGeom>
-          <a:noFill/>
-          <a:ln/>
-        </p:spPr>
-        <p:txBody>
-          <a:bodyPr wrap="square" lIns="0" tIns="0" rIns="0" bIns="0" rtlCol="0" anchor="ctr"/>
-          <a:lstStyle/>
-          <a:p>
-            <a:pPr indent="0" marL="0">
-              <a:buNone/>
-            </a:pPr>
-            <a:r>
-              <a:rPr lang="en-US" sz="1500" b="1" dirty="0">
-                <a:solidFill>
-                  <a:srgbClr val="111827"/>
-                </a:solidFill>
-                <a:latin typeface="Calibri" pitchFamily="34" charset="0"/>
-                <a:ea typeface="Calibri" pitchFamily="34" charset="-122"/>
-                <a:cs typeface="Calibri" pitchFamily="34" charset="-120"/>
-              </a:rPr>
-              <a:t>Die Bezugsquelle war umgezogen</a:t>
-            </a:r>
-            <a:endParaRPr lang="en-US" sz="1500" dirty="0"/>
-          </a:p>
-        </p:txBody>
-      </p:sp>
-      <p:sp>
-        <p:nvSpPr>
-          <p:cNvPr id="9" name="Text 7"/>
-          <p:cNvSpPr/>
-          <p:nvPr/>
-        </p:nvSpPr>
-        <p:spPr>
-          <a:xfrm>
-            <a:off x="960120" y="2423160"/>
-            <a:ext cx="4587088" cy="3017520"/>
+            <a:off x="960120" y="2212848"/>
+            <a:ext cx="4587088" cy="1554480"/>
           </a:xfrm>
           <a:prstGeom prst="rect">
             <a:avLst/>
@@ -8313,11 +10532,15 @@
           <a:bodyPr wrap="square" lIns="0" tIns="0" rIns="0" bIns="0" rtlCol="0" anchor="t"/>
           <a:lstStyle/>
           <a:p>
-            <a:pPr indent="0" marL="0">
-              <a:buNone/>
-            </a:pPr>
-            <a:r>
-              <a:rPr lang="en-US" sz="1300" dirty="0">
+            <a:pPr marL="342900" indent="-342900">
+              <a:spcAft>
+                <a:spcPts val="700"/>
+              </a:spcAft>
+              <a:buSzPct val="100000"/>
+              <a:buChar char="•"/>
+            </a:pPr>
+            <a:r>
+              <a:rPr lang="en-US" sz="1250" dirty="0">
                 <a:solidFill>
                   <a:srgbClr val="374151"/>
                 </a:solidFill>
@@ -8325,22 +10548,20 @@
                 <a:ea typeface="Calibri" pitchFamily="34" charset="-122"/>
                 <a:cs typeface="Calibri" pitchFamily="34" charset="-120"/>
               </a:rPr>
-              <a:t>Die beiden kostenpflichtigen Plugins liegen in einer privaten Paketquelle. Die im Kurs hinterlegte Adresse existierte nicht mehr — sie zeigte auf eine geparkte Domain mit abgelaufenem Zertifikat.</a:t>
-            </a:r>
-            <a:endParaRPr lang="en-US" sz="1300" dirty="0"/>
-          </a:p>
-          <a:p>
-            <a:pPr indent="0" marL="0">
-              <a:buNone/>
-            </a:pPr>
-            <a:endParaRPr lang="en-US" sz="1300" dirty="0"/>
-          </a:p>
-          <a:p>
-            <a:pPr indent="0" marL="0">
-              <a:buNone/>
-            </a:pPr>
-            <a:r>
-              <a:rPr lang="en-US" sz="1300" dirty="0">
+              <a:t>Überblick über eine unbekannte Dateistruktur gewinnen</a:t>
+            </a:r>
+            <a:endParaRPr lang="en-US" sz="1250" dirty="0"/>
+          </a:p>
+          <a:p>
+            <a:pPr marL="342900" indent="-342900">
+              <a:spcAft>
+                <a:spcPts val="700"/>
+              </a:spcAft>
+              <a:buSzPct val="100000"/>
+              <a:buChar char="•"/>
+            </a:pPr>
+            <a:r>
+              <a:rPr lang="en-US" sz="1250" dirty="0">
                 <a:solidFill>
                   <a:srgbClr val="374151"/>
                 </a:solidFill>
@@ -8348,26 +10569,68 @@
                 <a:ea typeface="Calibri" pitchFamily="34" charset="-122"/>
                 <a:cs typeface="Calibri" pitchFamily="34" charset="-120"/>
               </a:rPr>
-              <a:t>Die Fehlermeldung sprach von einem Zertifikatsproblem und legte damit eine völlig falsche Fährte. Die Lösung war eine neue Adresse, zu finden in der aktuellen Dokumentation des Anbieters.</a:t>
-            </a:r>
-            <a:endParaRPr lang="en-US" sz="1300" dirty="0"/>
-          </a:p>
-        </p:txBody>
-      </p:sp>
-      <p:sp>
-        <p:nvSpPr>
-          <p:cNvPr id="10" name="Shape 8"/>
-          <p:cNvSpPr/>
-          <p:nvPr/>
-        </p:nvSpPr>
-        <p:spPr>
-          <a:xfrm>
-            <a:off x="6324448" y="1645920"/>
-            <a:ext cx="5227168" cy="4023360"/>
+              <a:t>Plugin-Dokumentation zusammenfassen und einordnen</a:t>
+            </a:r>
+            <a:endParaRPr lang="en-US" sz="1250" dirty="0"/>
+          </a:p>
+          <a:p>
+            <a:pPr marL="342900" indent="-342900">
+              <a:spcAft>
+                <a:spcPts val="700"/>
+              </a:spcAft>
+              <a:buSzPct val="100000"/>
+              <a:buChar char="•"/>
+            </a:pPr>
+            <a:r>
+              <a:rPr lang="en-US" sz="1250" dirty="0">
+                <a:solidFill>
+                  <a:srgbClr val="374151"/>
+                </a:solidFill>
+                <a:latin typeface="Calibri" pitchFamily="34" charset="0"/>
+                <a:ea typeface="Calibri" pitchFamily="34" charset="-122"/>
+                <a:cs typeface="Calibri" pitchFamily="34" charset="-120"/>
+              </a:rPr>
+              <a:t>Fehlermeldungen einordnen, die nichts über die Ursache verraten</a:t>
+            </a:r>
+            <a:endParaRPr lang="en-US" sz="1250" dirty="0"/>
+          </a:p>
+          <a:p>
+            <a:pPr marL="342900" indent="-342900">
+              <a:spcAft>
+                <a:spcPts val="700"/>
+              </a:spcAft>
+              <a:buSzPct val="100000"/>
+              <a:buChar char="•"/>
+            </a:pPr>
+            <a:r>
+              <a:rPr lang="en-US" sz="1250" dirty="0">
+                <a:solidFill>
+                  <a:srgbClr val="374151"/>
+                </a:solidFill>
+                <a:latin typeface="Calibri" pitchFamily="34" charset="0"/>
+                <a:ea typeface="Calibri" pitchFamily="34" charset="-122"/>
+                <a:cs typeface="Calibri" pitchFamily="34" charset="-120"/>
+              </a:rPr>
+              <a:t>Routinearbeit: Konfiguration, Gerüstcode, Dokumentation</a:t>
+            </a:r>
+            <a:endParaRPr lang="en-US" sz="1250" dirty="0"/>
+          </a:p>
+        </p:txBody>
+      </p:sp>
+      <p:sp>
+        <p:nvSpPr>
+          <p:cNvPr id="8" name="Shape 6"/>
+          <p:cNvSpPr/>
+          <p:nvPr/>
+        </p:nvSpPr>
+        <p:spPr>
+          <a:xfrm>
+            <a:off x="6324448" y="1600200"/>
+            <a:ext cx="5227168" cy="2286000"/>
           </a:xfrm>
           <a:prstGeom prst="roundRect">
             <a:avLst>
-              <a:gd name="adj" fmla="val 1818"/>
+              <a:gd name="adj" fmla="val 3200"/>
             </a:avLst>
           </a:prstGeom>
           <a:solidFill>
@@ -8378,34 +10641,201 @@
       </p:sp>
       <p:sp>
         <p:nvSpPr>
+          <p:cNvPr id="9" name="Text 7"/>
+          <p:cNvSpPr/>
+          <p:nvPr/>
+        </p:nvSpPr>
+        <p:spPr>
+          <a:xfrm>
+            <a:off x="6644488" y="1810512"/>
+            <a:ext cx="4587088" cy="320040"/>
+          </a:xfrm>
+          <a:prstGeom prst="rect">
+            <a:avLst/>
+          </a:prstGeom>
+          <a:noFill/>
+          <a:ln/>
+        </p:spPr>
+        <p:txBody>
+          <a:bodyPr wrap="square" lIns="0" tIns="0" rIns="0" bIns="0" rtlCol="0" anchor="ctr"/>
+          <a:lstStyle/>
+          <a:p>
+            <a:pPr indent="0" marL="0">
+              <a:buNone/>
+            </a:pPr>
+            <a:r>
+              <a:rPr lang="en-US" sz="1500" b="1" dirty="0">
+                <a:solidFill>
+                  <a:srgbClr val="111827"/>
+                </a:solidFill>
+                <a:latin typeface="Calibri" pitchFamily="34" charset="0"/>
+                <a:ea typeface="Calibri" pitchFamily="34" charset="-122"/>
+                <a:cs typeface="Calibri" pitchFamily="34" charset="-120"/>
+              </a:rPr>
+              <a:t>Wo wir aufpassen mussten</a:t>
+            </a:r>
+            <a:endParaRPr lang="en-US" sz="1500" dirty="0"/>
+          </a:p>
+        </p:txBody>
+      </p:sp>
+      <p:sp>
+        <p:nvSpPr>
+          <p:cNvPr id="10" name="Text 8"/>
+          <p:cNvSpPr/>
+          <p:nvPr/>
+        </p:nvSpPr>
+        <p:spPr>
+          <a:xfrm>
+            <a:off x="6644488" y="2212848"/>
+            <a:ext cx="4587088" cy="1554480"/>
+          </a:xfrm>
+          <a:prstGeom prst="rect">
+            <a:avLst/>
+          </a:prstGeom>
+          <a:noFill/>
+          <a:ln/>
+        </p:spPr>
+        <p:txBody>
+          <a:bodyPr wrap="square" lIns="0" tIns="0" rIns="0" bIns="0" rtlCol="0" anchor="t"/>
+          <a:lstStyle/>
+          <a:p>
+            <a:pPr marL="342900" indent="-342900">
+              <a:spcAft>
+                <a:spcPts val="700"/>
+              </a:spcAft>
+              <a:buSzPct val="100000"/>
+              <a:buChar char="•"/>
+            </a:pPr>
+            <a:r>
+              <a:rPr lang="en-US" sz="1250" dirty="0">
+                <a:solidFill>
+                  <a:srgbClr val="374151"/>
+                </a:solidFill>
+                <a:latin typeface="Calibri" pitchFamily="34" charset="0"/>
+                <a:ea typeface="Calibri" pitchFamily="34" charset="-122"/>
+                <a:cs typeface="Calibri" pitchFamily="34" charset="-120"/>
+              </a:rPr>
+              <a:t>Überzeugend formulierte Lösungen, die an der Aufgabe vorbeigehen</a:t>
+            </a:r>
+            <a:endParaRPr lang="en-US" sz="1250" dirty="0"/>
+          </a:p>
+          <a:p>
+            <a:pPr marL="342900" indent="-342900">
+              <a:spcAft>
+                <a:spcPts val="700"/>
+              </a:spcAft>
+              <a:buSzPct val="100000"/>
+              <a:buChar char="•"/>
+            </a:pPr>
+            <a:r>
+              <a:rPr lang="en-US" sz="1250" dirty="0">
+                <a:solidFill>
+                  <a:srgbClr val="374151"/>
+                </a:solidFill>
+                <a:latin typeface="Calibri" pitchFamily="34" charset="0"/>
+                <a:ea typeface="Calibri" pitchFamily="34" charset="-122"/>
+                <a:cs typeface="Calibri" pitchFamily="34" charset="-120"/>
+              </a:rPr>
+              <a:t>Veraltete Annahmen über Versionen und Bezugsquellen</a:t>
+            </a:r>
+            <a:endParaRPr lang="en-US" sz="1250" dirty="0"/>
+          </a:p>
+          <a:p>
+            <a:pPr marL="342900" indent="-342900">
+              <a:spcAft>
+                <a:spcPts val="700"/>
+              </a:spcAft>
+              <a:buSzPct val="100000"/>
+              <a:buChar char="•"/>
+            </a:pPr>
+            <a:r>
+              <a:rPr lang="en-US" sz="1250" dirty="0">
+                <a:solidFill>
+                  <a:srgbClr val="374151"/>
+                </a:solidFill>
+                <a:latin typeface="Calibri" pitchFamily="34" charset="0"/>
+                <a:ea typeface="Calibri" pitchFamily="34" charset="-122"/>
+                <a:cs typeface="Calibri" pitchFamily="34" charset="-120"/>
+              </a:rPr>
+              <a:t>Kein Wissen über den Zustand unseres Rechners</a:t>
+            </a:r>
+            <a:endParaRPr lang="en-US" sz="1250" dirty="0"/>
+          </a:p>
+          <a:p>
+            <a:pPr marL="342900" indent="-342900">
+              <a:spcAft>
+                <a:spcPts val="700"/>
+              </a:spcAft>
+              <a:buSzPct val="100000"/>
+              <a:buChar char="•"/>
+            </a:pPr>
+            <a:r>
+              <a:rPr lang="en-US" sz="1250" dirty="0">
+                <a:solidFill>
+                  <a:srgbClr val="374151"/>
+                </a:solidFill>
+                <a:latin typeface="Calibri" pitchFamily="34" charset="0"/>
+                <a:ea typeface="Calibri" pitchFamily="34" charset="-122"/>
+                <a:cs typeface="Calibri" pitchFamily="34" charset="-120"/>
+              </a:rPr>
+              <a:t>Kein Ersatz für den Test auf echter Hardware</a:t>
+            </a:r>
+            <a:endParaRPr lang="en-US" sz="1250" dirty="0"/>
+          </a:p>
+        </p:txBody>
+      </p:sp>
+      <p:sp>
+        <p:nvSpPr>
           <p:cNvPr id="11" name="Shape 9"/>
           <p:cNvSpPr/>
           <p:nvPr/>
         </p:nvSpPr>
         <p:spPr>
           <a:xfrm>
-            <a:off x="6644488" y="1874520"/>
-            <a:ext cx="384048" cy="384048"/>
+            <a:off x="640080" y="4114800"/>
+            <a:ext cx="10911535" cy="1783080"/>
+          </a:xfrm>
+          <a:prstGeom prst="roundRect">
+            <a:avLst>
+              <a:gd name="adj" fmla="val 4103"/>
+            </a:avLst>
+          </a:prstGeom>
+          <a:solidFill>
+            <a:srgbClr val="0F1419"/>
+          </a:solidFill>
+          <a:ln/>
+        </p:spPr>
+      </p:sp>
+      <p:sp>
+        <p:nvSpPr>
+          <p:cNvPr id="12" name="Shape 10"/>
+          <p:cNvSpPr/>
+          <p:nvPr/>
+        </p:nvSpPr>
+        <p:spPr>
+          <a:xfrm>
+            <a:off x="1005840" y="4416552"/>
+            <a:ext cx="146304" cy="146304"/>
           </a:xfrm>
           <a:prstGeom prst="ellipse">
             <a:avLst/>
           </a:prstGeom>
           <a:solidFill>
-            <a:srgbClr val="2F6FED"/>
+            <a:srgbClr val="E23E3E"/>
           </a:solidFill>
           <a:ln/>
         </p:spPr>
       </p:sp>
       <p:sp>
         <p:nvSpPr>
-          <p:cNvPr id="12" name="Text 10"/>
-          <p:cNvSpPr/>
-          <p:nvPr/>
-        </p:nvSpPr>
-        <p:spPr>
-          <a:xfrm>
-            <a:off x="6644488" y="1874520"/>
-            <a:ext cx="384048" cy="384048"/>
+          <p:cNvPr id="13" name="Text 11"/>
+          <p:cNvSpPr/>
+          <p:nvPr/>
+        </p:nvSpPr>
+        <p:spPr>
+          <a:xfrm>
+            <a:off x="1298448" y="4315968"/>
+            <a:ext cx="9814255" cy="365760"/>
           </a:xfrm>
           <a:prstGeom prst="rect">
             <a:avLst/>
@@ -8417,7 +10847,7 @@
           <a:bodyPr wrap="square" lIns="0" tIns="0" rIns="0" bIns="0" rtlCol="0" anchor="ctr"/>
           <a:lstStyle/>
           <a:p>
-            <a:pPr algn="ctr" indent="0" marL="0">
+            <a:pPr indent="0" marL="0">
               <a:buNone/>
             </a:pPr>
             <a:r>
@@ -8429,7 +10859,7 @@
                 <a:ea typeface="Calibri" pitchFamily="34" charset="-122"/>
                 <a:cs typeface="Calibri" pitchFamily="34" charset="-120"/>
               </a:rPr>
-              <a:t>2</a:t>
+              <a:t>Unsere Regel daraus</a:t>
             </a:r>
             <a:endParaRPr lang="en-US" sz="1500" dirty="0"/>
           </a:p>
@@ -8437,53 +10867,14 @@
       </p:sp>
       <p:sp>
         <p:nvSpPr>
-          <p:cNvPr id="13" name="Text 11"/>
-          <p:cNvSpPr/>
-          <p:nvPr/>
-        </p:nvSpPr>
-        <p:spPr>
-          <a:xfrm>
-            <a:off x="7147408" y="1874520"/>
-            <a:ext cx="4084168" cy="411480"/>
-          </a:xfrm>
-          <a:prstGeom prst="rect">
-            <a:avLst/>
-          </a:prstGeom>
-          <a:noFill/>
-          <a:ln/>
-        </p:spPr>
-        <p:txBody>
-          <a:bodyPr wrap="square" lIns="0" tIns="0" rIns="0" bIns="0" rtlCol="0" anchor="ctr"/>
-          <a:lstStyle/>
-          <a:p>
-            <a:pPr indent="0" marL="0">
-              <a:buNone/>
-            </a:pPr>
-            <a:r>
-              <a:rPr lang="en-US" sz="1500" b="1" dirty="0">
-                <a:solidFill>
-                  <a:srgbClr val="111827"/>
-                </a:solidFill>
-                <a:latin typeface="Calibri" pitchFamily="34" charset="0"/>
-                <a:ea typeface="Calibri" pitchFamily="34" charset="-122"/>
-                <a:cs typeface="Calibri" pitchFamily="34" charset="-120"/>
-              </a:rPr>
-              <a:t>Die Java-Version zwischen zwei Stühlen</a:t>
-            </a:r>
-            <a:endParaRPr lang="en-US" sz="1500" dirty="0"/>
-          </a:p>
-        </p:txBody>
-      </p:sp>
-      <p:sp>
-        <p:nvSpPr>
           <p:cNvPr id="14" name="Text 12"/>
           <p:cNvSpPr/>
           <p:nvPr/>
         </p:nvSpPr>
         <p:spPr>
           <a:xfrm>
-            <a:off x="6644488" y="2423160"/>
-            <a:ext cx="4587088" cy="3017520"/>
+            <a:off x="1005840" y="4754880"/>
+            <a:ext cx="10180015" cy="960120"/>
           </a:xfrm>
           <a:prstGeom prst="rect">
             <a:avLst/>
@@ -8499,40 +10890,17 @@
               <a:buNone/>
             </a:pPr>
             <a:r>
-              <a:rPr lang="en-US" sz="1300" dirty="0">
-                <a:solidFill>
-                  <a:srgbClr val="374151"/>
-                </a:solidFill>
-                <a:latin typeface="Calibri" pitchFamily="34" charset="0"/>
-                <a:ea typeface="Calibri" pitchFamily="34" charset="-122"/>
-                <a:cs typeface="Calibri" pitchFamily="34" charset="-120"/>
-              </a:rPr>
-              <a:t>Der Build verlangt eine ganz bestimmte Java-Version. Zu alt und zu neu scheitern beide — mit Meldungen, die den Zusammenhang nicht erkennen lassen.</a:t>
-            </a:r>
-            <a:endParaRPr lang="en-US" sz="1300" dirty="0"/>
-          </a:p>
-          <a:p>
-            <a:pPr indent="0" marL="0">
-              <a:buNone/>
-            </a:pPr>
-            <a:endParaRPr lang="en-US" sz="1300" dirty="0"/>
-          </a:p>
-          <a:p>
-            <a:pPr indent="0" marL="0">
-              <a:buNone/>
-            </a:pPr>
-            <a:r>
-              <a:rPr lang="en-US" sz="1300" dirty="0">
-                <a:solidFill>
-                  <a:srgbClr val="374151"/>
-                </a:solidFill>
-                <a:latin typeface="Calibri" pitchFamily="34" charset="0"/>
-                <a:ea typeface="Calibri" pitchFamily="34" charset="-122"/>
-                <a:cs typeface="Calibri" pitchFamily="34" charset="-120"/>
-              </a:rPr>
-              <a:t>Gelöst durch eine feste Vorgabe im Projekt: Das Build-System lädt sich die passende Version selbst herunter. Damit funktioniert der Build auf jedem Rechner gleich — auch beim Korrektor.</a:t>
-            </a:r>
-            <a:endParaRPr lang="en-US" sz="1300" dirty="0"/>
+              <a:rPr lang="en-US" sz="1350" dirty="0">
+                <a:solidFill>
+                  <a:srgbClr val="D1D5DB"/>
+                </a:solidFill>
+                <a:latin typeface="Calibri" pitchFamily="34" charset="0"/>
+                <a:ea typeface="Calibri" pitchFamily="34" charset="-122"/>
+                <a:cs typeface="Calibri" pitchFamily="34" charset="-120"/>
+              </a:rPr>
+              <a:t>Ein Agent liefert einen Vorschlag, kein Ergebnis. Die Aufgabenstellung bleibt das Prüfkriterium — nicht die Frage, ob der Code läuft. Wir haben nach der Kurskorrektur jede Anforderung einzeln gegen den Code abgeglichen statt gegen den Eindruck, dass es funktioniert.</a:t>
+            </a:r>
+            <a:endParaRPr lang="en-US" sz="1350" dirty="0"/>
           </a:p>
         </p:txBody>
       </p:sp>
@@ -8621,7 +10989,7 @@
                 <a:ea typeface="Cambria" pitchFamily="34" charset="-122"/>
                 <a:cs typeface="Cambria" pitchFamily="34" charset="-120"/>
               </a:rPr>
-              <a:t>Problem 3: Eigenheiten der Plattform</a:t>
+              <a:t>Problem 1: Die Lösung war fertig — und falsch</a:t>
             </a:r>
             <a:endParaRPr lang="en-US" sz="3200" dirty="0"/>
           </a:p>
@@ -8635,12 +11003,12 @@
         </p:nvSpPr>
         <p:spPr>
           <a:xfrm>
-            <a:off x="640080" y="1600200"/>
-            <a:ext cx="10911535" cy="1371600"/>
+            <a:off x="640080" y="1554480"/>
+            <a:ext cx="5227168" cy="3200400"/>
           </a:xfrm>
           <a:prstGeom prst="roundRect">
             <a:avLst>
-              <a:gd name="adj" fmla="val 5333"/>
+              <a:gd name="adj" fmla="val 2286"/>
             </a:avLst>
           </a:prstGeom>
           <a:solidFill>
@@ -8651,23 +11019,42 @@
       </p:sp>
       <p:sp>
         <p:nvSpPr>
-          <p:cNvPr id="5" name="Shape 3"/>
-          <p:cNvSpPr/>
-          <p:nvPr/>
-        </p:nvSpPr>
-        <p:spPr>
-          <a:xfrm>
-            <a:off x="960120" y="1892808"/>
-            <a:ext cx="384048" cy="384048"/>
-          </a:xfrm>
-          <a:prstGeom prst="ellipse">
-            <a:avLst/>
-          </a:prstGeom>
-          <a:solidFill>
-            <a:srgbClr val="2F6FED"/>
-          </a:solidFill>
-          <a:ln/>
-        </p:spPr>
+          <p:cNvPr id="5" name="Text 3"/>
+          <p:cNvSpPr/>
+          <p:nvPr/>
+        </p:nvSpPr>
+        <p:spPr>
+          <a:xfrm>
+            <a:off x="960120" y="1783080"/>
+            <a:ext cx="4587088" cy="320040"/>
+          </a:xfrm>
+          <a:prstGeom prst="rect">
+            <a:avLst/>
+          </a:prstGeom>
+          <a:noFill/>
+          <a:ln/>
+        </p:spPr>
+        <p:txBody>
+          <a:bodyPr wrap="square" lIns="0" tIns="0" rIns="0" bIns="0" rtlCol="0" anchor="ctr"/>
+          <a:lstStyle/>
+          <a:p>
+            <a:pPr indent="0" marL="0">
+              <a:buNone/>
+            </a:pPr>
+            <a:r>
+              <a:rPr lang="en-US" sz="1500" b="1" dirty="0">
+                <a:solidFill>
+                  <a:srgbClr val="E23E3E"/>
+                </a:solidFill>
+                <a:latin typeface="Calibri" pitchFamily="34" charset="0"/>
+                <a:ea typeface="Calibri" pitchFamily="34" charset="-122"/>
+                <a:cs typeface="Calibri" pitchFamily="34" charset="-120"/>
+              </a:rPr>
+              <a:t>Was wir hatten</a:t>
+            </a:r>
+            <a:endParaRPr lang="en-US" sz="1500" dirty="0"/>
+          </a:p>
+        </p:txBody>
       </p:sp>
       <p:sp>
         <p:nvSpPr>
@@ -8677,86 +11064,8 @@
         </p:nvSpPr>
         <p:spPr>
           <a:xfrm>
-            <a:off x="960120" y="1892808"/>
-            <a:ext cx="384048" cy="384048"/>
-          </a:xfrm>
-          <a:prstGeom prst="rect">
-            <a:avLst/>
-          </a:prstGeom>
-          <a:noFill/>
-          <a:ln/>
-        </p:spPr>
-        <p:txBody>
-          <a:bodyPr wrap="square" lIns="0" tIns="0" rIns="0" bIns="0" rtlCol="0" anchor="ctr"/>
-          <a:lstStyle/>
-          <a:p>
-            <a:pPr algn="ctr" indent="0" marL="0">
-              <a:buNone/>
-            </a:pPr>
-            <a:r>
-              <a:rPr lang="en-US" sz="1500" b="1" dirty="0">
-                <a:solidFill>
-                  <a:srgbClr val="FFFFFF"/>
-                </a:solidFill>
-                <a:latin typeface="Calibri" pitchFamily="34" charset="0"/>
-                <a:ea typeface="Calibri" pitchFamily="34" charset="-122"/>
-                <a:cs typeface="Calibri" pitchFamily="34" charset="-120"/>
-              </a:rPr>
-              <a:t>1</a:t>
-            </a:r>
-            <a:endParaRPr lang="en-US" sz="1500" dirty="0"/>
-          </a:p>
-        </p:txBody>
-      </p:sp>
-      <p:sp>
-        <p:nvSpPr>
-          <p:cNvPr id="7" name="Text 5"/>
-          <p:cNvSpPr/>
-          <p:nvPr/>
-        </p:nvSpPr>
-        <p:spPr>
-          <a:xfrm>
-            <a:off x="1508760" y="1801368"/>
-            <a:ext cx="9677095" cy="320040"/>
-          </a:xfrm>
-          <a:prstGeom prst="rect">
-            <a:avLst/>
-          </a:prstGeom>
-          <a:noFill/>
-          <a:ln/>
-        </p:spPr>
-        <p:txBody>
-          <a:bodyPr wrap="square" lIns="0" tIns="0" rIns="0" bIns="0" rtlCol="0" anchor="ctr"/>
-          <a:lstStyle/>
-          <a:p>
-            <a:pPr indent="0" marL="0">
-              <a:buNone/>
-            </a:pPr>
-            <a:r>
-              <a:rPr lang="en-US" sz="1500" b="1" dirty="0">
-                <a:solidFill>
-                  <a:srgbClr val="111827"/>
-                </a:solidFill>
-                <a:latin typeface="Calibri" pitchFamily="34" charset="0"/>
-                <a:ea typeface="Calibri" pitchFamily="34" charset="-122"/>
-                <a:cs typeface="Calibri" pitchFamily="34" charset="-120"/>
-              </a:rPr>
-              <a:t>Teilen scheiterte am Sicherheitsmodell</a:t>
-            </a:r>
-            <a:endParaRPr lang="en-US" sz="1500" dirty="0"/>
-          </a:p>
-        </p:txBody>
-      </p:sp>
-      <p:sp>
-        <p:nvSpPr>
-          <p:cNvPr id="8" name="Text 6"/>
-          <p:cNvSpPr/>
-          <p:nvPr/>
-        </p:nvSpPr>
-        <p:spPr>
-          <a:xfrm>
-            <a:off x="1508760" y="2148840"/>
-            <a:ext cx="9677095" cy="731520"/>
+            <a:off x="960120" y="2194560"/>
+            <a:ext cx="4587088" cy="2286000"/>
           </a:xfrm>
           <a:prstGeom prst="rect">
             <a:avLst/>
@@ -8768,11 +11077,15 @@
           <a:bodyPr wrap="square" lIns="0" tIns="0" rIns="0" bIns="0" rtlCol="0" anchor="t"/>
           <a:lstStyle/>
           <a:p>
-            <a:pPr indent="0" marL="0">
-              <a:buNone/>
-            </a:pPr>
-            <a:r>
-              <a:rPr lang="en-US" sz="1250" dirty="0">
+            <a:pPr marL="342900" indent="-342900">
+              <a:spcAft>
+                <a:spcPts val="900"/>
+              </a:spcAft>
+              <a:buSzPct val="100000"/>
+              <a:buChar char="•"/>
+            </a:pPr>
+            <a:r>
+              <a:rPr lang="en-US" sz="1350" dirty="0">
                 <a:solidFill>
                   <a:srgbClr val="374151"/>
                 </a:solidFill>
@@ -8780,64 +11093,107 @@
                 <a:ea typeface="Calibri" pitchFamily="34" charset="-122"/>
                 <a:cs typeface="Calibri" pitchFamily="34" charset="-120"/>
               </a:rPr>
-              <a:t>Android verbietet es, den eigenen Dateipfad an eine fremde App weiterzureichen. Es braucht einen kontrollierten Zugriffsweg, der ausdrücklich freigegeben werden muss. Ohne diese Freigabe bricht das Teilen ab — die Meldung nennt aber nur eine Ausnahme, keine Ursache.</a:t>
-            </a:r>
-            <a:endParaRPr lang="en-US" sz="1250" dirty="0"/>
-          </a:p>
-        </p:txBody>
-      </p:sp>
-      <p:sp>
-        <p:nvSpPr>
-          <p:cNvPr id="9" name="Shape 7"/>
-          <p:cNvSpPr/>
-          <p:nvPr/>
-        </p:nvSpPr>
-        <p:spPr>
-          <a:xfrm>
-            <a:off x="640080" y="3108960"/>
-            <a:ext cx="10911535" cy="1371600"/>
+              <a:t>Eine native Android-App in Kotlin</a:t>
+            </a:r>
+            <a:endParaRPr lang="en-US" sz="1350" dirty="0"/>
+          </a:p>
+          <a:p>
+            <a:pPr marL="342900" indent="-342900">
+              <a:spcAft>
+                <a:spcPts val="900"/>
+              </a:spcAft>
+              <a:buSzPct val="100000"/>
+              <a:buChar char="•"/>
+            </a:pPr>
+            <a:r>
+              <a:rPr lang="en-US" sz="1350" dirty="0">
+                <a:solidFill>
+                  <a:srgbClr val="374151"/>
+                </a:solidFill>
+                <a:latin typeface="Calibri" pitchFamily="34" charset="0"/>
+                <a:ea typeface="Calibri" pitchFamily="34" charset="-122"/>
+                <a:cs typeface="Calibri" pitchFamily="34" charset="-120"/>
+              </a:rPr>
+              <a:t>Alle elf Anforderungen sichtbar erfüllt</a:t>
+            </a:r>
+            <a:endParaRPr lang="en-US" sz="1350" dirty="0"/>
+          </a:p>
+          <a:p>
+            <a:pPr marL="342900" indent="-342900">
+              <a:spcAft>
+                <a:spcPts val="900"/>
+              </a:spcAft>
+              <a:buSzPct val="100000"/>
+              <a:buChar char="•"/>
+            </a:pPr>
+            <a:r>
+              <a:rPr lang="en-US" sz="1350" dirty="0">
+                <a:solidFill>
+                  <a:srgbClr val="374151"/>
+                </a:solidFill>
+                <a:latin typeface="Calibri" pitchFamily="34" charset="0"/>
+                <a:ea typeface="Calibri" pitchFamily="34" charset="-122"/>
+                <a:cs typeface="Calibri" pitchFamily="34" charset="-120"/>
+              </a:rPr>
+              <a:t>Lief einwandfrei auf dem Gerät</a:t>
+            </a:r>
+            <a:endParaRPr lang="en-US" sz="1350" dirty="0"/>
+          </a:p>
+          <a:p>
+            <a:pPr marL="342900" indent="-342900">
+              <a:spcAft>
+                <a:spcPts val="900"/>
+              </a:spcAft>
+              <a:buSzPct val="100000"/>
+              <a:buChar char="•"/>
+            </a:pPr>
+            <a:r>
+              <a:rPr lang="en-US" sz="1350" dirty="0">
+                <a:solidFill>
+                  <a:srgbClr val="374151"/>
+                </a:solidFill>
+                <a:latin typeface="Calibri" pitchFamily="34" charset="0"/>
+                <a:ea typeface="Calibri" pitchFamily="34" charset="-122"/>
+                <a:cs typeface="Calibri" pitchFamily="34" charset="-120"/>
+              </a:rPr>
+              <a:t>Die Plugins waren nachgebaut statt eingebunden</a:t>
+            </a:r>
+            <a:endParaRPr lang="en-US" sz="1350" dirty="0"/>
+          </a:p>
+        </p:txBody>
+      </p:sp>
+      <p:sp>
+        <p:nvSpPr>
+          <p:cNvPr id="7" name="Shape 5"/>
+          <p:cNvSpPr/>
+          <p:nvPr/>
+        </p:nvSpPr>
+        <p:spPr>
+          <a:xfrm>
+            <a:off x="6324448" y="1554480"/>
+            <a:ext cx="5227168" cy="3200400"/>
           </a:xfrm>
           <a:prstGeom prst="roundRect">
             <a:avLst>
-              <a:gd name="adj" fmla="val 5333"/>
+              <a:gd name="adj" fmla="val 2286"/>
             </a:avLst>
           </a:prstGeom>
           <a:solidFill>
-            <a:srgbClr val="F4F5F7"/>
+            <a:srgbClr val="0F1419"/>
           </a:solidFill>
           <a:ln/>
         </p:spPr>
       </p:sp>
       <p:sp>
         <p:nvSpPr>
-          <p:cNvPr id="10" name="Shape 8"/>
-          <p:cNvSpPr/>
-          <p:nvPr/>
-        </p:nvSpPr>
-        <p:spPr>
-          <a:xfrm>
-            <a:off x="960120" y="3401568"/>
-            <a:ext cx="384048" cy="384048"/>
-          </a:xfrm>
-          <a:prstGeom prst="ellipse">
-            <a:avLst/>
-          </a:prstGeom>
-          <a:solidFill>
-            <a:srgbClr val="E23E3E"/>
-          </a:solidFill>
-          <a:ln/>
-        </p:spPr>
-      </p:sp>
-      <p:sp>
-        <p:nvSpPr>
-          <p:cNvPr id="11" name="Text 9"/>
-          <p:cNvSpPr/>
-          <p:nvPr/>
-        </p:nvSpPr>
-        <p:spPr>
-          <a:xfrm>
-            <a:off x="960120" y="3401568"/>
-            <a:ext cx="384048" cy="384048"/>
+          <p:cNvPr id="8" name="Text 6"/>
+          <p:cNvSpPr/>
+          <p:nvPr/>
+        </p:nvSpPr>
+        <p:spPr>
+          <a:xfrm>
+            <a:off x="6644488" y="1783080"/>
+            <a:ext cx="4587088" cy="320040"/>
           </a:xfrm>
           <a:prstGeom prst="rect">
             <a:avLst/>
@@ -8849,7 +11205,7 @@
           <a:bodyPr wrap="square" lIns="0" tIns="0" rIns="0" bIns="0" rtlCol="0" anchor="ctr"/>
           <a:lstStyle/>
           <a:p>
-            <a:pPr algn="ctr" indent="0" marL="0">
+            <a:pPr indent="0" marL="0">
               <a:buNone/>
             </a:pPr>
             <a:r>
@@ -8861,7 +11217,7 @@
                 <a:ea typeface="Calibri" pitchFamily="34" charset="-122"/>
                 <a:cs typeface="Calibri" pitchFamily="34" charset="-120"/>
               </a:rPr>
-              <a:t>2</a:t>
+              <a:t>Was gefordert war</a:t>
             </a:r>
             <a:endParaRPr lang="en-US" sz="1500" dirty="0"/>
           </a:p>
@@ -8869,14 +11225,120 @@
       </p:sp>
       <p:sp>
         <p:nvSpPr>
-          <p:cNvPr id="12" name="Text 10"/>
-          <p:cNvSpPr/>
-          <p:nvPr/>
-        </p:nvSpPr>
-        <p:spPr>
-          <a:xfrm>
-            <a:off x="1508760" y="3310128"/>
-            <a:ext cx="9677095" cy="320040"/>
+          <p:cNvPr id="9" name="Text 7"/>
+          <p:cNvSpPr/>
+          <p:nvPr/>
+        </p:nvSpPr>
+        <p:spPr>
+          <a:xfrm>
+            <a:off x="6644488" y="2194560"/>
+            <a:ext cx="4587088" cy="2286000"/>
+          </a:xfrm>
+          <a:prstGeom prst="rect">
+            <a:avLst/>
+          </a:prstGeom>
+          <a:noFill/>
+          <a:ln/>
+        </p:spPr>
+        <p:txBody>
+          <a:bodyPr wrap="square" lIns="0" tIns="0" rIns="0" bIns="0" rtlCol="0" anchor="t"/>
+          <a:lstStyle/>
+          <a:p>
+            <a:pPr marL="342900" indent="-342900">
+              <a:spcAft>
+                <a:spcPts val="900"/>
+              </a:spcAft>
+              <a:buSzPct val="100000"/>
+              <a:buChar char="•"/>
+            </a:pPr>
+            <a:r>
+              <a:rPr lang="en-US" sz="1350" dirty="0">
+                <a:solidFill>
+                  <a:srgbClr val="E5E7EB"/>
+                </a:solidFill>
+                <a:latin typeface="Calibri" pitchFamily="34" charset="0"/>
+                <a:ea typeface="Calibri" pitchFamily="34" charset="-122"/>
+                <a:cs typeface="Calibri" pitchFamily="34" charset="-120"/>
+              </a:rPr>
+              <a:t>Eine hybride App mit Ionic Capacitor</a:t>
+            </a:r>
+            <a:endParaRPr lang="en-US" sz="1350" dirty="0"/>
+          </a:p>
+          <a:p>
+            <a:pPr marL="342900" indent="-342900">
+              <a:spcAft>
+                <a:spcPts val="900"/>
+              </a:spcAft>
+              <a:buSzPct val="100000"/>
+              <a:buChar char="•"/>
+            </a:pPr>
+            <a:r>
+              <a:rPr lang="en-US" sz="1350" dirty="0">
+                <a:solidFill>
+                  <a:srgbClr val="E5E7EB"/>
+                </a:solidFill>
+                <a:latin typeface="Calibri" pitchFamily="34" charset="0"/>
+                <a:ea typeface="Calibri" pitchFamily="34" charset="-122"/>
+                <a:cs typeface="Calibri" pitchFamily="34" charset="-120"/>
+              </a:rPr>
+              <a:t>Die fünf genannten Plugins im Einsatz</a:t>
+            </a:r>
+            <a:endParaRPr lang="en-US" sz="1350" dirty="0"/>
+          </a:p>
+          <a:p>
+            <a:pPr marL="342900" indent="-342900">
+              <a:spcAft>
+                <a:spcPts val="900"/>
+              </a:spcAft>
+              <a:buSzPct val="100000"/>
+              <a:buChar char="•"/>
+            </a:pPr>
+            <a:r>
+              <a:rPr lang="en-US" sz="1350" dirty="0">
+                <a:solidFill>
+                  <a:srgbClr val="E5E7EB"/>
+                </a:solidFill>
+                <a:latin typeface="Calibri" pitchFamily="34" charset="0"/>
+                <a:ea typeface="Calibri" pitchFamily="34" charset="-122"/>
+                <a:cs typeface="Calibri" pitchFamily="34" charset="-120"/>
+              </a:rPr>
+              <a:t>Modul heißt „Hybride App-Entwicklung"</a:t>
+            </a:r>
+            <a:endParaRPr lang="en-US" sz="1350" dirty="0"/>
+          </a:p>
+          <a:p>
+            <a:pPr marL="342900" indent="-342900">
+              <a:spcAft>
+                <a:spcPts val="900"/>
+              </a:spcAft>
+              <a:buSzPct val="100000"/>
+              <a:buChar char="•"/>
+            </a:pPr>
+            <a:r>
+              <a:rPr lang="en-US" sz="1350" dirty="0">
+                <a:solidFill>
+                  <a:srgbClr val="E5E7EB"/>
+                </a:solidFill>
+                <a:latin typeface="Calibri" pitchFamily="34" charset="0"/>
+                <a:ea typeface="Calibri" pitchFamily="34" charset="-122"/>
+                <a:cs typeface="Calibri" pitchFamily="34" charset="-120"/>
+              </a:rPr>
+              <a:t>Die Lizenzschlüssel ergeben nur mit den echten Plugins Sinn</a:t>
+            </a:r>
+            <a:endParaRPr lang="en-US" sz="1350" dirty="0"/>
+          </a:p>
+        </p:txBody>
+      </p:sp>
+      <p:sp>
+        <p:nvSpPr>
+          <p:cNvPr id="10" name="Text 8"/>
+          <p:cNvSpPr/>
+          <p:nvPr/>
+        </p:nvSpPr>
+        <p:spPr>
+          <a:xfrm>
+            <a:off x="640080" y="5029200"/>
+            <a:ext cx="10911535" cy="822960"/>
           </a:xfrm>
           <a:prstGeom prst="rect">
             <a:avLst/>
@@ -8892,215 +11354,17 @@
               <a:buNone/>
             </a:pPr>
             <a:r>
-              <a:rPr lang="en-US" sz="1500" b="1" dirty="0">
+              <a:rPr lang="en-US" sz="1900" i="1" dirty="0">
                 <a:solidFill>
                   <a:srgbClr val="111827"/>
                 </a:solidFill>
-                <a:latin typeface="Calibri" pitchFamily="34" charset="0"/>
-                <a:ea typeface="Calibri" pitchFamily="34" charset="-122"/>
-                <a:cs typeface="Calibri" pitchFamily="34" charset="-120"/>
-              </a:rPr>
-              <a:t>Der Emulator hat kein Mikrofon</a:t>
-            </a:r>
-            <a:endParaRPr lang="en-US" sz="1500" dirty="0"/>
-          </a:p>
-        </p:txBody>
-      </p:sp>
-      <p:sp>
-        <p:nvSpPr>
-          <p:cNvPr id="13" name="Text 11"/>
-          <p:cNvSpPr/>
-          <p:nvPr/>
-        </p:nvSpPr>
-        <p:spPr>
-          <a:xfrm>
-            <a:off x="1508760" y="3657600"/>
-            <a:ext cx="9677095" cy="731520"/>
-          </a:xfrm>
-          <a:prstGeom prst="rect">
-            <a:avLst/>
-          </a:prstGeom>
-          <a:noFill/>
-          <a:ln/>
-        </p:spPr>
-        <p:txBody>
-          <a:bodyPr wrap="square" lIns="0" tIns="0" rIns="0" bIns="0" rtlCol="0" anchor="t"/>
-          <a:lstStyle/>
-          <a:p>
-            <a:pPr indent="0" marL="0">
-              <a:buNone/>
-            </a:pPr>
-            <a:r>
-              <a:rPr lang="en-US" sz="1250" dirty="0">
-                <a:solidFill>
-                  <a:srgbClr val="374151"/>
-                </a:solidFill>
-                <a:latin typeface="Calibri" pitchFamily="34" charset="0"/>
-                <a:ea typeface="Calibri" pitchFamily="34" charset="-122"/>
-                <a:cs typeface="Calibri" pitchFamily="34" charset="-120"/>
-              </a:rPr>
-              <a:t>Die Audioeingabe des Emulators ist standardmäßig abgeschaltet und muss erst auf das Mikrofon des Rechners umgeleitet werden. Für belastbare Aussagen zur Aufnahmequalität führt trotzdem kein Weg an echter Hardware vorbei — die Aufgabenstellung sagt das nicht ohne Grund.</a:t>
-            </a:r>
-            <a:endParaRPr lang="en-US" sz="1250" dirty="0"/>
-          </a:p>
-        </p:txBody>
-      </p:sp>
-      <p:sp>
-        <p:nvSpPr>
-          <p:cNvPr id="14" name="Shape 12"/>
-          <p:cNvSpPr/>
-          <p:nvPr/>
-        </p:nvSpPr>
-        <p:spPr>
-          <a:xfrm>
-            <a:off x="640080" y="4617720"/>
-            <a:ext cx="10911535" cy="1371600"/>
-          </a:xfrm>
-          <a:prstGeom prst="roundRect">
-            <a:avLst>
-              <a:gd name="adj" fmla="val 5333"/>
-            </a:avLst>
-          </a:prstGeom>
-          <a:solidFill>
-            <a:srgbClr val="F4F5F7"/>
-          </a:solidFill>
-          <a:ln/>
-        </p:spPr>
-      </p:sp>
-      <p:sp>
-        <p:nvSpPr>
-          <p:cNvPr id="15" name="Shape 13"/>
-          <p:cNvSpPr/>
-          <p:nvPr/>
-        </p:nvSpPr>
-        <p:spPr>
-          <a:xfrm>
-            <a:off x="960120" y="4910328"/>
-            <a:ext cx="384048" cy="384048"/>
-          </a:xfrm>
-          <a:prstGeom prst="ellipse">
-            <a:avLst/>
-          </a:prstGeom>
-          <a:solidFill>
-            <a:srgbClr val="2F6FED"/>
-          </a:solidFill>
-          <a:ln/>
-        </p:spPr>
-      </p:sp>
-      <p:sp>
-        <p:nvSpPr>
-          <p:cNvPr id="16" name="Text 14"/>
-          <p:cNvSpPr/>
-          <p:nvPr/>
-        </p:nvSpPr>
-        <p:spPr>
-          <a:xfrm>
-            <a:off x="960120" y="4910328"/>
-            <a:ext cx="384048" cy="384048"/>
-          </a:xfrm>
-          <a:prstGeom prst="rect">
-            <a:avLst/>
-          </a:prstGeom>
-          <a:noFill/>
-          <a:ln/>
-        </p:spPr>
-        <p:txBody>
-          <a:bodyPr wrap="square" lIns="0" tIns="0" rIns="0" bIns="0" rtlCol="0" anchor="ctr"/>
-          <a:lstStyle/>
-          <a:p>
-            <a:pPr algn="ctr" indent="0" marL="0">
-              <a:buNone/>
-            </a:pPr>
-            <a:r>
-              <a:rPr lang="en-US" sz="1500" b="1" dirty="0">
-                <a:solidFill>
-                  <a:srgbClr val="FFFFFF"/>
-                </a:solidFill>
-                <a:latin typeface="Calibri" pitchFamily="34" charset="0"/>
-                <a:ea typeface="Calibri" pitchFamily="34" charset="-122"/>
-                <a:cs typeface="Calibri" pitchFamily="34" charset="-120"/>
-              </a:rPr>
-              <a:t>3</a:t>
-            </a:r>
-            <a:endParaRPr lang="en-US" sz="1500" dirty="0"/>
-          </a:p>
-        </p:txBody>
-      </p:sp>
-      <p:sp>
-        <p:nvSpPr>
-          <p:cNvPr id="17" name="Text 15"/>
-          <p:cNvSpPr/>
-          <p:nvPr/>
-        </p:nvSpPr>
-        <p:spPr>
-          <a:xfrm>
-            <a:off x="1508760" y="4818888"/>
-            <a:ext cx="9677095" cy="320040"/>
-          </a:xfrm>
-          <a:prstGeom prst="rect">
-            <a:avLst/>
-          </a:prstGeom>
-          <a:noFill/>
-          <a:ln/>
-        </p:spPr>
-        <p:txBody>
-          <a:bodyPr wrap="square" lIns="0" tIns="0" rIns="0" bIns="0" rtlCol="0" anchor="ctr"/>
-          <a:lstStyle/>
-          <a:p>
-            <a:pPr indent="0" marL="0">
-              <a:buNone/>
-            </a:pPr>
-            <a:r>
-              <a:rPr lang="en-US" sz="1500" b="1" dirty="0">
-                <a:solidFill>
-                  <a:srgbClr val="111827"/>
-                </a:solidFill>
-                <a:latin typeface="Calibri" pitchFamily="34" charset="0"/>
-                <a:ea typeface="Calibri" pitchFamily="34" charset="-122"/>
-                <a:cs typeface="Calibri" pitchFamily="34" charset="-120"/>
-              </a:rPr>
-              <a:t>Aufnahmen landen zuerst im Zwischenspeicher</a:t>
-            </a:r>
-            <a:endParaRPr lang="en-US" sz="1500" dirty="0"/>
-          </a:p>
-        </p:txBody>
-      </p:sp>
-      <p:sp>
-        <p:nvSpPr>
-          <p:cNvPr id="18" name="Text 16"/>
-          <p:cNvSpPr/>
-          <p:nvPr/>
-        </p:nvSpPr>
-        <p:spPr>
-          <a:xfrm>
-            <a:off x="1508760" y="5166360"/>
-            <a:ext cx="9677095" cy="731520"/>
-          </a:xfrm>
-          <a:prstGeom prst="rect">
-            <a:avLst/>
-          </a:prstGeom>
-          <a:noFill/>
-          <a:ln/>
-        </p:spPr>
-        <p:txBody>
-          <a:bodyPr wrap="square" lIns="0" tIns="0" rIns="0" bIns="0" rtlCol="0" anchor="t"/>
-          <a:lstStyle/>
-          <a:p>
-            <a:pPr indent="0" marL="0">
-              <a:buNone/>
-            </a:pPr>
-            <a:r>
-              <a:rPr lang="en-US" sz="1250" dirty="0">
-                <a:solidFill>
-                  <a:srgbClr val="374151"/>
-                </a:solidFill>
-                <a:latin typeface="Calibri" pitchFamily="34" charset="0"/>
-                <a:ea typeface="Calibri" pitchFamily="34" charset="-122"/>
-                <a:cs typeface="Calibri" pitchFamily="34" charset="-120"/>
-              </a:rPr>
-              <a:t>Das Recorder-Plugin schreibt in einen Bereich, den Android jederzeit leeren darf. Wer die Datei dort liegen lässt, verliert sie irgendwann. Der Umweg über Kopieren und Umbenennen ist kein Selbstzweck, sondern die Bedingung für Persistenz.</a:t>
-            </a:r>
-            <a:endParaRPr lang="en-US" sz="1250" dirty="0"/>
+                <a:latin typeface="Cambria" pitchFamily="34" charset="0"/>
+                <a:ea typeface="Cambria" pitchFamily="34" charset="-122"/>
+                <a:cs typeface="Cambria" pitchFamily="34" charset="-120"/>
+              </a:rPr>
+              <a:t>Eine App, die tut was sie soll, kann die Aufgabe trotzdem verfehlen. „Funktioniert" ist kein Abnahmekriterium.</a:t>
+            </a:r>
+            <a:endParaRPr lang="en-US" sz="1900" dirty="0"/>
           </a:p>
         </p:txBody>
       </p:sp>

--- a/praesentation/Audio-Recorder-App-Praesentation.pptx
+++ b/praesentation/Audio-Recorder-App-Praesentation.pptx
@@ -2512,7 +2512,7 @@
                 <a:ea typeface="Calibri" pitchFamily="34" charset="-122"/>
                 <a:cs typeface="Calibri" pitchFamily="34" charset="-120"/>
               </a:rPr>
-              <a:t>Grötzinger</a:t>
+              <a:t>Grözinger</a:t>
             </a:r>
             <a:r>
               <a:rPr lang="en-US" sz="1300" dirty="0">
